--- a/ACER_FY27_AOP.pptx
+++ b/ACER_FY27_AOP.pptx
@@ -113,6 +113,3417 @@
     </a:lvl9pPr>
   </p:defaultTextStyle>
 </p:presentation>
+</file>
+
+<file path=ppt/charts/chart1.xml><?xml version="1.0" encoding="utf-8"?>
+<c:chartSpace xmlns:c="http://schemas.openxmlformats.org/drawingml/2006/chart" xmlns:a="http://schemas.openxmlformats.org/drawingml/2006/main" xmlns:r="http://schemas.openxmlformats.org/officeDocument/2006/relationships">
+  <c:date1904 val="0"/>
+  <c:roundedCorners val="1"/>
+  <c:chart>
+    <c:autoTitleDeleted val="1"/>
+    <c:plotArea>
+      <c:layout/>
+      <c:doughnutChart>
+        <c:varyColors val="1"/>
+        <c:ser>
+          <c:idx val="0"/>
+          <c:order val="0"/>
+          <c:tx>
+            <c:strRef>
+              <c:f>Sheet1!$B$1</c:f>
+              <c:strCache>
+                <c:ptCount val="1"/>
+                <c:pt idx="0">
+                  <c:v>Cost</c:v>
+                </c:pt>
+              </c:strCache>
+            </c:strRef>
+          </c:tx>
+          <c:spPr>
+            <a:solidFill>
+              <a:schemeClr val="accent1"/>
+            </a:solidFill>
+            <a:ln w="9525" cap="flat">
+              <a:solidFill>
+                <a:srgbClr val="F9F9F9"/>
+              </a:solidFill>
+              <a:prstDash val="solid"/>
+              <a:round/>
+            </a:ln>
+            <a:effectLst/>
+          </c:spPr>
+          <c:dPt>
+            <c:idx val="0"/>
+            <c:bubble3D val="0"/>
+            <c:spPr>
+              <a:solidFill>
+                <a:srgbClr val="1E3A8A"/>
+              </a:solidFill>
+              <a:effectLst/>
+            </c:spPr>
+          </c:dPt>
+          <c:dPt>
+            <c:idx val="1"/>
+            <c:bubble3D val="0"/>
+            <c:spPr>
+              <a:solidFill>
+                <a:srgbClr val="0D9488"/>
+              </a:solidFill>
+              <a:effectLst/>
+            </c:spPr>
+          </c:dPt>
+          <c:dPt>
+            <c:idx val="2"/>
+            <c:bubble3D val="0"/>
+            <c:spPr>
+              <a:solidFill>
+                <a:srgbClr val="7C3AED"/>
+              </a:solidFill>
+              <a:effectLst/>
+            </c:spPr>
+          </c:dPt>
+          <c:dPt>
+            <c:idx val="3"/>
+            <c:bubble3D val="0"/>
+            <c:spPr>
+              <a:solidFill>
+                <a:srgbClr val="F59E0B"/>
+              </a:solidFill>
+              <a:effectLst/>
+            </c:spPr>
+          </c:dPt>
+          <c:dPt>
+            <c:idx val="4"/>
+            <c:bubble3D val="0"/>
+            <c:spPr>
+              <a:solidFill>
+                <a:srgbClr val="E11D48"/>
+              </a:solidFill>
+              <a:effectLst/>
+            </c:spPr>
+          </c:dPt>
+          <c:dLbls>
+            <c:dLbl>
+              <c:idx val="0"/>
+              <c:numFmt formatCode="0%" sourceLinked="0"/>
+              <c:spPr/>
+              <c:txPr>
+                <a:bodyPr/>
+                <a:lstStyle/>
+                <a:p>
+                  <a:pPr>
+                    <a:defRPr sz="900" b="1" i="0" u="none" strike="noStrike">
+                      <a:solidFill>
+                        <a:srgbClr val="FFFFFF"/>
+                      </a:solidFill>
+                      <a:latin typeface="Arial"/>
+                    </a:defRPr>
+                  </a:pPr>
+                </a:p>
+              </c:txPr>
+              <c:showLegendKey val="0"/>
+              <c:showVal val="0"/>
+              <c:showCatName val="0"/>
+              <c:showSerName val="0"/>
+              <c:showPercent val="1"/>
+              <c:showBubbleSize val="0"/>
+            </c:dLbl>
+            <c:dLbl>
+              <c:idx val="1"/>
+              <c:numFmt formatCode="0%" sourceLinked="0"/>
+              <c:spPr/>
+              <c:txPr>
+                <a:bodyPr/>
+                <a:lstStyle/>
+                <a:p>
+                  <a:pPr>
+                    <a:defRPr sz="900" b="1" i="0" u="none" strike="noStrike">
+                      <a:solidFill>
+                        <a:srgbClr val="FFFFFF"/>
+                      </a:solidFill>
+                      <a:latin typeface="Arial"/>
+                    </a:defRPr>
+                  </a:pPr>
+                </a:p>
+              </c:txPr>
+              <c:showLegendKey val="0"/>
+              <c:showVal val="0"/>
+              <c:showCatName val="0"/>
+              <c:showSerName val="0"/>
+              <c:showPercent val="1"/>
+              <c:showBubbleSize val="0"/>
+            </c:dLbl>
+            <c:dLbl>
+              <c:idx val="2"/>
+              <c:numFmt formatCode="0%" sourceLinked="0"/>
+              <c:spPr/>
+              <c:txPr>
+                <a:bodyPr/>
+                <a:lstStyle/>
+                <a:p>
+                  <a:pPr>
+                    <a:defRPr sz="900" b="1" i="0" u="none" strike="noStrike">
+                      <a:solidFill>
+                        <a:srgbClr val="FFFFFF"/>
+                      </a:solidFill>
+                      <a:latin typeface="Arial"/>
+                    </a:defRPr>
+                  </a:pPr>
+                </a:p>
+              </c:txPr>
+              <c:showLegendKey val="0"/>
+              <c:showVal val="0"/>
+              <c:showCatName val="0"/>
+              <c:showSerName val="0"/>
+              <c:showPercent val="1"/>
+              <c:showBubbleSize val="0"/>
+            </c:dLbl>
+            <c:dLbl>
+              <c:idx val="3"/>
+              <c:numFmt formatCode="0%" sourceLinked="0"/>
+              <c:spPr/>
+              <c:txPr>
+                <a:bodyPr/>
+                <a:lstStyle/>
+                <a:p>
+                  <a:pPr>
+                    <a:defRPr sz="900" b="1" i="0" u="none" strike="noStrike">
+                      <a:solidFill>
+                        <a:srgbClr val="FFFFFF"/>
+                      </a:solidFill>
+                      <a:latin typeface="Arial"/>
+                    </a:defRPr>
+                  </a:pPr>
+                </a:p>
+              </c:txPr>
+              <c:showLegendKey val="0"/>
+              <c:showVal val="0"/>
+              <c:showCatName val="0"/>
+              <c:showSerName val="0"/>
+              <c:showPercent val="1"/>
+              <c:showBubbleSize val="0"/>
+            </c:dLbl>
+            <c:dLbl>
+              <c:idx val="4"/>
+              <c:numFmt formatCode="0%" sourceLinked="0"/>
+              <c:spPr/>
+              <c:txPr>
+                <a:bodyPr/>
+                <a:lstStyle/>
+                <a:p>
+                  <a:pPr>
+                    <a:defRPr sz="900" b="1" i="0" u="none" strike="noStrike">
+                      <a:solidFill>
+                        <a:srgbClr val="FFFFFF"/>
+                      </a:solidFill>
+                      <a:latin typeface="Arial"/>
+                    </a:defRPr>
+                  </a:pPr>
+                </a:p>
+              </c:txPr>
+              <c:showLegendKey val="0"/>
+              <c:showVal val="0"/>
+              <c:showCatName val="0"/>
+              <c:showSerName val="0"/>
+              <c:showPercent val="1"/>
+              <c:showBubbleSize val="0"/>
+            </c:dLbl>
+            <c:numFmt formatCode="0%" sourceLinked="0"/>
+            <c:txPr>
+              <a:bodyPr/>
+              <a:lstStyle/>
+              <a:p>
+                <a:pPr>
+                  <a:defRPr sz="1800" b="1" i="0" u="none" strike="noStrike">
+                    <a:solidFill>
+                      <a:srgbClr val="000000"/>
+                    </a:solidFill>
+                    <a:latin typeface="Arial"/>
+                  </a:defRPr>
+                </a:pPr>
+              </a:p>
+            </c:txPr>
+            <c:showLegendKey val="0"/>
+            <c:showVal val="0"/>
+            <c:showCatName val="1"/>
+            <c:showSerName val="0"/>
+            <c:showPercent val="1"/>
+            <c:showBubbleSize val="0"/>
+            <c:showLeaderLines val="0"/>
+          </c:dLbls>
+          <c:cat>
+            <c:strRef>
+              <c:f>Sheet1!$A$2:$A$6</c:f>
+              <c:strCache>
+                <c:ptCount val="5"/>
+                <c:pt idx="0">
+                  <c:v>Employee Expense</c:v>
+                </c:pt>
+                <c:pt idx="1">
+                  <c:v>Other opex</c:v>
+                </c:pt>
+                <c:pt idx="2">
+                  <c:v>RC fees</c:v>
+                </c:pt>
+                <c:pt idx="3">
+                  <c:v>Secretarial</c:v>
+                </c:pt>
+                <c:pt idx="4">
+                  <c:v>IT + branding</c:v>
+                </c:pt>
+              </c:strCache>
+            </c:strRef>
+          </c:cat>
+          <c:val>
+            <c:numRef>
+              <c:f>Sheet1!$B$2:$B$6</c:f>
+              <c:numCache>
+                <c:ptCount val="5"/>
+                <c:pt idx="0">
+                  <c:v>64.7</c:v>
+                </c:pt>
+                <c:pt idx="1">
+                  <c:v>22.7</c:v>
+                </c:pt>
+                <c:pt idx="2">
+                  <c:v>6.7</c:v>
+                </c:pt>
+                <c:pt idx="3">
+                  <c:v>3.6</c:v>
+                </c:pt>
+                <c:pt idx="4">
+                  <c:v>2.3</c:v>
+                </c:pt>
+              </c:numCache>
+            </c:numRef>
+          </c:val>
+        </c:ser>
+        <c:firstSliceAng val="0"/>
+        <c:holeSize val="58"/>
+      </c:doughnutChart>
+      <c:spPr>
+        <a:noFill/>
+        <a:ln>
+          <a:noFill/>
+        </a:ln>
+        <a:effectLst/>
+      </c:spPr>
+    </c:plotArea>
+    <c:legend>
+      <c:legendPos val="r"/>
+      <c:overlay val="0"/>
+      <c:txPr>
+        <a:bodyPr/>
+        <a:lstStyle/>
+        <a:p>
+          <a:pPr>
+            <a:defRPr sz="1000">
+              <a:solidFill>
+                <a:srgbClr val="64748B"/>
+              </a:solidFill>
+            </a:defRPr>
+          </a:pPr>
+          <a:endParaRPr lang="en-US"/>
+        </a:p>
+      </c:txPr>
+    </c:legend>
+    <c:plotVisOnly val="1"/>
+    <c:dispBlanksAs val="span"/>
+  </c:chart>
+  <c:spPr>
+    <a:noFill/>
+    <a:ln>
+      <a:noFill/>
+    </a:ln>
+    <a:effectLst/>
+  </c:spPr>
+  <c:externalData r:id="rId1">
+    <c:autoUpdate val="0"/>
+  </c:externalData>
+</c:chartSpace>
+</file>
+
+<file path=ppt/charts/chart2.xml><?xml version="1.0" encoding="utf-8"?>
+<c:chartSpace xmlns:c="http://schemas.openxmlformats.org/drawingml/2006/chart" xmlns:a="http://schemas.openxmlformats.org/drawingml/2006/main" xmlns:r="http://schemas.openxmlformats.org/officeDocument/2006/relationships">
+  <c:date1904 val="0"/>
+  <c:roundedCorners val="1"/>
+  <c:chart>
+    <c:autoTitleDeleted val="1"/>
+    <c:plotArea>
+      <c:layout/>
+      <c:barChart>
+        <c:barDir val="col"/>
+        <c:grouping val="clustered"/>
+        <c:varyColors val="0"/>
+        <c:ser>
+          <c:idx val="0"/>
+          <c:order val="0"/>
+          <c:tx>
+            <c:strRef>
+              <c:f>Sheet1!$B$1</c:f>
+              <c:strCache>
+                <c:ptCount val="1"/>
+                <c:pt idx="0">
+                  <c:v>Salary</c:v>
+                </c:pt>
+              </c:strCache>
+            </c:strRef>
+          </c:tx>
+          <c:spPr>
+            <a:solidFill>
+              <a:srgbClr val="0D9488">
+                <a:alpha val="100000"/>
+              </a:srgbClr>
+            </a:solidFill>
+            <a:effectLst/>
+          </c:spPr>
+          <c:invertIfNegative val="0"/>
+          <c:dLbls>
+            <c:numFmt formatCode="#,##0" sourceLinked="0"/>
+            <c:txPr>
+              <a:bodyPr/>
+              <a:lstStyle/>
+              <a:p>
+                <a:pPr>
+                  <a:defRPr b="1" i="0" strike="noStrike" sz="1200" u="none">
+                    <a:solidFill>
+                      <a:srgbClr val="0F172A"/>
+                    </a:solidFill>
+                    <a:latin typeface="Arial"/>
+                  </a:defRPr>
+                </a:pPr>
+              </a:p>
+            </c:txPr>
+            <c:showLegendKey val="0"/>
+            <c:showVal val="1"/>
+            <c:showCatName val="0"/>
+            <c:showSerName val="0"/>
+            <c:showPercent val="0"/>
+            <c:showBubbleSize val="0"/>
+            <c:showLeaderLines val="0"/>
+          </c:dLbls>
+          <c:dPt>
+            <c:idx val="0"/>
+            <c:invertIfNegative val="0"/>
+            <c:bubble3D val="0"/>
+            <c:spPr>
+              <a:solidFill>
+                <a:srgbClr val="0D9488"/>
+              </a:solidFill>
+              <a:effectLst/>
+            </c:spPr>
+          </c:dPt>
+          <c:dPt>
+            <c:idx val="1"/>
+            <c:invertIfNegative val="0"/>
+            <c:bubble3D val="0"/>
+            <c:spPr>
+              <a:solidFill>
+                <a:srgbClr val="10B981"/>
+              </a:solidFill>
+              <a:effectLst/>
+            </c:spPr>
+          </c:dPt>
+          <c:cat>
+            <c:multiLvlStrRef>
+              <c:f>Sheet1!$A$2:$A$3</c:f>
+              <c:multiLvlStrCache>
+                <c:ptCount val="2"/>
+                <c:lvl>
+                  <c:pt idx="0">
+                    <c:v>Salary now</c:v>
+                  </c:pt>
+                  <c:pt idx="1">
+                    <c:v>Salary from Sep</c:v>
+                  </c:pt>
+                </c:lvl>
+              </c:multiLvlStrCache>
+            </c:multiLvlStrRef>
+          </c:cat>
+          <c:val>
+            <c:numRef>
+              <c:f>Sheet1!$B$2:$B$3</c:f>
+              <c:numCache>
+                <c:formatCode>General</c:formatCode>
+                <c:ptCount val="2"/>
+                <c:pt idx="0">
+                  <c:v>25</c:v>
+                </c:pt>
+                <c:pt idx="1">
+                  <c:v>32.9</c:v>
+                </c:pt>
+              </c:numCache>
+            </c:numRef>
+          </c:val>
+        </c:ser>
+        <c:dLbls>
+          <c:numFmt formatCode="#,##0" sourceLinked="0"/>
+          <c:txPr>
+            <a:bodyPr/>
+            <a:lstStyle/>
+            <a:p>
+              <a:pPr>
+                <a:defRPr b="1" i="0" strike="noStrike" sz="1200" u="none">
+                  <a:solidFill>
+                    <a:srgbClr val="0F172A"/>
+                  </a:solidFill>
+                  <a:latin typeface="Arial"/>
+                </a:defRPr>
+              </a:pPr>
+            </a:p>
+          </c:txPr>
+          <c:showLegendKey val="0"/>
+          <c:showVal val="1"/>
+          <c:showCatName val="0"/>
+          <c:showSerName val="0"/>
+          <c:showPercent val="0"/>
+          <c:showBubbleSize val="0"/>
+          <c:showLeaderLines val="0"/>
+        </c:dLbls>
+        <c:gapWidth val="150"/>
+        <c:overlap val="0"/>
+        <c:axId val="2094734554"/>
+        <c:axId val="2094734552"/>
+        <c:axId val="2094734556"/>
+      </c:barChart>
+      <c:catAx>
+        <c:axId val="2094734554"/>
+        <c:scaling>
+          <c:orientation val="minMax"/>
+        </c:scaling>
+        <c:delete val="0"/>
+        <c:axPos val="b"/>
+        <c:numFmt formatCode="General" sourceLinked="1"/>
+        <c:majorTickMark val="out"/>
+        <c:minorTickMark val="none"/>
+        <c:tickLblPos val="low"/>
+        <c:spPr>
+          <a:ln w="12700" cap="flat">
+            <a:solidFill>
+              <a:srgbClr val="888888"/>
+            </a:solidFill>
+            <a:prstDash val="solid"/>
+            <a:round/>
+          </a:ln>
+        </c:spPr>
+        <c:txPr>
+          <a:bodyPr/>
+          <a:lstStyle/>
+          <a:p>
+            <a:pPr>
+              <a:defRPr sz="1200" b="0" i="0" u="none" strike="noStrike">
+                <a:solidFill>
+                  <a:srgbClr val="64748B"/>
+                </a:solidFill>
+                <a:latin typeface="Arial"/>
+              </a:defRPr>
+            </a:pPr>
+            <a:endParaRPr lang="en-US"/>
+          </a:p>
+        </c:txPr>
+        <c:crossAx val="2094734552"/>
+        <c:crosses val="autoZero"/>
+        <c:auto val="1"/>
+        <c:lblAlgn val="ctr"/>
+        <c:noMultiLvlLbl val="1"/>
+      </c:catAx>
+      <c:valAx>
+        <c:axId val="2094734552"/>
+        <c:scaling>
+          <c:orientation val="minMax"/>
+          <c:max val="40"/>
+          <c:min val="0"/>
+        </c:scaling>
+        <c:delete val="0"/>
+        <c:axPos val="l"/>
+        <c:majorGridlines>
+          <c:spPr>
+            <a:ln w="12700" cap="flat">
+              <a:solidFill>
+                <a:srgbClr val="E6EAF0"/>
+              </a:solidFill>
+              <a:prstDash val="solid"/>
+              <a:round/>
+            </a:ln>
+          </c:spPr>
+        </c:majorGridlines>
+        <c:numFmt formatCode="General" sourceLinked="0"/>
+        <c:majorTickMark val="out"/>
+        <c:minorTickMark val="none"/>
+        <c:tickLblPos val="nextTo"/>
+        <c:spPr>
+          <a:ln w="12700" cap="flat">
+            <a:solidFill>
+              <a:srgbClr val="888888"/>
+            </a:solidFill>
+            <a:prstDash val="solid"/>
+            <a:round/>
+          </a:ln>
+        </c:spPr>
+        <c:txPr>
+          <a:bodyPr/>
+          <a:lstStyle/>
+          <a:p>
+            <a:pPr>
+              <a:defRPr sz="1200" b="0" i="0" u="none" strike="noStrike">
+                <a:solidFill>
+                  <a:srgbClr val="64748B"/>
+                </a:solidFill>
+                <a:latin typeface="Arial"/>
+              </a:defRPr>
+            </a:pPr>
+            <a:endParaRPr lang="en-US"/>
+          </a:p>
+        </c:txPr>
+        <c:crossAx val="2094734554"/>
+        <c:crosses val="autoZero"/>
+        <c:crossBetween val="between"/>
+        <c:majorUnit val="10"/>
+      </c:valAx>
+      <c:spPr>
+        <a:noFill/>
+        <a:ln>
+          <a:noFill/>
+        </a:ln>
+        <a:effectLst/>
+      </c:spPr>
+    </c:plotArea>
+    <c:plotVisOnly val="1"/>
+    <c:dispBlanksAs val="span"/>
+  </c:chart>
+  <c:spPr>
+    <a:noFill/>
+    <a:ln>
+      <a:noFill/>
+    </a:ln>
+    <a:effectLst/>
+  </c:spPr>
+  <c:externalData r:id="rId1">
+    <c:autoUpdate val="0"/>
+  </c:externalData>
+</c:chartSpace>
+</file>
+
+<file path=ppt/charts/chart3.xml><?xml version="1.0" encoding="utf-8"?>
+<c:chartSpace xmlns:c="http://schemas.openxmlformats.org/drawingml/2006/chart" xmlns:a="http://schemas.openxmlformats.org/drawingml/2006/main" xmlns:r="http://schemas.openxmlformats.org/officeDocument/2006/relationships">
+  <c:date1904 val="0"/>
+  <c:roundedCorners val="1"/>
+  <c:chart>
+    <c:autoTitleDeleted val="1"/>
+    <c:plotArea>
+      <c:layout/>
+      <c:barChart>
+        <c:barDir val="col"/>
+        <c:grouping val="stacked"/>
+        <c:varyColors val="0"/>
+        <c:ser>
+          <c:idx val="0"/>
+          <c:order val="0"/>
+          <c:tx>
+            <c:strRef>
+              <c:f>Sheet1!$B$1</c:f>
+              <c:strCache>
+                <c:ptCount val="1"/>
+                <c:pt idx="0">
+                  <c:v>IPO mandates</c:v>
+                </c:pt>
+              </c:strCache>
+            </c:strRef>
+          </c:tx>
+          <c:spPr>
+            <a:solidFill>
+              <a:srgbClr val="0284C7"/>
+            </a:solidFill>
+            <a:effectLst/>
+          </c:spPr>
+          <c:invertIfNegative val="0"/>
+          <c:dLbls>
+            <c:numFmt formatCode="#,##0" sourceLinked="0"/>
+            <c:txPr>
+              <a:bodyPr/>
+              <a:lstStyle/>
+              <a:p>
+                <a:pPr>
+                  <a:defRPr b="1" i="0" strike="noStrike" sz="1000" u="none">
+                    <a:solidFill>
+                      <a:srgbClr val="FFFFFF"/>
+                    </a:solidFill>
+                    <a:latin typeface="Arial"/>
+                  </a:defRPr>
+                </a:pPr>
+              </a:p>
+            </c:txPr>
+            <c:dLblPos val="ctr"/>
+            <c:showLegendKey val="0"/>
+            <c:showVal val="1"/>
+            <c:showCatName val="0"/>
+            <c:showSerName val="0"/>
+            <c:showPercent val="0"/>
+            <c:showBubbleSize val="0"/>
+            <c:showLeaderLines val="0"/>
+          </c:dLbls>
+          <c:cat>
+            <c:multiLvlStrRef>
+              <c:f>Sheet1!$A$2:$A$5</c:f>
+              <c:multiLvlStrCache>
+                <c:ptCount val="4"/>
+                <c:lvl>
+                  <c:pt idx="0">
+                    <c:v>Aug</c:v>
+                  </c:pt>
+                  <c:pt idx="1">
+                    <c:v>Sep</c:v>
+                  </c:pt>
+                  <c:pt idx="2">
+                    <c:v>Oct</c:v>
+                  </c:pt>
+                  <c:pt idx="3">
+                    <c:v>Nov+</c:v>
+                  </c:pt>
+                </c:lvl>
+              </c:multiLvlStrCache>
+            </c:multiLvlStrRef>
+          </c:cat>
+          <c:val>
+            <c:numRef>
+              <c:f>Sheet1!$B$2:$B$5</c:f>
+              <c:numCache>
+                <c:formatCode>General</c:formatCode>
+                <c:ptCount val="4"/>
+                <c:pt idx="0">
+                  <c:v>10</c:v>
+                </c:pt>
+                <c:pt idx="1">
+                  <c:v>15</c:v>
+                </c:pt>
+                <c:pt idx="2">
+                  <c:v>20</c:v>
+                </c:pt>
+                <c:pt idx="3">
+                  <c:v>20</c:v>
+                </c:pt>
+              </c:numCache>
+            </c:numRef>
+          </c:val>
+        </c:ser>
+        <c:ser>
+          <c:idx val="1"/>
+          <c:order val="1"/>
+          <c:tx>
+            <c:strRef>
+              <c:f>Sheet1!$C$1</c:f>
+              <c:strCache>
+                <c:ptCount val="1"/>
+                <c:pt idx="0">
+                  <c:v>BLR cases</c:v>
+                </c:pt>
+              </c:strCache>
+            </c:strRef>
+          </c:tx>
+          <c:spPr>
+            <a:solidFill>
+              <a:srgbClr val="10B981"/>
+            </a:solidFill>
+            <a:effectLst/>
+          </c:spPr>
+          <c:invertIfNegative val="0"/>
+          <c:dLbls>
+            <c:numFmt formatCode="#,##0" sourceLinked="0"/>
+            <c:txPr>
+              <a:bodyPr/>
+              <a:lstStyle/>
+              <a:p>
+                <a:pPr>
+                  <a:defRPr b="1" i="0" strike="noStrike" sz="1000" u="none">
+                    <a:solidFill>
+                      <a:srgbClr val="FFFFFF"/>
+                    </a:solidFill>
+                    <a:latin typeface="Arial"/>
+                  </a:defRPr>
+                </a:pPr>
+              </a:p>
+            </c:txPr>
+            <c:dLblPos val="ctr"/>
+            <c:showLegendKey val="0"/>
+            <c:showVal val="1"/>
+            <c:showCatName val="0"/>
+            <c:showSerName val="0"/>
+            <c:showPercent val="0"/>
+            <c:showBubbleSize val="0"/>
+            <c:showLeaderLines val="0"/>
+          </c:dLbls>
+          <c:cat>
+            <c:multiLvlStrRef>
+              <c:f>Sheet1!$A$2:$A$5</c:f>
+              <c:multiLvlStrCache>
+                <c:ptCount val="4"/>
+                <c:lvl>
+                  <c:pt idx="0">
+                    <c:v>Aug</c:v>
+                  </c:pt>
+                  <c:pt idx="1">
+                    <c:v>Sep</c:v>
+                  </c:pt>
+                  <c:pt idx="2">
+                    <c:v>Oct</c:v>
+                  </c:pt>
+                  <c:pt idx="3">
+                    <c:v>Nov+</c:v>
+                  </c:pt>
+                </c:lvl>
+              </c:multiLvlStrCache>
+            </c:multiLvlStrRef>
+          </c:cat>
+          <c:val>
+            <c:numRef>
+              <c:f>Sheet1!$C$2:$C$5</c:f>
+              <c:numCache>
+                <c:formatCode>General</c:formatCode>
+                <c:ptCount val="4"/>
+                <c:pt idx="0">
+                  <c:v>0</c:v>
+                </c:pt>
+                <c:pt idx="1">
+                  <c:v>0</c:v>
+                </c:pt>
+                <c:pt idx="2">
+                  <c:v>0</c:v>
+                </c:pt>
+                <c:pt idx="3">
+                  <c:v>16</c:v>
+                </c:pt>
+              </c:numCache>
+            </c:numRef>
+          </c:val>
+        </c:ser>
+        <c:dLbls>
+          <c:numFmt formatCode="#,##0" sourceLinked="0"/>
+          <c:txPr>
+            <a:bodyPr/>
+            <a:lstStyle/>
+            <a:p>
+              <a:pPr>
+                <a:defRPr b="1" i="0" strike="noStrike" sz="1000" u="none">
+                  <a:solidFill>
+                    <a:srgbClr val="FFFFFF"/>
+                  </a:solidFill>
+                  <a:latin typeface="Arial"/>
+                </a:defRPr>
+              </a:pPr>
+            </a:p>
+          </c:txPr>
+          <c:dLblPos val="ctr"/>
+          <c:showLegendKey val="0"/>
+          <c:showVal val="1"/>
+          <c:showCatName val="0"/>
+          <c:showSerName val="0"/>
+          <c:showPercent val="0"/>
+          <c:showBubbleSize val="0"/>
+          <c:showLeaderLines val="0"/>
+        </c:dLbls>
+        <c:gapWidth val="50"/>
+        <c:overlap val="100"/>
+        <c:axId val="2094734554"/>
+        <c:axId val="2094734552"/>
+        <c:axId val="2094734556"/>
+      </c:barChart>
+      <c:catAx>
+        <c:axId val="2094734554"/>
+        <c:scaling>
+          <c:orientation val="minMax"/>
+        </c:scaling>
+        <c:delete val="0"/>
+        <c:axPos val="b"/>
+        <c:numFmt formatCode="General" sourceLinked="1"/>
+        <c:majorTickMark val="out"/>
+        <c:minorTickMark val="none"/>
+        <c:tickLblPos val="low"/>
+        <c:spPr>
+          <a:ln w="12700" cap="flat">
+            <a:solidFill>
+              <a:srgbClr val="888888"/>
+            </a:solidFill>
+            <a:prstDash val="solid"/>
+            <a:round/>
+          </a:ln>
+        </c:spPr>
+        <c:txPr>
+          <a:bodyPr/>
+          <a:lstStyle/>
+          <a:p>
+            <a:pPr>
+              <a:defRPr sz="1200" b="0" i="0" u="none" strike="noStrike">
+                <a:solidFill>
+                  <a:srgbClr val="64748B"/>
+                </a:solidFill>
+                <a:latin typeface="Arial"/>
+              </a:defRPr>
+            </a:pPr>
+            <a:endParaRPr lang="en-US"/>
+          </a:p>
+        </c:txPr>
+        <c:crossAx val="2094734552"/>
+        <c:crosses val="autoZero"/>
+        <c:auto val="1"/>
+        <c:lblAlgn val="ctr"/>
+        <c:noMultiLvlLbl val="1"/>
+      </c:catAx>
+      <c:valAx>
+        <c:axId val="2094734552"/>
+        <c:scaling>
+          <c:orientation val="minMax"/>
+          <c:max val="40"/>
+          <c:min val="0"/>
+        </c:scaling>
+        <c:delete val="0"/>
+        <c:axPos val="l"/>
+        <c:majorGridlines>
+          <c:spPr>
+            <a:ln w="12700" cap="flat">
+              <a:solidFill>
+                <a:srgbClr val="E6EAF0"/>
+              </a:solidFill>
+              <a:prstDash val="solid"/>
+              <a:round/>
+            </a:ln>
+          </c:spPr>
+        </c:majorGridlines>
+        <c:numFmt formatCode="General" sourceLinked="0"/>
+        <c:majorTickMark val="out"/>
+        <c:minorTickMark val="none"/>
+        <c:tickLblPos val="nextTo"/>
+        <c:spPr>
+          <a:ln w="12700" cap="flat">
+            <a:solidFill>
+              <a:srgbClr val="888888"/>
+            </a:solidFill>
+            <a:prstDash val="solid"/>
+            <a:round/>
+          </a:ln>
+        </c:spPr>
+        <c:txPr>
+          <a:bodyPr/>
+          <a:lstStyle/>
+          <a:p>
+            <a:pPr>
+              <a:defRPr sz="1200" b="0" i="0" u="none" strike="noStrike">
+                <a:solidFill>
+                  <a:srgbClr val="64748B"/>
+                </a:solidFill>
+                <a:latin typeface="Arial"/>
+              </a:defRPr>
+            </a:pPr>
+            <a:endParaRPr lang="en-US"/>
+          </a:p>
+        </c:txPr>
+        <c:crossAx val="2094734554"/>
+        <c:crosses val="autoZero"/>
+        <c:crossBetween val="between"/>
+        <c:majorUnit val="10"/>
+      </c:valAx>
+      <c:spPr>
+        <a:noFill/>
+        <a:ln>
+          <a:noFill/>
+        </a:ln>
+        <a:effectLst/>
+      </c:spPr>
+    </c:plotArea>
+    <c:legend>
+      <c:legendPos val="b"/>
+      <c:overlay val="0"/>
+      <c:txPr>
+        <a:bodyPr/>
+        <a:lstStyle/>
+        <a:p>
+          <a:pPr>
+            <a:defRPr sz="1000">
+              <a:solidFill>
+                <a:srgbClr val="64748B"/>
+              </a:solidFill>
+            </a:defRPr>
+          </a:pPr>
+          <a:endParaRPr lang="en-US"/>
+        </a:p>
+      </c:txPr>
+    </c:legend>
+    <c:plotVisOnly val="1"/>
+    <c:dispBlanksAs val="span"/>
+  </c:chart>
+  <c:spPr>
+    <a:noFill/>
+    <a:ln>
+      <a:noFill/>
+    </a:ln>
+    <a:effectLst/>
+  </c:spPr>
+  <c:externalData r:id="rId1">
+    <c:autoUpdate val="0"/>
+  </c:externalData>
+</c:chartSpace>
+</file>
+
+<file path=ppt/charts/chart4.xml><?xml version="1.0" encoding="utf-8"?>
+<c:chartSpace xmlns:c="http://schemas.openxmlformats.org/drawingml/2006/chart" xmlns:a="http://schemas.openxmlformats.org/drawingml/2006/main" xmlns:r="http://schemas.openxmlformats.org/officeDocument/2006/relationships">
+  <c:date1904 val="0"/>
+  <c:roundedCorners val="1"/>
+  <c:chart>
+    <c:autoTitleDeleted val="1"/>
+    <c:plotArea>
+      <c:layout/>
+      <c:barChart>
+        <c:barDir val="col"/>
+        <c:grouping val="stacked"/>
+        <c:varyColors val="0"/>
+        <c:ser>
+          <c:idx val="0"/>
+          <c:order val="0"/>
+          <c:tx>
+            <c:strRef>
+              <c:f>Sheet1!$B$1</c:f>
+              <c:strCache>
+                <c:ptCount val="1"/>
+                <c:pt idx="0">
+                  <c:v>FD interest</c:v>
+                </c:pt>
+              </c:strCache>
+            </c:strRef>
+          </c:tx>
+          <c:spPr>
+            <a:solidFill>
+              <a:srgbClr val="0D9488"/>
+            </a:solidFill>
+            <a:effectLst/>
+          </c:spPr>
+          <c:invertIfNegative val="0"/>
+          <c:dLbls>
+            <c:numFmt formatCode="#,##0" sourceLinked="0"/>
+            <c:txPr>
+              <a:bodyPr/>
+              <a:lstStyle/>
+              <a:p>
+                <a:pPr>
+                  <a:defRPr b="0" i="0" strike="noStrike" sz="1200" u="none">
+                    <a:solidFill>
+                      <a:srgbClr val="000000"/>
+                    </a:solidFill>
+                    <a:latin typeface="Arial"/>
+                  </a:defRPr>
+                </a:pPr>
+              </a:p>
+            </c:txPr>
+            <c:showLegendKey val="0"/>
+            <c:showVal val="0"/>
+            <c:showCatName val="0"/>
+            <c:showSerName val="0"/>
+            <c:showPercent val="0"/>
+            <c:showBubbleSize val="0"/>
+            <c:showLeaderLines val="0"/>
+          </c:dLbls>
+          <c:cat>
+            <c:multiLvlStrRef>
+              <c:f>Sheet1!$A$2:$A$10</c:f>
+              <c:multiLvlStrCache>
+                <c:ptCount val="9"/>
+                <c:lvl>
+                  <c:pt idx="0">
+                    <c:v>Aug 26</c:v>
+                  </c:pt>
+                  <c:pt idx="1">
+                    <c:v>Sep 26</c:v>
+                  </c:pt>
+                  <c:pt idx="2">
+                    <c:v>Oct 26</c:v>
+                  </c:pt>
+                  <c:pt idx="3">
+                    <c:v>Nov 26</c:v>
+                  </c:pt>
+                  <c:pt idx="4">
+                    <c:v>Dec 26</c:v>
+                  </c:pt>
+                  <c:pt idx="5">
+                    <c:v>Jan 27</c:v>
+                  </c:pt>
+                  <c:pt idx="6">
+                    <c:v>Feb 27</c:v>
+                  </c:pt>
+                  <c:pt idx="7">
+                    <c:v>Mar 27</c:v>
+                  </c:pt>
+                  <c:pt idx="8">
+                    <c:v>Apr 27</c:v>
+                  </c:pt>
+                </c:lvl>
+              </c:multiLvlStrCache>
+            </c:multiLvlStrRef>
+          </c:cat>
+          <c:val>
+            <c:numRef>
+              <c:f>Sheet1!$B$2:$B$10</c:f>
+              <c:numCache>
+                <c:formatCode>General</c:formatCode>
+                <c:ptCount val="9"/>
+                <c:pt idx="0">
+                  <c:v>12.5</c:v>
+                </c:pt>
+                <c:pt idx="1">
+                  <c:v>12.5</c:v>
+                </c:pt>
+                <c:pt idx="2">
+                  <c:v>12.5</c:v>
+                </c:pt>
+                <c:pt idx="3">
+                  <c:v>12.5</c:v>
+                </c:pt>
+                <c:pt idx="4">
+                  <c:v>12.5</c:v>
+                </c:pt>
+                <c:pt idx="5">
+                  <c:v>12.5</c:v>
+                </c:pt>
+                <c:pt idx="6">
+                  <c:v>12.5</c:v>
+                </c:pt>
+                <c:pt idx="7">
+                  <c:v>12.5</c:v>
+                </c:pt>
+                <c:pt idx="8">
+                  <c:v>12.5</c:v>
+                </c:pt>
+              </c:numCache>
+            </c:numRef>
+          </c:val>
+        </c:ser>
+        <c:ser>
+          <c:idx val="1"/>
+          <c:order val="1"/>
+          <c:tx>
+            <c:strRef>
+              <c:f>Sheet1!$C$1</c:f>
+              <c:strCache>
+                <c:ptCount val="1"/>
+                <c:pt idx="0">
+                  <c:v>IPO &amp; ratings</c:v>
+                </c:pt>
+              </c:strCache>
+            </c:strRef>
+          </c:tx>
+          <c:spPr>
+            <a:solidFill>
+              <a:srgbClr val="0284C7"/>
+            </a:solidFill>
+            <a:effectLst/>
+          </c:spPr>
+          <c:invertIfNegative val="0"/>
+          <c:dLbls>
+            <c:numFmt formatCode="#,##0" sourceLinked="0"/>
+            <c:txPr>
+              <a:bodyPr/>
+              <a:lstStyle/>
+              <a:p>
+                <a:pPr>
+                  <a:defRPr b="0" i="0" strike="noStrike" sz="1200" u="none">
+                    <a:solidFill>
+                      <a:srgbClr val="000000"/>
+                    </a:solidFill>
+                    <a:latin typeface="Arial"/>
+                  </a:defRPr>
+                </a:pPr>
+              </a:p>
+            </c:txPr>
+            <c:showLegendKey val="0"/>
+            <c:showVal val="0"/>
+            <c:showCatName val="0"/>
+            <c:showSerName val="0"/>
+            <c:showPercent val="0"/>
+            <c:showBubbleSize val="0"/>
+            <c:showLeaderLines val="0"/>
+          </c:dLbls>
+          <c:cat>
+            <c:multiLvlStrRef>
+              <c:f>Sheet1!$A$2:$A$10</c:f>
+              <c:multiLvlStrCache>
+                <c:ptCount val="9"/>
+                <c:lvl>
+                  <c:pt idx="0">
+                    <c:v>Aug 26</c:v>
+                  </c:pt>
+                  <c:pt idx="1">
+                    <c:v>Sep 26</c:v>
+                  </c:pt>
+                  <c:pt idx="2">
+                    <c:v>Oct 26</c:v>
+                  </c:pt>
+                  <c:pt idx="3">
+                    <c:v>Nov 26</c:v>
+                  </c:pt>
+                  <c:pt idx="4">
+                    <c:v>Dec 26</c:v>
+                  </c:pt>
+                  <c:pt idx="5">
+                    <c:v>Jan 27</c:v>
+                  </c:pt>
+                  <c:pt idx="6">
+                    <c:v>Feb 27</c:v>
+                  </c:pt>
+                  <c:pt idx="7">
+                    <c:v>Mar 27</c:v>
+                  </c:pt>
+                  <c:pt idx="8">
+                    <c:v>Apr 27</c:v>
+                  </c:pt>
+                </c:lvl>
+              </c:multiLvlStrCache>
+            </c:multiLvlStrRef>
+          </c:cat>
+          <c:val>
+            <c:numRef>
+              <c:f>Sheet1!$C$2:$C$10</c:f>
+              <c:numCache>
+                <c:formatCode>General</c:formatCode>
+                <c:ptCount val="9"/>
+                <c:pt idx="0">
+                  <c:v>8.1</c:v>
+                </c:pt>
+                <c:pt idx="1">
+                  <c:v>10.1</c:v>
+                </c:pt>
+                <c:pt idx="2">
+                  <c:v>12.1</c:v>
+                </c:pt>
+                <c:pt idx="3">
+                  <c:v>12.1</c:v>
+                </c:pt>
+                <c:pt idx="4">
+                  <c:v>12.1</c:v>
+                </c:pt>
+                <c:pt idx="5">
+                  <c:v>12.1</c:v>
+                </c:pt>
+                <c:pt idx="6">
+                  <c:v>12.1</c:v>
+                </c:pt>
+                <c:pt idx="7">
+                  <c:v>12.1</c:v>
+                </c:pt>
+                <c:pt idx="8">
+                  <c:v>12.1</c:v>
+                </c:pt>
+              </c:numCache>
+            </c:numRef>
+          </c:val>
+        </c:ser>
+        <c:ser>
+          <c:idx val="2"/>
+          <c:order val="2"/>
+          <c:tx>
+            <c:strRef>
+              <c:f>Sheet1!$D$1</c:f>
+              <c:strCache>
+                <c:ptCount val="1"/>
+                <c:pt idx="0">
+                  <c:v>BLR</c:v>
+                </c:pt>
+              </c:strCache>
+            </c:strRef>
+          </c:tx>
+          <c:spPr>
+            <a:solidFill>
+              <a:srgbClr val="10B981"/>
+            </a:solidFill>
+            <a:effectLst/>
+          </c:spPr>
+          <c:invertIfNegative val="0"/>
+          <c:dLbls>
+            <c:numFmt formatCode="#,##0" sourceLinked="0"/>
+            <c:txPr>
+              <a:bodyPr/>
+              <a:lstStyle/>
+              <a:p>
+                <a:pPr>
+                  <a:defRPr b="0" i="0" strike="noStrike" sz="1200" u="none">
+                    <a:solidFill>
+                      <a:srgbClr val="000000"/>
+                    </a:solidFill>
+                    <a:latin typeface="Arial"/>
+                  </a:defRPr>
+                </a:pPr>
+              </a:p>
+            </c:txPr>
+            <c:showLegendKey val="0"/>
+            <c:showVal val="0"/>
+            <c:showCatName val="0"/>
+            <c:showSerName val="0"/>
+            <c:showPercent val="0"/>
+            <c:showBubbleSize val="0"/>
+            <c:showLeaderLines val="0"/>
+          </c:dLbls>
+          <c:cat>
+            <c:multiLvlStrRef>
+              <c:f>Sheet1!$A$2:$A$10</c:f>
+              <c:multiLvlStrCache>
+                <c:ptCount val="9"/>
+                <c:lvl>
+                  <c:pt idx="0">
+                    <c:v>Aug 26</c:v>
+                  </c:pt>
+                  <c:pt idx="1">
+                    <c:v>Sep 26</c:v>
+                  </c:pt>
+                  <c:pt idx="2">
+                    <c:v>Oct 26</c:v>
+                  </c:pt>
+                  <c:pt idx="3">
+                    <c:v>Nov 26</c:v>
+                  </c:pt>
+                  <c:pt idx="4">
+                    <c:v>Dec 26</c:v>
+                  </c:pt>
+                  <c:pt idx="5">
+                    <c:v>Jan 27</c:v>
+                  </c:pt>
+                  <c:pt idx="6">
+                    <c:v>Feb 27</c:v>
+                  </c:pt>
+                  <c:pt idx="7">
+                    <c:v>Mar 27</c:v>
+                  </c:pt>
+                  <c:pt idx="8">
+                    <c:v>Apr 27</c:v>
+                  </c:pt>
+                </c:lvl>
+              </c:multiLvlStrCache>
+            </c:multiLvlStrRef>
+          </c:cat>
+          <c:val>
+            <c:numRef>
+              <c:f>Sheet1!$D$2:$D$10</c:f>
+              <c:numCache>
+                <c:formatCode>General</c:formatCode>
+                <c:ptCount val="9"/>
+                <c:pt idx="0">
+                  <c:v>0</c:v>
+                </c:pt>
+                <c:pt idx="1">
+                  <c:v>0</c:v>
+                </c:pt>
+                <c:pt idx="2">
+                  <c:v>0</c:v>
+                </c:pt>
+                <c:pt idx="3">
+                  <c:v>42</c:v>
+                </c:pt>
+                <c:pt idx="4">
+                  <c:v>44</c:v>
+                </c:pt>
+                <c:pt idx="5">
+                  <c:v>46</c:v>
+                </c:pt>
+                <c:pt idx="6">
+                  <c:v>48</c:v>
+                </c:pt>
+                <c:pt idx="7">
+                  <c:v>50</c:v>
+                </c:pt>
+                <c:pt idx="8">
+                  <c:v>52</c:v>
+                </c:pt>
+              </c:numCache>
+            </c:numRef>
+          </c:val>
+        </c:ser>
+        <c:dLbls>
+          <c:numFmt formatCode="#,##0" sourceLinked="0"/>
+          <c:txPr>
+            <a:bodyPr/>
+            <a:lstStyle/>
+            <a:p>
+              <a:pPr>
+                <a:defRPr b="0" i="0" strike="noStrike" sz="1200" u="none">
+                  <a:solidFill>
+                    <a:srgbClr val="000000"/>
+                  </a:solidFill>
+                  <a:latin typeface="Arial"/>
+                </a:defRPr>
+              </a:pPr>
+            </a:p>
+          </c:txPr>
+          <c:showLegendKey val="0"/>
+          <c:showVal val="0"/>
+          <c:showCatName val="0"/>
+          <c:showSerName val="0"/>
+          <c:showPercent val="0"/>
+          <c:showBubbleSize val="0"/>
+          <c:showLeaderLines val="0"/>
+        </c:dLbls>
+        <c:gapWidth val="50"/>
+        <c:overlap val="100"/>
+        <c:axId val="2094734554"/>
+        <c:axId val="2094734552"/>
+        <c:axId val="2094734556"/>
+      </c:barChart>
+      <c:lineChart>
+        <c:varyColors val="0"/>
+        <c:ser>
+          <c:idx val="3"/>
+          <c:order val="3"/>
+          <c:tx>
+            <c:strRef>
+              <c:f>Sheet1!$E$1</c:f>
+              <c:strCache>
+                <c:ptCount val="1"/>
+                <c:pt idx="0">
+                  <c:v>Expense</c:v>
+                </c:pt>
+              </c:strCache>
+            </c:strRef>
+          </c:tx>
+          <c:spPr>
+            <a:solidFill>
+              <a:srgbClr val="E11D48"/>
+            </a:solidFill>
+            <a:ln w="34925" cap="flat">
+              <a:solidFill>
+                <a:srgbClr val="E11D48"/>
+              </a:solidFill>
+              <a:prstDash val="dash"/>
+              <a:round/>
+            </a:ln>
+            <a:effectLst/>
+          </c:spPr>
+          <c:invertIfNegative val="0"/>
+          <c:dLbls>
+            <c:numFmt formatCode="#,##0" sourceLinked="0"/>
+            <c:txPr>
+              <a:bodyPr/>
+              <a:lstStyle/>
+              <a:p>
+                <a:pPr>
+                  <a:defRPr b="0" i="0" strike="noStrike" sz="1200" u="none">
+                    <a:solidFill>
+                      <a:srgbClr val="000000"/>
+                    </a:solidFill>
+                    <a:latin typeface="Arial"/>
+                  </a:defRPr>
+                </a:pPr>
+              </a:p>
+            </c:txPr>
+            <c:showLegendKey val="0"/>
+            <c:showVal val="0"/>
+            <c:showCatName val="0"/>
+            <c:showSerName val="0"/>
+            <c:showPercent val="0"/>
+            <c:showBubbleSize val="0"/>
+            <c:showLeaderLines val="0"/>
+          </c:dLbls>
+          <c:marker>
+            <c:symbol val="none"/>
+            <c:size val="6"/>
+            <c:spPr>
+              <a:solidFill>
+                <a:srgbClr val="E11D48"/>
+              </a:solidFill>
+              <a:ln w="9525" cap="flat">
+                <a:solidFill>
+                  <a:srgbClr val="E11D48"/>
+                </a:solidFill>
+                <a:prstDash val="solid"/>
+                <a:round/>
+              </a:ln>
+              <a:effectLst/>
+            </c:spPr>
+          </c:marker>
+          <c:cat>
+            <c:multiLvlStrRef>
+              <c:f>Sheet1!$A$2:$A$10</c:f>
+              <c:multiLvlStrCache>
+                <c:ptCount val="9"/>
+                <c:lvl>
+                  <c:pt idx="0">
+                    <c:v>Aug 26</c:v>
+                  </c:pt>
+                  <c:pt idx="1">
+                    <c:v>Sep 26</c:v>
+                  </c:pt>
+                  <c:pt idx="2">
+                    <c:v>Oct 26</c:v>
+                  </c:pt>
+                  <c:pt idx="3">
+                    <c:v>Nov 26</c:v>
+                  </c:pt>
+                  <c:pt idx="4">
+                    <c:v>Dec 26</c:v>
+                  </c:pt>
+                  <c:pt idx="5">
+                    <c:v>Jan 27</c:v>
+                  </c:pt>
+                  <c:pt idx="6">
+                    <c:v>Feb 27</c:v>
+                  </c:pt>
+                  <c:pt idx="7">
+                    <c:v>Mar 27</c:v>
+                  </c:pt>
+                  <c:pt idx="8">
+                    <c:v>Apr 27</c:v>
+                  </c:pt>
+                </c:lvl>
+              </c:multiLvlStrCache>
+            </c:multiLvlStrRef>
+          </c:cat>
+          <c:val>
+            <c:numRef>
+              <c:f>Sheet1!$E$2:$E$10</c:f>
+              <c:numCache>
+                <c:formatCode>General</c:formatCode>
+                <c:ptCount val="9"/>
+                <c:pt idx="0">
+                  <c:v>52.2</c:v>
+                </c:pt>
+                <c:pt idx="1">
+                  <c:v>46.7</c:v>
+                </c:pt>
+                <c:pt idx="2">
+                  <c:v>57.2</c:v>
+                </c:pt>
+                <c:pt idx="3">
+                  <c:v>56</c:v>
+                </c:pt>
+                <c:pt idx="4">
+                  <c:v>50.5</c:v>
+                </c:pt>
+                <c:pt idx="5">
+                  <c:v>50.5</c:v>
+                </c:pt>
+                <c:pt idx="6">
+                  <c:v>56</c:v>
+                </c:pt>
+                <c:pt idx="7">
+                  <c:v>50.5</c:v>
+                </c:pt>
+                <c:pt idx="8">
+                  <c:v>50.5</c:v>
+                </c:pt>
+              </c:numCache>
+            </c:numRef>
+          </c:val>
+          <c:smooth val="0"/>
+        </c:ser>
+        <c:dLbls>
+          <c:numFmt formatCode="#,##0" sourceLinked="0"/>
+          <c:txPr>
+            <a:bodyPr/>
+            <a:lstStyle/>
+            <a:p>
+              <a:pPr>
+                <a:defRPr b="0" i="0" strike="noStrike" sz="1200" u="none">
+                  <a:solidFill>
+                    <a:srgbClr val="000000"/>
+                  </a:solidFill>
+                  <a:latin typeface="Arial"/>
+                </a:defRPr>
+              </a:pPr>
+            </a:p>
+          </c:txPr>
+          <c:showLegendKey val="0"/>
+          <c:showVal val="0"/>
+          <c:showCatName val="0"/>
+          <c:showSerName val="0"/>
+          <c:showPercent val="0"/>
+          <c:showBubbleSize val="0"/>
+          <c:showLeaderLines val="0"/>
+        </c:dLbls>
+        <c:marker val="1"/>
+        <c:axId val="2094734554"/>
+        <c:axId val="2094734552"/>
+        <c:axId val="2094734556"/>
+      </c:lineChart>
+      <c:catAx>
+        <c:axId val="2094734554"/>
+        <c:scaling>
+          <c:orientation val="minMax"/>
+        </c:scaling>
+        <c:delete val="0"/>
+        <c:axPos val="b"/>
+        <c:numFmt formatCode="General" sourceLinked="1"/>
+        <c:majorTickMark val="out"/>
+        <c:minorTickMark val="none"/>
+        <c:tickLblPos val="low"/>
+        <c:spPr>
+          <a:ln w="12700" cap="flat">
+            <a:solidFill>
+              <a:srgbClr val="888888"/>
+            </a:solidFill>
+            <a:prstDash val="solid"/>
+            <a:round/>
+          </a:ln>
+        </c:spPr>
+        <c:txPr>
+          <a:bodyPr/>
+          <a:lstStyle/>
+          <a:p>
+            <a:pPr>
+              <a:defRPr sz="900" b="0" i="0" u="none" strike="noStrike">
+                <a:solidFill>
+                  <a:srgbClr val="64748B"/>
+                </a:solidFill>
+                <a:latin typeface="Arial"/>
+              </a:defRPr>
+            </a:pPr>
+            <a:endParaRPr lang="en-US"/>
+          </a:p>
+        </c:txPr>
+        <c:crossAx val="2094734552"/>
+        <c:crosses val="autoZero"/>
+        <c:auto val="1"/>
+        <c:lblAlgn val="ctr"/>
+        <c:noMultiLvlLbl val="1"/>
+      </c:catAx>
+      <c:valAx>
+        <c:axId val="2094734552"/>
+        <c:scaling>
+          <c:orientation val="minMax"/>
+          <c:max val="90"/>
+          <c:min val="0"/>
+        </c:scaling>
+        <c:delete val="0"/>
+        <c:axPos val="l"/>
+        <c:majorGridlines>
+          <c:spPr>
+            <a:ln w="12700" cap="flat">
+              <a:solidFill>
+                <a:srgbClr val="E6EAF0"/>
+              </a:solidFill>
+              <a:prstDash val="solid"/>
+              <a:round/>
+            </a:ln>
+          </c:spPr>
+        </c:majorGridlines>
+        <c:title>
+          <c:tx>
+            <c:rich>
+              <a:bodyPr/>
+              <a:lstStyle/>
+              <a:p>
+                <a:pPr>
+                  <a:defRPr sz="1000" b="0" i="0" u="none" strike="noStrike">
+                    <a:solidFill>
+                      <a:srgbClr val="64748B"/>
+                    </a:solidFill>
+                    <a:latin typeface="Arial"/>
+                  </a:defRPr>
+                </a:pPr>
+                <a:r>
+                  <a:rPr sz="1000" b="0" i="0" u="none" strike="noStrike">
+                    <a:solidFill>
+                      <a:srgbClr val="64748B"/>
+                    </a:solidFill>
+                    <a:latin typeface="Arial"/>
+                  </a:rPr>
+                  <a:t>Rs lakh per month</a:t>
+                </a:r>
+              </a:p>
+            </c:rich>
+          </c:tx>
+          <c:layout/>
+          <c:overlay val="0"/>
+        </c:title>
+        <c:numFmt formatCode="General" sourceLinked="0"/>
+        <c:majorTickMark val="out"/>
+        <c:minorTickMark val="none"/>
+        <c:tickLblPos val="nextTo"/>
+        <c:spPr>
+          <a:ln w="12700" cap="flat">
+            <a:solidFill>
+              <a:srgbClr val="888888"/>
+            </a:solidFill>
+            <a:prstDash val="solid"/>
+            <a:round/>
+          </a:ln>
+        </c:spPr>
+        <c:txPr>
+          <a:bodyPr/>
+          <a:lstStyle/>
+          <a:p>
+            <a:pPr>
+              <a:defRPr sz="900" b="0" i="0" u="none" strike="noStrike">
+                <a:solidFill>
+                  <a:srgbClr val="64748B"/>
+                </a:solidFill>
+                <a:latin typeface="Arial"/>
+              </a:defRPr>
+            </a:pPr>
+            <a:endParaRPr lang="en-US"/>
+          </a:p>
+        </c:txPr>
+        <c:crossAx val="2094734554"/>
+        <c:crosses val="autoZero"/>
+        <c:crossBetween val="between"/>
+        <c:majorUnit val="20"/>
+      </c:valAx>
+      <c:spPr>
+        <a:noFill/>
+        <a:ln>
+          <a:noFill/>
+        </a:ln>
+        <a:effectLst/>
+      </c:spPr>
+    </c:plotArea>
+    <c:legend>
+      <c:legendPos val="b"/>
+      <c:overlay val="0"/>
+      <c:txPr>
+        <a:bodyPr/>
+        <a:lstStyle/>
+        <a:p>
+          <a:pPr>
+            <a:defRPr sz="1000">
+              <a:solidFill>
+                <a:srgbClr val="64748B"/>
+              </a:solidFill>
+            </a:defRPr>
+          </a:pPr>
+          <a:endParaRPr lang="en-US"/>
+        </a:p>
+      </c:txPr>
+    </c:legend>
+    <c:plotVisOnly val="1"/>
+    <c:dispBlanksAs val="span"/>
+  </c:chart>
+  <c:spPr>
+    <a:noFill/>
+    <a:ln>
+      <a:noFill/>
+    </a:ln>
+    <a:effectLst/>
+  </c:spPr>
+  <c:externalData r:id="rId1">
+    <c:autoUpdate val="0"/>
+  </c:externalData>
+</c:chartSpace>
+</file>
+
+<file path=ppt/charts/chart5.xml><?xml version="1.0" encoding="utf-8"?>
+<c:chartSpace xmlns:c="http://schemas.openxmlformats.org/drawingml/2006/chart" xmlns:a="http://schemas.openxmlformats.org/drawingml/2006/main" xmlns:r="http://schemas.openxmlformats.org/officeDocument/2006/relationships">
+  <c:date1904 val="0"/>
+  <c:roundedCorners val="1"/>
+  <c:chart>
+    <c:autoTitleDeleted val="1"/>
+    <c:plotArea>
+      <c:layout/>
+      <c:barChart>
+        <c:barDir val="col"/>
+        <c:grouping val="stacked"/>
+        <c:varyColors val="0"/>
+        <c:ser>
+          <c:idx val="0"/>
+          <c:order val="0"/>
+          <c:tx>
+            <c:strRef>
+              <c:f>Sheet1!$B$1</c:f>
+              <c:strCache>
+                <c:ptCount val="1"/>
+                <c:pt idx="0">
+                  <c:v>FD interest</c:v>
+                </c:pt>
+              </c:strCache>
+            </c:strRef>
+          </c:tx>
+          <c:spPr>
+            <a:solidFill>
+              <a:srgbClr val="0D9488"/>
+            </a:solidFill>
+            <a:effectLst/>
+          </c:spPr>
+          <c:invertIfNegative val="0"/>
+          <c:dLbls>
+            <c:numFmt formatCode="#,##0" sourceLinked="0"/>
+            <c:txPr>
+              <a:bodyPr/>
+              <a:lstStyle/>
+              <a:p>
+                <a:pPr>
+                  <a:defRPr b="0" i="0" strike="noStrike" sz="1200" u="none">
+                    <a:solidFill>
+                      <a:srgbClr val="000000"/>
+                    </a:solidFill>
+                    <a:latin typeface="Arial"/>
+                  </a:defRPr>
+                </a:pPr>
+              </a:p>
+            </c:txPr>
+            <c:showLegendKey val="0"/>
+            <c:showVal val="0"/>
+            <c:showCatName val="0"/>
+            <c:showSerName val="0"/>
+            <c:showPercent val="0"/>
+            <c:showBubbleSize val="0"/>
+            <c:showLeaderLines val="0"/>
+          </c:dLbls>
+          <c:cat>
+            <c:multiLvlStrRef>
+              <c:f>Sheet1!$A$2:$A$10</c:f>
+              <c:multiLvlStrCache>
+                <c:ptCount val="9"/>
+                <c:lvl>
+                  <c:pt idx="0">
+                    <c:v>Aug 26</c:v>
+                  </c:pt>
+                  <c:pt idx="1">
+                    <c:v>Sep 26</c:v>
+                  </c:pt>
+                  <c:pt idx="2">
+                    <c:v>Oct 26</c:v>
+                  </c:pt>
+                  <c:pt idx="3">
+                    <c:v>Nov 26</c:v>
+                  </c:pt>
+                  <c:pt idx="4">
+                    <c:v>Dec 26</c:v>
+                  </c:pt>
+                  <c:pt idx="5">
+                    <c:v>Jan 27</c:v>
+                  </c:pt>
+                  <c:pt idx="6">
+                    <c:v>Feb 27</c:v>
+                  </c:pt>
+                  <c:pt idx="7">
+                    <c:v>Mar 27</c:v>
+                  </c:pt>
+                  <c:pt idx="8">
+                    <c:v>Apr 27</c:v>
+                  </c:pt>
+                </c:lvl>
+              </c:multiLvlStrCache>
+            </c:multiLvlStrRef>
+          </c:cat>
+          <c:val>
+            <c:numRef>
+              <c:f>Sheet1!$B$2:$B$10</c:f>
+              <c:numCache>
+                <c:formatCode>General</c:formatCode>
+                <c:ptCount val="9"/>
+                <c:pt idx="0">
+                  <c:v>12.5</c:v>
+                </c:pt>
+                <c:pt idx="1">
+                  <c:v>12.5</c:v>
+                </c:pt>
+                <c:pt idx="2">
+                  <c:v>12.5</c:v>
+                </c:pt>
+                <c:pt idx="3">
+                  <c:v>12.5</c:v>
+                </c:pt>
+                <c:pt idx="4">
+                  <c:v>12.5</c:v>
+                </c:pt>
+                <c:pt idx="5">
+                  <c:v>12.5</c:v>
+                </c:pt>
+                <c:pt idx="6">
+                  <c:v>12.5</c:v>
+                </c:pt>
+                <c:pt idx="7">
+                  <c:v>12.5</c:v>
+                </c:pt>
+                <c:pt idx="8">
+                  <c:v>12.5</c:v>
+                </c:pt>
+              </c:numCache>
+            </c:numRef>
+          </c:val>
+        </c:ser>
+        <c:ser>
+          <c:idx val="1"/>
+          <c:order val="1"/>
+          <c:tx>
+            <c:strRef>
+              <c:f>Sheet1!$C$1</c:f>
+              <c:strCache>
+                <c:ptCount val="1"/>
+                <c:pt idx="0">
+                  <c:v>IPO &amp; ratings</c:v>
+                </c:pt>
+              </c:strCache>
+            </c:strRef>
+          </c:tx>
+          <c:spPr>
+            <a:solidFill>
+              <a:srgbClr val="0284C7"/>
+            </a:solidFill>
+            <a:effectLst/>
+          </c:spPr>
+          <c:invertIfNegative val="0"/>
+          <c:dLbls>
+            <c:numFmt formatCode="#,##0" sourceLinked="0"/>
+            <c:txPr>
+              <a:bodyPr/>
+              <a:lstStyle/>
+              <a:p>
+                <a:pPr>
+                  <a:defRPr b="0" i="0" strike="noStrike" sz="1200" u="none">
+                    <a:solidFill>
+                      <a:srgbClr val="000000"/>
+                    </a:solidFill>
+                    <a:latin typeface="Arial"/>
+                  </a:defRPr>
+                </a:pPr>
+              </a:p>
+            </c:txPr>
+            <c:showLegendKey val="0"/>
+            <c:showVal val="0"/>
+            <c:showCatName val="0"/>
+            <c:showSerName val="0"/>
+            <c:showPercent val="0"/>
+            <c:showBubbleSize val="0"/>
+            <c:showLeaderLines val="0"/>
+          </c:dLbls>
+          <c:cat>
+            <c:multiLvlStrRef>
+              <c:f>Sheet1!$A$2:$A$10</c:f>
+              <c:multiLvlStrCache>
+                <c:ptCount val="9"/>
+                <c:lvl>
+                  <c:pt idx="0">
+                    <c:v>Aug 26</c:v>
+                  </c:pt>
+                  <c:pt idx="1">
+                    <c:v>Sep 26</c:v>
+                  </c:pt>
+                  <c:pt idx="2">
+                    <c:v>Oct 26</c:v>
+                  </c:pt>
+                  <c:pt idx="3">
+                    <c:v>Nov 26</c:v>
+                  </c:pt>
+                  <c:pt idx="4">
+                    <c:v>Dec 26</c:v>
+                  </c:pt>
+                  <c:pt idx="5">
+                    <c:v>Jan 27</c:v>
+                  </c:pt>
+                  <c:pt idx="6">
+                    <c:v>Feb 27</c:v>
+                  </c:pt>
+                  <c:pt idx="7">
+                    <c:v>Mar 27</c:v>
+                  </c:pt>
+                  <c:pt idx="8">
+                    <c:v>Apr 27</c:v>
+                  </c:pt>
+                </c:lvl>
+              </c:multiLvlStrCache>
+            </c:multiLvlStrRef>
+          </c:cat>
+          <c:val>
+            <c:numRef>
+              <c:f>Sheet1!$C$2:$C$10</c:f>
+              <c:numCache>
+                <c:formatCode>General</c:formatCode>
+                <c:ptCount val="9"/>
+                <c:pt idx="0">
+                  <c:v>8.1</c:v>
+                </c:pt>
+                <c:pt idx="1">
+                  <c:v>10.1</c:v>
+                </c:pt>
+                <c:pt idx="2">
+                  <c:v>12.1</c:v>
+                </c:pt>
+                <c:pt idx="3">
+                  <c:v>12.1</c:v>
+                </c:pt>
+                <c:pt idx="4">
+                  <c:v>12.1</c:v>
+                </c:pt>
+                <c:pt idx="5">
+                  <c:v>12.1</c:v>
+                </c:pt>
+                <c:pt idx="6">
+                  <c:v>12.1</c:v>
+                </c:pt>
+                <c:pt idx="7">
+                  <c:v>12.1</c:v>
+                </c:pt>
+                <c:pt idx="8">
+                  <c:v>12.1</c:v>
+                </c:pt>
+              </c:numCache>
+            </c:numRef>
+          </c:val>
+        </c:ser>
+        <c:ser>
+          <c:idx val="2"/>
+          <c:order val="2"/>
+          <c:tx>
+            <c:strRef>
+              <c:f>Sheet1!$D$1</c:f>
+              <c:strCache>
+                <c:ptCount val="1"/>
+                <c:pt idx="0">
+                  <c:v>BLR</c:v>
+                </c:pt>
+              </c:strCache>
+            </c:strRef>
+          </c:tx>
+          <c:spPr>
+            <a:solidFill>
+              <a:srgbClr val="10B981"/>
+            </a:solidFill>
+            <a:effectLst/>
+          </c:spPr>
+          <c:invertIfNegative val="0"/>
+          <c:dLbls>
+            <c:numFmt formatCode="#,##0" sourceLinked="0"/>
+            <c:txPr>
+              <a:bodyPr/>
+              <a:lstStyle/>
+              <a:p>
+                <a:pPr>
+                  <a:defRPr b="0" i="0" strike="noStrike" sz="1200" u="none">
+                    <a:solidFill>
+                      <a:srgbClr val="000000"/>
+                    </a:solidFill>
+                    <a:latin typeface="Arial"/>
+                  </a:defRPr>
+                </a:pPr>
+              </a:p>
+            </c:txPr>
+            <c:showLegendKey val="0"/>
+            <c:showVal val="0"/>
+            <c:showCatName val="0"/>
+            <c:showSerName val="0"/>
+            <c:showPercent val="0"/>
+            <c:showBubbleSize val="0"/>
+            <c:showLeaderLines val="0"/>
+          </c:dLbls>
+          <c:cat>
+            <c:multiLvlStrRef>
+              <c:f>Sheet1!$A$2:$A$10</c:f>
+              <c:multiLvlStrCache>
+                <c:ptCount val="9"/>
+                <c:lvl>
+                  <c:pt idx="0">
+                    <c:v>Aug 26</c:v>
+                  </c:pt>
+                  <c:pt idx="1">
+                    <c:v>Sep 26</c:v>
+                  </c:pt>
+                  <c:pt idx="2">
+                    <c:v>Oct 26</c:v>
+                  </c:pt>
+                  <c:pt idx="3">
+                    <c:v>Nov 26</c:v>
+                  </c:pt>
+                  <c:pt idx="4">
+                    <c:v>Dec 26</c:v>
+                  </c:pt>
+                  <c:pt idx="5">
+                    <c:v>Jan 27</c:v>
+                  </c:pt>
+                  <c:pt idx="6">
+                    <c:v>Feb 27</c:v>
+                  </c:pt>
+                  <c:pt idx="7">
+                    <c:v>Mar 27</c:v>
+                  </c:pt>
+                  <c:pt idx="8">
+                    <c:v>Apr 27</c:v>
+                  </c:pt>
+                </c:lvl>
+              </c:multiLvlStrCache>
+            </c:multiLvlStrRef>
+          </c:cat>
+          <c:val>
+            <c:numRef>
+              <c:f>Sheet1!$D$2:$D$10</c:f>
+              <c:numCache>
+                <c:formatCode>General</c:formatCode>
+                <c:ptCount val="9"/>
+                <c:pt idx="0">
+                  <c:v>0</c:v>
+                </c:pt>
+                <c:pt idx="1">
+                  <c:v>0</c:v>
+                </c:pt>
+                <c:pt idx="2">
+                  <c:v>0</c:v>
+                </c:pt>
+                <c:pt idx="3">
+                  <c:v>0</c:v>
+                </c:pt>
+                <c:pt idx="4">
+                  <c:v>0</c:v>
+                </c:pt>
+                <c:pt idx="5">
+                  <c:v>0</c:v>
+                </c:pt>
+                <c:pt idx="6">
+                  <c:v>42</c:v>
+                </c:pt>
+                <c:pt idx="7">
+                  <c:v>44</c:v>
+                </c:pt>
+                <c:pt idx="8">
+                  <c:v>46</c:v>
+                </c:pt>
+              </c:numCache>
+            </c:numRef>
+          </c:val>
+        </c:ser>
+        <c:dLbls>
+          <c:numFmt formatCode="#,##0" sourceLinked="0"/>
+          <c:txPr>
+            <a:bodyPr/>
+            <a:lstStyle/>
+            <a:p>
+              <a:pPr>
+                <a:defRPr b="0" i="0" strike="noStrike" sz="1200" u="none">
+                  <a:solidFill>
+                    <a:srgbClr val="000000"/>
+                  </a:solidFill>
+                  <a:latin typeface="Arial"/>
+                </a:defRPr>
+              </a:pPr>
+            </a:p>
+          </c:txPr>
+          <c:showLegendKey val="0"/>
+          <c:showVal val="0"/>
+          <c:showCatName val="0"/>
+          <c:showSerName val="0"/>
+          <c:showPercent val="0"/>
+          <c:showBubbleSize val="0"/>
+          <c:showLeaderLines val="0"/>
+        </c:dLbls>
+        <c:gapWidth val="50"/>
+        <c:overlap val="100"/>
+        <c:axId val="2094734554"/>
+        <c:axId val="2094734552"/>
+        <c:axId val="2094734556"/>
+      </c:barChart>
+      <c:lineChart>
+        <c:varyColors val="0"/>
+        <c:ser>
+          <c:idx val="3"/>
+          <c:order val="3"/>
+          <c:tx>
+            <c:strRef>
+              <c:f>Sheet1!$E$1</c:f>
+              <c:strCache>
+                <c:ptCount val="1"/>
+                <c:pt idx="0">
+                  <c:v>Expense</c:v>
+                </c:pt>
+              </c:strCache>
+            </c:strRef>
+          </c:tx>
+          <c:spPr>
+            <a:solidFill>
+              <a:srgbClr val="E11D48"/>
+            </a:solidFill>
+            <a:ln w="34925" cap="flat">
+              <a:solidFill>
+                <a:srgbClr val="E11D48"/>
+              </a:solidFill>
+              <a:prstDash val="dash"/>
+              <a:round/>
+            </a:ln>
+            <a:effectLst/>
+          </c:spPr>
+          <c:invertIfNegative val="0"/>
+          <c:dLbls>
+            <c:numFmt formatCode="#,##0" sourceLinked="0"/>
+            <c:txPr>
+              <a:bodyPr/>
+              <a:lstStyle/>
+              <a:p>
+                <a:pPr>
+                  <a:defRPr b="0" i="0" strike="noStrike" sz="1200" u="none">
+                    <a:solidFill>
+                      <a:srgbClr val="000000"/>
+                    </a:solidFill>
+                    <a:latin typeface="Arial"/>
+                  </a:defRPr>
+                </a:pPr>
+              </a:p>
+            </c:txPr>
+            <c:showLegendKey val="0"/>
+            <c:showVal val="0"/>
+            <c:showCatName val="0"/>
+            <c:showSerName val="0"/>
+            <c:showPercent val="0"/>
+            <c:showBubbleSize val="0"/>
+            <c:showLeaderLines val="0"/>
+          </c:dLbls>
+          <c:marker>
+            <c:symbol val="none"/>
+            <c:size val="6"/>
+            <c:spPr>
+              <a:solidFill>
+                <a:srgbClr val="E11D48"/>
+              </a:solidFill>
+              <a:ln w="9525" cap="flat">
+                <a:solidFill>
+                  <a:srgbClr val="E11D48"/>
+                </a:solidFill>
+                <a:prstDash val="solid"/>
+                <a:round/>
+              </a:ln>
+              <a:effectLst/>
+            </c:spPr>
+          </c:marker>
+          <c:cat>
+            <c:multiLvlStrRef>
+              <c:f>Sheet1!$A$2:$A$10</c:f>
+              <c:multiLvlStrCache>
+                <c:ptCount val="9"/>
+                <c:lvl>
+                  <c:pt idx="0">
+                    <c:v>Aug 26</c:v>
+                  </c:pt>
+                  <c:pt idx="1">
+                    <c:v>Sep 26</c:v>
+                  </c:pt>
+                  <c:pt idx="2">
+                    <c:v>Oct 26</c:v>
+                  </c:pt>
+                  <c:pt idx="3">
+                    <c:v>Nov 26</c:v>
+                  </c:pt>
+                  <c:pt idx="4">
+                    <c:v>Dec 26</c:v>
+                  </c:pt>
+                  <c:pt idx="5">
+                    <c:v>Jan 27</c:v>
+                  </c:pt>
+                  <c:pt idx="6">
+                    <c:v>Feb 27</c:v>
+                  </c:pt>
+                  <c:pt idx="7">
+                    <c:v>Mar 27</c:v>
+                  </c:pt>
+                  <c:pt idx="8">
+                    <c:v>Apr 27</c:v>
+                  </c:pt>
+                </c:lvl>
+              </c:multiLvlStrCache>
+            </c:multiLvlStrRef>
+          </c:cat>
+          <c:val>
+            <c:numRef>
+              <c:f>Sheet1!$E$2:$E$10</c:f>
+              <c:numCache>
+                <c:formatCode>General</c:formatCode>
+                <c:ptCount val="9"/>
+                <c:pt idx="0">
+                  <c:v>52.2</c:v>
+                </c:pt>
+                <c:pt idx="1">
+                  <c:v>46.7</c:v>
+                </c:pt>
+                <c:pt idx="2">
+                  <c:v>46.7</c:v>
+                </c:pt>
+                <c:pt idx="3">
+                  <c:v>52.2</c:v>
+                </c:pt>
+                <c:pt idx="4">
+                  <c:v>46.7</c:v>
+                </c:pt>
+                <c:pt idx="5">
+                  <c:v>57.2</c:v>
+                </c:pt>
+                <c:pt idx="6">
+                  <c:v>56</c:v>
+                </c:pt>
+                <c:pt idx="7">
+                  <c:v>50.5</c:v>
+                </c:pt>
+                <c:pt idx="8">
+                  <c:v>50.5</c:v>
+                </c:pt>
+              </c:numCache>
+            </c:numRef>
+          </c:val>
+          <c:smooth val="0"/>
+        </c:ser>
+        <c:dLbls>
+          <c:numFmt formatCode="#,##0" sourceLinked="0"/>
+          <c:txPr>
+            <a:bodyPr/>
+            <a:lstStyle/>
+            <a:p>
+              <a:pPr>
+                <a:defRPr b="0" i="0" strike="noStrike" sz="1200" u="none">
+                  <a:solidFill>
+                    <a:srgbClr val="000000"/>
+                  </a:solidFill>
+                  <a:latin typeface="Arial"/>
+                </a:defRPr>
+              </a:pPr>
+            </a:p>
+          </c:txPr>
+          <c:showLegendKey val="0"/>
+          <c:showVal val="0"/>
+          <c:showCatName val="0"/>
+          <c:showSerName val="0"/>
+          <c:showPercent val="0"/>
+          <c:showBubbleSize val="0"/>
+          <c:showLeaderLines val="0"/>
+        </c:dLbls>
+        <c:marker val="1"/>
+        <c:axId val="2094734554"/>
+        <c:axId val="2094734552"/>
+        <c:axId val="2094734556"/>
+      </c:lineChart>
+      <c:catAx>
+        <c:axId val="2094734554"/>
+        <c:scaling>
+          <c:orientation val="minMax"/>
+        </c:scaling>
+        <c:delete val="0"/>
+        <c:axPos val="b"/>
+        <c:numFmt formatCode="General" sourceLinked="1"/>
+        <c:majorTickMark val="out"/>
+        <c:minorTickMark val="none"/>
+        <c:tickLblPos val="low"/>
+        <c:spPr>
+          <a:ln w="12700" cap="flat">
+            <a:solidFill>
+              <a:srgbClr val="888888"/>
+            </a:solidFill>
+            <a:prstDash val="solid"/>
+            <a:round/>
+          </a:ln>
+        </c:spPr>
+        <c:txPr>
+          <a:bodyPr/>
+          <a:lstStyle/>
+          <a:p>
+            <a:pPr>
+              <a:defRPr sz="900" b="0" i="0" u="none" strike="noStrike">
+                <a:solidFill>
+                  <a:srgbClr val="64748B"/>
+                </a:solidFill>
+                <a:latin typeface="Arial"/>
+              </a:defRPr>
+            </a:pPr>
+            <a:endParaRPr lang="en-US"/>
+          </a:p>
+        </c:txPr>
+        <c:crossAx val="2094734552"/>
+        <c:crosses val="autoZero"/>
+        <c:auto val="1"/>
+        <c:lblAlgn val="ctr"/>
+        <c:noMultiLvlLbl val="1"/>
+      </c:catAx>
+      <c:valAx>
+        <c:axId val="2094734552"/>
+        <c:scaling>
+          <c:orientation val="minMax"/>
+          <c:max val="90"/>
+          <c:min val="0"/>
+        </c:scaling>
+        <c:delete val="0"/>
+        <c:axPos val="l"/>
+        <c:majorGridlines>
+          <c:spPr>
+            <a:ln w="12700" cap="flat">
+              <a:solidFill>
+                <a:srgbClr val="E6EAF0"/>
+              </a:solidFill>
+              <a:prstDash val="solid"/>
+              <a:round/>
+            </a:ln>
+          </c:spPr>
+        </c:majorGridlines>
+        <c:title>
+          <c:tx>
+            <c:rich>
+              <a:bodyPr/>
+              <a:lstStyle/>
+              <a:p>
+                <a:pPr>
+                  <a:defRPr sz="1000" b="0" i="0" u="none" strike="noStrike">
+                    <a:solidFill>
+                      <a:srgbClr val="64748B"/>
+                    </a:solidFill>
+                    <a:latin typeface="Arial"/>
+                  </a:defRPr>
+                </a:pPr>
+                <a:r>
+                  <a:rPr sz="1000" b="0" i="0" u="none" strike="noStrike">
+                    <a:solidFill>
+                      <a:srgbClr val="64748B"/>
+                    </a:solidFill>
+                    <a:latin typeface="Arial"/>
+                  </a:rPr>
+                  <a:t>Rs lakh per month</a:t>
+                </a:r>
+              </a:p>
+            </c:rich>
+          </c:tx>
+          <c:layout/>
+          <c:overlay val="0"/>
+        </c:title>
+        <c:numFmt formatCode="General" sourceLinked="0"/>
+        <c:majorTickMark val="out"/>
+        <c:minorTickMark val="none"/>
+        <c:tickLblPos val="nextTo"/>
+        <c:spPr>
+          <a:ln w="12700" cap="flat">
+            <a:solidFill>
+              <a:srgbClr val="888888"/>
+            </a:solidFill>
+            <a:prstDash val="solid"/>
+            <a:round/>
+          </a:ln>
+        </c:spPr>
+        <c:txPr>
+          <a:bodyPr/>
+          <a:lstStyle/>
+          <a:p>
+            <a:pPr>
+              <a:defRPr sz="900" b="0" i="0" u="none" strike="noStrike">
+                <a:solidFill>
+                  <a:srgbClr val="64748B"/>
+                </a:solidFill>
+                <a:latin typeface="Arial"/>
+              </a:defRPr>
+            </a:pPr>
+            <a:endParaRPr lang="en-US"/>
+          </a:p>
+        </c:txPr>
+        <c:crossAx val="2094734554"/>
+        <c:crosses val="autoZero"/>
+        <c:crossBetween val="between"/>
+        <c:majorUnit val="20"/>
+      </c:valAx>
+      <c:spPr>
+        <a:noFill/>
+        <a:ln>
+          <a:noFill/>
+        </a:ln>
+        <a:effectLst/>
+      </c:spPr>
+    </c:plotArea>
+    <c:legend>
+      <c:legendPos val="b"/>
+      <c:overlay val="0"/>
+      <c:txPr>
+        <a:bodyPr/>
+        <a:lstStyle/>
+        <a:p>
+          <a:pPr>
+            <a:defRPr sz="1000">
+              <a:solidFill>
+                <a:srgbClr val="64748B"/>
+              </a:solidFill>
+            </a:defRPr>
+          </a:pPr>
+          <a:endParaRPr lang="en-US"/>
+        </a:p>
+      </c:txPr>
+    </c:legend>
+    <c:plotVisOnly val="1"/>
+    <c:dispBlanksAs val="span"/>
+  </c:chart>
+  <c:spPr>
+    <a:noFill/>
+    <a:ln>
+      <a:noFill/>
+    </a:ln>
+    <a:effectLst/>
+  </c:spPr>
+  <c:externalData r:id="rId1">
+    <c:autoUpdate val="0"/>
+  </c:externalData>
+</c:chartSpace>
+</file>
+
+<file path=ppt/charts/chart6.xml><?xml version="1.0" encoding="utf-8"?>
+<c:chartSpace xmlns:c="http://schemas.openxmlformats.org/drawingml/2006/chart" xmlns:a="http://schemas.openxmlformats.org/drawingml/2006/main" xmlns:r="http://schemas.openxmlformats.org/officeDocument/2006/relationships">
+  <c:date1904 val="0"/>
+  <c:roundedCorners val="1"/>
+  <c:chart>
+    <c:autoTitleDeleted val="1"/>
+    <c:plotArea>
+      <c:layout/>
+      <c:barChart>
+        <c:barDir val="col"/>
+        <c:grouping val="stacked"/>
+        <c:varyColors val="0"/>
+        <c:ser>
+          <c:idx val="0"/>
+          <c:order val="0"/>
+          <c:tx>
+            <c:strRef>
+              <c:f>Sheet1!$B$1</c:f>
+              <c:strCache>
+                <c:ptCount val="1"/>
+                <c:pt idx="0">
+                  <c:v>FD interest</c:v>
+                </c:pt>
+              </c:strCache>
+            </c:strRef>
+          </c:tx>
+          <c:spPr>
+            <a:solidFill>
+              <a:srgbClr val="0D9488"/>
+            </a:solidFill>
+            <a:effectLst/>
+          </c:spPr>
+          <c:invertIfNegative val="0"/>
+          <c:dLbls>
+            <c:numFmt formatCode="#,##0" sourceLinked="0"/>
+            <c:txPr>
+              <a:bodyPr/>
+              <a:lstStyle/>
+              <a:p>
+                <a:pPr>
+                  <a:defRPr b="0" i="0" strike="noStrike" sz="1200" u="none">
+                    <a:solidFill>
+                      <a:srgbClr val="000000"/>
+                    </a:solidFill>
+                    <a:latin typeface="Arial"/>
+                  </a:defRPr>
+                </a:pPr>
+              </a:p>
+            </c:txPr>
+            <c:showLegendKey val="0"/>
+            <c:showVal val="0"/>
+            <c:showCatName val="0"/>
+            <c:showSerName val="0"/>
+            <c:showPercent val="0"/>
+            <c:showBubbleSize val="0"/>
+            <c:showLeaderLines val="0"/>
+          </c:dLbls>
+          <c:cat>
+            <c:multiLvlStrRef>
+              <c:f>Sheet1!$A$2:$A$10</c:f>
+              <c:multiLvlStrCache>
+                <c:ptCount val="9"/>
+                <c:lvl>
+                  <c:pt idx="0">
+                    <c:v>Aug 26</c:v>
+                  </c:pt>
+                  <c:pt idx="1">
+                    <c:v>Sep 26</c:v>
+                  </c:pt>
+                  <c:pt idx="2">
+                    <c:v>Oct 26</c:v>
+                  </c:pt>
+                  <c:pt idx="3">
+                    <c:v>Nov 26</c:v>
+                  </c:pt>
+                  <c:pt idx="4">
+                    <c:v>Dec 26</c:v>
+                  </c:pt>
+                  <c:pt idx="5">
+                    <c:v>Jan 27</c:v>
+                  </c:pt>
+                  <c:pt idx="6">
+                    <c:v>Feb 27</c:v>
+                  </c:pt>
+                  <c:pt idx="7">
+                    <c:v>Mar 27</c:v>
+                  </c:pt>
+                  <c:pt idx="8">
+                    <c:v>Apr 27</c:v>
+                  </c:pt>
+                </c:lvl>
+              </c:multiLvlStrCache>
+            </c:multiLvlStrRef>
+          </c:cat>
+          <c:val>
+            <c:numRef>
+              <c:f>Sheet1!$B$2:$B$10</c:f>
+              <c:numCache>
+                <c:formatCode>General</c:formatCode>
+                <c:ptCount val="9"/>
+                <c:pt idx="0">
+                  <c:v>12.5</c:v>
+                </c:pt>
+                <c:pt idx="1">
+                  <c:v>12.5</c:v>
+                </c:pt>
+                <c:pt idx="2">
+                  <c:v>12.5</c:v>
+                </c:pt>
+                <c:pt idx="3">
+                  <c:v>12.5</c:v>
+                </c:pt>
+                <c:pt idx="4">
+                  <c:v>12.5</c:v>
+                </c:pt>
+                <c:pt idx="5">
+                  <c:v>12.5</c:v>
+                </c:pt>
+                <c:pt idx="6">
+                  <c:v>12.5</c:v>
+                </c:pt>
+                <c:pt idx="7">
+                  <c:v>12.5</c:v>
+                </c:pt>
+                <c:pt idx="8">
+                  <c:v>12.5</c:v>
+                </c:pt>
+              </c:numCache>
+            </c:numRef>
+          </c:val>
+        </c:ser>
+        <c:ser>
+          <c:idx val="1"/>
+          <c:order val="1"/>
+          <c:tx>
+            <c:strRef>
+              <c:f>Sheet1!$C$1</c:f>
+              <c:strCache>
+                <c:ptCount val="1"/>
+                <c:pt idx="0">
+                  <c:v>IPO &amp; ratings</c:v>
+                </c:pt>
+              </c:strCache>
+            </c:strRef>
+          </c:tx>
+          <c:spPr>
+            <a:solidFill>
+              <a:srgbClr val="0284C7"/>
+            </a:solidFill>
+            <a:effectLst/>
+          </c:spPr>
+          <c:invertIfNegative val="0"/>
+          <c:dLbls>
+            <c:numFmt formatCode="#,##0" sourceLinked="0"/>
+            <c:txPr>
+              <a:bodyPr/>
+              <a:lstStyle/>
+              <a:p>
+                <a:pPr>
+                  <a:defRPr b="0" i="0" strike="noStrike" sz="1200" u="none">
+                    <a:solidFill>
+                      <a:srgbClr val="000000"/>
+                    </a:solidFill>
+                    <a:latin typeface="Arial"/>
+                  </a:defRPr>
+                </a:pPr>
+              </a:p>
+            </c:txPr>
+            <c:showLegendKey val="0"/>
+            <c:showVal val="0"/>
+            <c:showCatName val="0"/>
+            <c:showSerName val="0"/>
+            <c:showPercent val="0"/>
+            <c:showBubbleSize val="0"/>
+            <c:showLeaderLines val="0"/>
+          </c:dLbls>
+          <c:cat>
+            <c:multiLvlStrRef>
+              <c:f>Sheet1!$A$2:$A$10</c:f>
+              <c:multiLvlStrCache>
+                <c:ptCount val="9"/>
+                <c:lvl>
+                  <c:pt idx="0">
+                    <c:v>Aug 26</c:v>
+                  </c:pt>
+                  <c:pt idx="1">
+                    <c:v>Sep 26</c:v>
+                  </c:pt>
+                  <c:pt idx="2">
+                    <c:v>Oct 26</c:v>
+                  </c:pt>
+                  <c:pt idx="3">
+                    <c:v>Nov 26</c:v>
+                  </c:pt>
+                  <c:pt idx="4">
+                    <c:v>Dec 26</c:v>
+                  </c:pt>
+                  <c:pt idx="5">
+                    <c:v>Jan 27</c:v>
+                  </c:pt>
+                  <c:pt idx="6">
+                    <c:v>Feb 27</c:v>
+                  </c:pt>
+                  <c:pt idx="7">
+                    <c:v>Mar 27</c:v>
+                  </c:pt>
+                  <c:pt idx="8">
+                    <c:v>Apr 27</c:v>
+                  </c:pt>
+                </c:lvl>
+              </c:multiLvlStrCache>
+            </c:multiLvlStrRef>
+          </c:cat>
+          <c:val>
+            <c:numRef>
+              <c:f>Sheet1!$C$2:$C$10</c:f>
+              <c:numCache>
+                <c:formatCode>General</c:formatCode>
+                <c:ptCount val="9"/>
+                <c:pt idx="0">
+                  <c:v>8.1</c:v>
+                </c:pt>
+                <c:pt idx="1">
+                  <c:v>10.1</c:v>
+                </c:pt>
+                <c:pt idx="2">
+                  <c:v>12.1</c:v>
+                </c:pt>
+                <c:pt idx="3">
+                  <c:v>12.9</c:v>
+                </c:pt>
+                <c:pt idx="4">
+                  <c:v>13.7</c:v>
+                </c:pt>
+                <c:pt idx="5">
+                  <c:v>14.5</c:v>
+                </c:pt>
+                <c:pt idx="6">
+                  <c:v>15.3</c:v>
+                </c:pt>
+                <c:pt idx="7">
+                  <c:v>16.1</c:v>
+                </c:pt>
+                <c:pt idx="8">
+                  <c:v>16.9</c:v>
+                </c:pt>
+              </c:numCache>
+            </c:numRef>
+          </c:val>
+        </c:ser>
+        <c:ser>
+          <c:idx val="2"/>
+          <c:order val="2"/>
+          <c:tx>
+            <c:strRef>
+              <c:f>Sheet1!$D$1</c:f>
+              <c:strCache>
+                <c:ptCount val="1"/>
+                <c:pt idx="0">
+                  <c:v>BLR</c:v>
+                </c:pt>
+              </c:strCache>
+            </c:strRef>
+          </c:tx>
+          <c:spPr>
+            <a:solidFill>
+              <a:srgbClr val="10B981"/>
+            </a:solidFill>
+            <a:effectLst/>
+          </c:spPr>
+          <c:invertIfNegative val="0"/>
+          <c:dLbls>
+            <c:numFmt formatCode="#,##0" sourceLinked="0"/>
+            <c:txPr>
+              <a:bodyPr/>
+              <a:lstStyle/>
+              <a:p>
+                <a:pPr>
+                  <a:defRPr b="0" i="0" strike="noStrike" sz="1200" u="none">
+                    <a:solidFill>
+                      <a:srgbClr val="000000"/>
+                    </a:solidFill>
+                    <a:latin typeface="Arial"/>
+                  </a:defRPr>
+                </a:pPr>
+              </a:p>
+            </c:txPr>
+            <c:showLegendKey val="0"/>
+            <c:showVal val="0"/>
+            <c:showCatName val="0"/>
+            <c:showSerName val="0"/>
+            <c:showPercent val="0"/>
+            <c:showBubbleSize val="0"/>
+            <c:showLeaderLines val="0"/>
+          </c:dLbls>
+          <c:cat>
+            <c:multiLvlStrRef>
+              <c:f>Sheet1!$A$2:$A$10</c:f>
+              <c:multiLvlStrCache>
+                <c:ptCount val="9"/>
+                <c:lvl>
+                  <c:pt idx="0">
+                    <c:v>Aug 26</c:v>
+                  </c:pt>
+                  <c:pt idx="1">
+                    <c:v>Sep 26</c:v>
+                  </c:pt>
+                  <c:pt idx="2">
+                    <c:v>Oct 26</c:v>
+                  </c:pt>
+                  <c:pt idx="3">
+                    <c:v>Nov 26</c:v>
+                  </c:pt>
+                  <c:pt idx="4">
+                    <c:v>Dec 26</c:v>
+                  </c:pt>
+                  <c:pt idx="5">
+                    <c:v>Jan 27</c:v>
+                  </c:pt>
+                  <c:pt idx="6">
+                    <c:v>Feb 27</c:v>
+                  </c:pt>
+                  <c:pt idx="7">
+                    <c:v>Mar 27</c:v>
+                  </c:pt>
+                  <c:pt idx="8">
+                    <c:v>Apr 27</c:v>
+                  </c:pt>
+                </c:lvl>
+              </c:multiLvlStrCache>
+            </c:multiLvlStrRef>
+          </c:cat>
+          <c:val>
+            <c:numRef>
+              <c:f>Sheet1!$D$2:$D$10</c:f>
+              <c:numCache>
+                <c:formatCode>General</c:formatCode>
+                <c:ptCount val="9"/>
+                <c:pt idx="0">
+                  <c:v>0</c:v>
+                </c:pt>
+                <c:pt idx="1">
+                  <c:v>0</c:v>
+                </c:pt>
+                <c:pt idx="2">
+                  <c:v>0</c:v>
+                </c:pt>
+                <c:pt idx="3">
+                  <c:v>0</c:v>
+                </c:pt>
+                <c:pt idx="4">
+                  <c:v>0</c:v>
+                </c:pt>
+                <c:pt idx="5">
+                  <c:v>0</c:v>
+                </c:pt>
+                <c:pt idx="6">
+                  <c:v>0</c:v>
+                </c:pt>
+                <c:pt idx="7">
+                  <c:v>0</c:v>
+                </c:pt>
+                <c:pt idx="8">
+                  <c:v>0</c:v>
+                </c:pt>
+              </c:numCache>
+            </c:numRef>
+          </c:val>
+        </c:ser>
+        <c:dLbls>
+          <c:numFmt formatCode="#,##0" sourceLinked="0"/>
+          <c:txPr>
+            <a:bodyPr/>
+            <a:lstStyle/>
+            <a:p>
+              <a:pPr>
+                <a:defRPr b="0" i="0" strike="noStrike" sz="1200" u="none">
+                  <a:solidFill>
+                    <a:srgbClr val="000000"/>
+                  </a:solidFill>
+                  <a:latin typeface="Arial"/>
+                </a:defRPr>
+              </a:pPr>
+            </a:p>
+          </c:txPr>
+          <c:showLegendKey val="0"/>
+          <c:showVal val="0"/>
+          <c:showCatName val="0"/>
+          <c:showSerName val="0"/>
+          <c:showPercent val="0"/>
+          <c:showBubbleSize val="0"/>
+          <c:showLeaderLines val="0"/>
+        </c:dLbls>
+        <c:gapWidth val="50"/>
+        <c:overlap val="100"/>
+        <c:axId val="2094734554"/>
+        <c:axId val="2094734552"/>
+        <c:axId val="2094734556"/>
+      </c:barChart>
+      <c:lineChart>
+        <c:varyColors val="0"/>
+        <c:ser>
+          <c:idx val="3"/>
+          <c:order val="3"/>
+          <c:tx>
+            <c:strRef>
+              <c:f>Sheet1!$E$1</c:f>
+              <c:strCache>
+                <c:ptCount val="1"/>
+                <c:pt idx="0">
+                  <c:v>Expense</c:v>
+                </c:pt>
+              </c:strCache>
+            </c:strRef>
+          </c:tx>
+          <c:spPr>
+            <a:solidFill>
+              <a:srgbClr val="E11D48"/>
+            </a:solidFill>
+            <a:ln w="34925" cap="flat">
+              <a:solidFill>
+                <a:srgbClr val="E11D48"/>
+              </a:solidFill>
+              <a:prstDash val="dash"/>
+              <a:round/>
+            </a:ln>
+            <a:effectLst/>
+          </c:spPr>
+          <c:invertIfNegative val="0"/>
+          <c:dLbls>
+            <c:numFmt formatCode="#,##0" sourceLinked="0"/>
+            <c:txPr>
+              <a:bodyPr/>
+              <a:lstStyle/>
+              <a:p>
+                <a:pPr>
+                  <a:defRPr b="0" i="0" strike="noStrike" sz="1200" u="none">
+                    <a:solidFill>
+                      <a:srgbClr val="000000"/>
+                    </a:solidFill>
+                    <a:latin typeface="Arial"/>
+                  </a:defRPr>
+                </a:pPr>
+              </a:p>
+            </c:txPr>
+            <c:showLegendKey val="0"/>
+            <c:showVal val="0"/>
+            <c:showCatName val="0"/>
+            <c:showSerName val="0"/>
+            <c:showPercent val="0"/>
+            <c:showBubbleSize val="0"/>
+            <c:showLeaderLines val="0"/>
+          </c:dLbls>
+          <c:marker>
+            <c:symbol val="none"/>
+            <c:size val="6"/>
+            <c:spPr>
+              <a:solidFill>
+                <a:srgbClr val="E11D48"/>
+              </a:solidFill>
+              <a:ln w="9525" cap="flat">
+                <a:solidFill>
+                  <a:srgbClr val="E11D48"/>
+                </a:solidFill>
+                <a:prstDash val="solid"/>
+                <a:round/>
+              </a:ln>
+              <a:effectLst/>
+            </c:spPr>
+          </c:marker>
+          <c:cat>
+            <c:multiLvlStrRef>
+              <c:f>Sheet1!$A$2:$A$10</c:f>
+              <c:multiLvlStrCache>
+                <c:ptCount val="9"/>
+                <c:lvl>
+                  <c:pt idx="0">
+                    <c:v>Aug 26</c:v>
+                  </c:pt>
+                  <c:pt idx="1">
+                    <c:v>Sep 26</c:v>
+                  </c:pt>
+                  <c:pt idx="2">
+                    <c:v>Oct 26</c:v>
+                  </c:pt>
+                  <c:pt idx="3">
+                    <c:v>Nov 26</c:v>
+                  </c:pt>
+                  <c:pt idx="4">
+                    <c:v>Dec 26</c:v>
+                  </c:pt>
+                  <c:pt idx="5">
+                    <c:v>Jan 27</c:v>
+                  </c:pt>
+                  <c:pt idx="6">
+                    <c:v>Feb 27</c:v>
+                  </c:pt>
+                  <c:pt idx="7">
+                    <c:v>Mar 27</c:v>
+                  </c:pt>
+                  <c:pt idx="8">
+                    <c:v>Apr 27</c:v>
+                  </c:pt>
+                </c:lvl>
+              </c:multiLvlStrCache>
+            </c:multiLvlStrRef>
+          </c:cat>
+          <c:val>
+            <c:numRef>
+              <c:f>Sheet1!$E$2:$E$10</c:f>
+              <c:numCache>
+                <c:formatCode>General</c:formatCode>
+                <c:ptCount val="9"/>
+                <c:pt idx="0">
+                  <c:v>52.2</c:v>
+                </c:pt>
+                <c:pt idx="1">
+                  <c:v>57.2</c:v>
+                </c:pt>
+                <c:pt idx="2">
+                  <c:v>46.7</c:v>
+                </c:pt>
+                <c:pt idx="3">
+                  <c:v>52.2</c:v>
+                </c:pt>
+                <c:pt idx="4">
+                  <c:v>46.7</c:v>
+                </c:pt>
+                <c:pt idx="5">
+                  <c:v>46.7</c:v>
+                </c:pt>
+                <c:pt idx="6">
+                  <c:v>52.2</c:v>
+                </c:pt>
+                <c:pt idx="7">
+                  <c:v>46.7</c:v>
+                </c:pt>
+                <c:pt idx="8">
+                  <c:v>46.7</c:v>
+                </c:pt>
+              </c:numCache>
+            </c:numRef>
+          </c:val>
+          <c:smooth val="0"/>
+        </c:ser>
+        <c:dLbls>
+          <c:numFmt formatCode="#,##0" sourceLinked="0"/>
+          <c:txPr>
+            <a:bodyPr/>
+            <a:lstStyle/>
+            <a:p>
+              <a:pPr>
+                <a:defRPr b="0" i="0" strike="noStrike" sz="1200" u="none">
+                  <a:solidFill>
+                    <a:srgbClr val="000000"/>
+                  </a:solidFill>
+                  <a:latin typeface="Arial"/>
+                </a:defRPr>
+              </a:pPr>
+            </a:p>
+          </c:txPr>
+          <c:showLegendKey val="0"/>
+          <c:showVal val="0"/>
+          <c:showCatName val="0"/>
+          <c:showSerName val="0"/>
+          <c:showPercent val="0"/>
+          <c:showBubbleSize val="0"/>
+          <c:showLeaderLines val="0"/>
+        </c:dLbls>
+        <c:marker val="1"/>
+        <c:axId val="2094734554"/>
+        <c:axId val="2094734552"/>
+        <c:axId val="2094734556"/>
+      </c:lineChart>
+      <c:catAx>
+        <c:axId val="2094734554"/>
+        <c:scaling>
+          <c:orientation val="minMax"/>
+        </c:scaling>
+        <c:delete val="0"/>
+        <c:axPos val="b"/>
+        <c:numFmt formatCode="General" sourceLinked="1"/>
+        <c:majorTickMark val="out"/>
+        <c:minorTickMark val="none"/>
+        <c:tickLblPos val="low"/>
+        <c:spPr>
+          <a:ln w="12700" cap="flat">
+            <a:solidFill>
+              <a:srgbClr val="888888"/>
+            </a:solidFill>
+            <a:prstDash val="solid"/>
+            <a:round/>
+          </a:ln>
+        </c:spPr>
+        <c:txPr>
+          <a:bodyPr/>
+          <a:lstStyle/>
+          <a:p>
+            <a:pPr>
+              <a:defRPr sz="900" b="0" i="0" u="none" strike="noStrike">
+                <a:solidFill>
+                  <a:srgbClr val="64748B"/>
+                </a:solidFill>
+                <a:latin typeface="Arial"/>
+              </a:defRPr>
+            </a:pPr>
+            <a:endParaRPr lang="en-US"/>
+          </a:p>
+        </c:txPr>
+        <c:crossAx val="2094734552"/>
+        <c:crosses val="autoZero"/>
+        <c:auto val="1"/>
+        <c:lblAlgn val="ctr"/>
+        <c:noMultiLvlLbl val="1"/>
+      </c:catAx>
+      <c:valAx>
+        <c:axId val="2094734552"/>
+        <c:scaling>
+          <c:orientation val="minMax"/>
+          <c:max val="90"/>
+          <c:min val="0"/>
+        </c:scaling>
+        <c:delete val="0"/>
+        <c:axPos val="l"/>
+        <c:majorGridlines>
+          <c:spPr>
+            <a:ln w="12700" cap="flat">
+              <a:solidFill>
+                <a:srgbClr val="E6EAF0"/>
+              </a:solidFill>
+              <a:prstDash val="solid"/>
+              <a:round/>
+            </a:ln>
+          </c:spPr>
+        </c:majorGridlines>
+        <c:title>
+          <c:tx>
+            <c:rich>
+              <a:bodyPr/>
+              <a:lstStyle/>
+              <a:p>
+                <a:pPr>
+                  <a:defRPr sz="1000" b="0" i="0" u="none" strike="noStrike">
+                    <a:solidFill>
+                      <a:srgbClr val="64748B"/>
+                    </a:solidFill>
+                    <a:latin typeface="Arial"/>
+                  </a:defRPr>
+                </a:pPr>
+                <a:r>
+                  <a:rPr sz="1000" b="0" i="0" u="none" strike="noStrike">
+                    <a:solidFill>
+                      <a:srgbClr val="64748B"/>
+                    </a:solidFill>
+                    <a:latin typeface="Arial"/>
+                  </a:rPr>
+                  <a:t>Rs lakh per month</a:t>
+                </a:r>
+              </a:p>
+            </c:rich>
+          </c:tx>
+          <c:layout/>
+          <c:overlay val="0"/>
+        </c:title>
+        <c:numFmt formatCode="General" sourceLinked="0"/>
+        <c:majorTickMark val="out"/>
+        <c:minorTickMark val="none"/>
+        <c:tickLblPos val="nextTo"/>
+        <c:spPr>
+          <a:ln w="12700" cap="flat">
+            <a:solidFill>
+              <a:srgbClr val="888888"/>
+            </a:solidFill>
+            <a:prstDash val="solid"/>
+            <a:round/>
+          </a:ln>
+        </c:spPr>
+        <c:txPr>
+          <a:bodyPr/>
+          <a:lstStyle/>
+          <a:p>
+            <a:pPr>
+              <a:defRPr sz="900" b="0" i="0" u="none" strike="noStrike">
+                <a:solidFill>
+                  <a:srgbClr val="64748B"/>
+                </a:solidFill>
+                <a:latin typeface="Arial"/>
+              </a:defRPr>
+            </a:pPr>
+            <a:endParaRPr lang="en-US"/>
+          </a:p>
+        </c:txPr>
+        <c:crossAx val="2094734554"/>
+        <c:crosses val="autoZero"/>
+        <c:crossBetween val="between"/>
+        <c:majorUnit val="20"/>
+      </c:valAx>
+      <c:spPr>
+        <a:noFill/>
+        <a:ln>
+          <a:noFill/>
+        </a:ln>
+        <a:effectLst/>
+      </c:spPr>
+    </c:plotArea>
+    <c:legend>
+      <c:legendPos val="b"/>
+      <c:overlay val="0"/>
+      <c:txPr>
+        <a:bodyPr/>
+        <a:lstStyle/>
+        <a:p>
+          <a:pPr>
+            <a:defRPr sz="1000">
+              <a:solidFill>
+                <a:srgbClr val="64748B"/>
+              </a:solidFill>
+            </a:defRPr>
+          </a:pPr>
+          <a:endParaRPr lang="en-US"/>
+        </a:p>
+      </c:txPr>
+    </c:legend>
+    <c:plotVisOnly val="1"/>
+    <c:dispBlanksAs val="span"/>
+  </c:chart>
+  <c:spPr>
+    <a:noFill/>
+    <a:ln>
+      <a:noFill/>
+    </a:ln>
+    <a:effectLst/>
+  </c:spPr>
+  <c:externalData r:id="rId1">
+    <c:autoUpdate val="0"/>
+  </c:externalData>
+</c:chartSpace>
+</file>
+
+<file path=ppt/charts/chart7.xml><?xml version="1.0" encoding="utf-8"?>
+<c:chartSpace xmlns:c="http://schemas.openxmlformats.org/drawingml/2006/chart" xmlns:a="http://schemas.openxmlformats.org/drawingml/2006/main" xmlns:r="http://schemas.openxmlformats.org/officeDocument/2006/relationships">
+  <c:date1904 val="0"/>
+  <c:roundedCorners val="1"/>
+  <c:chart>
+    <c:autoTitleDeleted val="1"/>
+    <c:plotArea>
+      <c:layout/>
+      <c:doughnutChart>
+        <c:varyColors val="1"/>
+        <c:ser>
+          <c:idx val="0"/>
+          <c:order val="0"/>
+          <c:tx>
+            <c:strRef>
+              <c:f>Sheet1!$B$1</c:f>
+              <c:strCache>
+                <c:ptCount val="1"/>
+                <c:pt idx="0">
+                  <c:v>Revenue</c:v>
+                </c:pt>
+              </c:strCache>
+            </c:strRef>
+          </c:tx>
+          <c:spPr>
+            <a:solidFill>
+              <a:schemeClr val="accent1"/>
+            </a:solidFill>
+            <a:ln w="9525" cap="flat">
+              <a:solidFill>
+                <a:srgbClr val="F9F9F9"/>
+              </a:solidFill>
+              <a:prstDash val="solid"/>
+              <a:round/>
+            </a:ln>
+            <a:effectLst/>
+          </c:spPr>
+          <c:dPt>
+            <c:idx val="0"/>
+            <c:bubble3D val="0"/>
+            <c:spPr>
+              <a:solidFill>
+                <a:srgbClr val="10B981"/>
+              </a:solidFill>
+              <a:effectLst/>
+            </c:spPr>
+          </c:dPt>
+          <c:dPt>
+            <c:idx val="1"/>
+            <c:bubble3D val="0"/>
+            <c:spPr>
+              <a:solidFill>
+                <a:srgbClr val="0284C7"/>
+              </a:solidFill>
+              <a:effectLst/>
+            </c:spPr>
+          </c:dPt>
+          <c:dPt>
+            <c:idx val="2"/>
+            <c:bubble3D val="0"/>
+            <c:spPr>
+              <a:solidFill>
+                <a:srgbClr val="0D9488"/>
+              </a:solidFill>
+              <a:effectLst/>
+            </c:spPr>
+          </c:dPt>
+          <c:dLbls>
+            <c:dLbl>
+              <c:idx val="0"/>
+              <c:numFmt formatCode="0%" sourceLinked="0"/>
+              <c:spPr/>
+              <c:txPr>
+                <a:bodyPr/>
+                <a:lstStyle/>
+                <a:p>
+                  <a:pPr>
+                    <a:defRPr sz="1100" b="1" i="0" u="none" strike="noStrike">
+                      <a:solidFill>
+                        <a:srgbClr val="FFFFFF"/>
+                      </a:solidFill>
+                      <a:latin typeface="Arial"/>
+                    </a:defRPr>
+                  </a:pPr>
+                </a:p>
+              </c:txPr>
+              <c:showLegendKey val="0"/>
+              <c:showVal val="0"/>
+              <c:showCatName val="0"/>
+              <c:showSerName val="0"/>
+              <c:showPercent val="1"/>
+              <c:showBubbleSize val="0"/>
+            </c:dLbl>
+            <c:dLbl>
+              <c:idx val="1"/>
+              <c:numFmt formatCode="0%" sourceLinked="0"/>
+              <c:spPr/>
+              <c:txPr>
+                <a:bodyPr/>
+                <a:lstStyle/>
+                <a:p>
+                  <a:pPr>
+                    <a:defRPr sz="1100" b="1" i="0" u="none" strike="noStrike">
+                      <a:solidFill>
+                        <a:srgbClr val="FFFFFF"/>
+                      </a:solidFill>
+                      <a:latin typeface="Arial"/>
+                    </a:defRPr>
+                  </a:pPr>
+                </a:p>
+              </c:txPr>
+              <c:showLegendKey val="0"/>
+              <c:showVal val="0"/>
+              <c:showCatName val="0"/>
+              <c:showSerName val="0"/>
+              <c:showPercent val="1"/>
+              <c:showBubbleSize val="0"/>
+            </c:dLbl>
+            <c:dLbl>
+              <c:idx val="2"/>
+              <c:numFmt formatCode="0%" sourceLinked="0"/>
+              <c:spPr/>
+              <c:txPr>
+                <a:bodyPr/>
+                <a:lstStyle/>
+                <a:p>
+                  <a:pPr>
+                    <a:defRPr sz="1100" b="1" i="0" u="none" strike="noStrike">
+                      <a:solidFill>
+                        <a:srgbClr val="FFFFFF"/>
+                      </a:solidFill>
+                      <a:latin typeface="Arial"/>
+                    </a:defRPr>
+                  </a:pPr>
+                </a:p>
+              </c:txPr>
+              <c:showLegendKey val="0"/>
+              <c:showVal val="0"/>
+              <c:showCatName val="0"/>
+              <c:showSerName val="0"/>
+              <c:showPercent val="1"/>
+              <c:showBubbleSize val="0"/>
+            </c:dLbl>
+            <c:numFmt formatCode="0%" sourceLinked="0"/>
+            <c:txPr>
+              <a:bodyPr/>
+              <a:lstStyle/>
+              <a:p>
+                <a:pPr>
+                  <a:defRPr sz="1800" b="1" i="0" u="none" strike="noStrike">
+                    <a:solidFill>
+                      <a:srgbClr val="000000"/>
+                    </a:solidFill>
+                    <a:latin typeface="Arial"/>
+                  </a:defRPr>
+                </a:pPr>
+              </a:p>
+            </c:txPr>
+            <c:showLegendKey val="0"/>
+            <c:showVal val="0"/>
+            <c:showCatName val="1"/>
+            <c:showSerName val="0"/>
+            <c:showPercent val="1"/>
+            <c:showBubbleSize val="0"/>
+            <c:showLeaderLines val="0"/>
+          </c:dLbls>
+          <c:cat>
+            <c:strRef>
+              <c:f>Sheet1!$A$2:$A$4</c:f>
+              <c:strCache>
+                <c:ptCount val="3"/>
+                <c:pt idx="0">
+                  <c:v>BLR</c:v>
+                </c:pt>
+                <c:pt idx="1">
+                  <c:v>IPO &amp; ratings</c:v>
+                </c:pt>
+                <c:pt idx="2">
+                  <c:v>FD interest</c:v>
+                </c:pt>
+              </c:strCache>
+            </c:strRef>
+          </c:cat>
+          <c:val>
+            <c:numRef>
+              <c:f>Sheet1!$B$2:$B$4</c:f>
+              <c:numCache>
+                <c:ptCount val="3"/>
+                <c:pt idx="0">
+                  <c:v>624</c:v>
+                </c:pt>
+                <c:pt idx="1">
+                  <c:v>145</c:v>
+                </c:pt>
+                <c:pt idx="2">
+                  <c:v>150</c:v>
+                </c:pt>
+              </c:numCache>
+            </c:numRef>
+          </c:val>
+        </c:ser>
+        <c:firstSliceAng val="0"/>
+        <c:holeSize val="56"/>
+      </c:doughnutChart>
+      <c:spPr>
+        <a:noFill/>
+        <a:ln>
+          <a:noFill/>
+        </a:ln>
+        <a:effectLst/>
+      </c:spPr>
+    </c:plotArea>
+    <c:legend>
+      <c:legendPos val="b"/>
+      <c:overlay val="0"/>
+      <c:txPr>
+        <a:bodyPr/>
+        <a:lstStyle/>
+        <a:p>
+          <a:pPr>
+            <a:defRPr sz="1100">
+              <a:solidFill>
+                <a:srgbClr val="64748B"/>
+              </a:solidFill>
+            </a:defRPr>
+          </a:pPr>
+          <a:endParaRPr lang="en-US"/>
+        </a:p>
+      </c:txPr>
+    </c:legend>
+    <c:plotVisOnly val="1"/>
+    <c:dispBlanksAs val="span"/>
+  </c:chart>
+  <c:spPr>
+    <a:noFill/>
+    <a:ln>
+      <a:noFill/>
+    </a:ln>
+    <a:effectLst/>
+  </c:spPr>
+  <c:externalData r:id="rId1">
+    <c:autoUpdate val="0"/>
+  </c:externalData>
+</c:chartSpace>
 </file>
 
 <file path=ppt/notesMasters/notesMaster1.xml><?xml version="1.0" encoding="utf-8"?>
@@ -1595,26 +5006,6 @@
         </p:nvSpPr>
         <p:spPr>
           <a:xfrm>
-            <a:off x="0" y="0"/>
-            <a:ext cx="12188952" cy="6858000"/>
-          </a:xfrm>
-          <a:prstGeom prst="rect">
-            <a:avLst/>
-          </a:prstGeom>
-          <a:solidFill>
-            <a:srgbClr val="0F172A"/>
-          </a:solidFill>
-          <a:ln/>
-        </p:spPr>
-      </p:sp>
-      <p:sp>
-        <p:nvSpPr>
-          <p:cNvPr id="3" name="Shape 1"/>
-          <p:cNvSpPr/>
-          <p:nvPr/>
-        </p:nvSpPr>
-        <p:spPr>
-          <a:xfrm>
             <a:off x="548640" y="502920"/>
             <a:ext cx="566928" cy="566928"/>
           </a:xfrm>
@@ -1631,7 +5022,7 @@
       </p:sp>
       <p:sp>
         <p:nvSpPr>
-          <p:cNvPr id="4" name="Text 2"/>
+          <p:cNvPr id="3" name="Text 1"/>
           <p:cNvSpPr/>
           <p:nvPr/>
         </p:nvSpPr>
@@ -1670,7 +5061,7 @@
       </p:sp>
       <p:sp>
         <p:nvSpPr>
-          <p:cNvPr id="5" name="Text 3"/>
+          <p:cNvPr id="4" name="Text 2"/>
           <p:cNvSpPr/>
           <p:nvPr/>
         </p:nvSpPr>
@@ -1709,52 +5100,52 @@
       </p:sp>
       <p:sp>
         <p:nvSpPr>
+          <p:cNvPr id="5" name="Text 3"/>
+          <p:cNvSpPr/>
+          <p:nvPr/>
+        </p:nvSpPr>
+        <p:spPr>
+          <a:xfrm>
+            <a:off x="548640" y="2103120"/>
+            <a:ext cx="10972800" cy="457200"/>
+          </a:xfrm>
+          <a:prstGeom prst="rect">
+            <a:avLst/>
+          </a:prstGeom>
+          <a:noFill/>
+          <a:ln/>
+        </p:spPr>
+        <p:txBody>
+          <a:bodyPr wrap="square" rtlCol="0" anchor="ctr"/>
+          <a:lstStyle/>
+          <a:p>
+            <a:pPr indent="0" marL="0">
+              <a:buNone/>
+            </a:pPr>
+            <a:r>
+              <a:rPr lang="en-US" sz="1800" b="1" dirty="0">
+                <a:solidFill>
+                  <a:srgbClr val="0D9488"/>
+                </a:solidFill>
+                <a:latin typeface="Calibri" pitchFamily="34" charset="0"/>
+                <a:ea typeface="Calibri" pitchFamily="34" charset="-122"/>
+                <a:cs typeface="Calibri" pitchFamily="34" charset="-120"/>
+              </a:rPr>
+              <a:t>FY27 Annual Operating Plan</a:t>
+            </a:r>
+            <a:endParaRPr lang="en-US" sz="1800" dirty="0"/>
+          </a:p>
+        </p:txBody>
+      </p:sp>
+      <p:sp>
+        <p:nvSpPr>
           <p:cNvPr id="6" name="Text 4"/>
           <p:cNvSpPr/>
           <p:nvPr/>
         </p:nvSpPr>
         <p:spPr>
           <a:xfrm>
-            <a:off x="548640" y="2148840"/>
-            <a:ext cx="10972800" cy="457200"/>
-          </a:xfrm>
-          <a:prstGeom prst="rect">
-            <a:avLst/>
-          </a:prstGeom>
-          <a:noFill/>
-          <a:ln/>
-        </p:spPr>
-        <p:txBody>
-          <a:bodyPr wrap="square" rtlCol="0" anchor="ctr"/>
-          <a:lstStyle/>
-          <a:p>
-            <a:pPr indent="0" marL="0">
-              <a:buNone/>
-            </a:pPr>
-            <a:r>
-              <a:rPr lang="en-US" sz="1800" b="1" dirty="0">
-                <a:solidFill>
-                  <a:srgbClr val="0D9488"/>
-                </a:solidFill>
-                <a:latin typeface="Calibri" pitchFamily="34" charset="0"/>
-                <a:ea typeface="Calibri" pitchFamily="34" charset="-122"/>
-                <a:cs typeface="Calibri" pitchFamily="34" charset="-120"/>
-              </a:rPr>
-              <a:t>FY27 Annual Operating Plan</a:t>
-            </a:r>
-            <a:endParaRPr lang="en-US" sz="1800" dirty="0"/>
-          </a:p>
-        </p:txBody>
-      </p:sp>
-      <p:sp>
-        <p:nvSpPr>
-          <p:cNvPr id="7" name="Text 5"/>
-          <p:cNvSpPr/>
-          <p:nvPr/>
-        </p:nvSpPr>
-        <p:spPr>
-          <a:xfrm>
-            <a:off x="502920" y="2560320"/>
+            <a:off x="502920" y="2514600"/>
             <a:ext cx="11155680" cy="1737360"/>
           </a:xfrm>
           <a:prstGeom prst="rect">
@@ -1810,14 +5201,14 @@
       </p:sp>
       <p:sp>
         <p:nvSpPr>
-          <p:cNvPr id="8" name="Text 6"/>
-          <p:cNvSpPr/>
-          <p:nvPr/>
-        </p:nvSpPr>
-        <p:spPr>
-          <a:xfrm>
-            <a:off x="548640" y="4434840"/>
-            <a:ext cx="8412480" cy="914400"/>
+          <p:cNvPr id="7" name="Text 5"/>
+          <p:cNvSpPr/>
+          <p:nvPr/>
+        </p:nvSpPr>
+        <p:spPr>
+          <a:xfrm>
+            <a:off x="548640" y="4389120"/>
+            <a:ext cx="8595360" cy="914400"/>
           </a:xfrm>
           <a:prstGeom prst="rect">
             <a:avLst/>
@@ -1852,46 +5243,7 @@
       </p:sp>
       <p:sp>
         <p:nvSpPr>
-          <p:cNvPr id="9" name="Text 7"/>
-          <p:cNvSpPr/>
-          <p:nvPr/>
-        </p:nvSpPr>
-        <p:spPr>
-          <a:xfrm>
-            <a:off x="548640" y="6172200"/>
-            <a:ext cx="10058400" cy="274320"/>
-          </a:xfrm>
-          <a:prstGeom prst="rect">
-            <a:avLst/>
-          </a:prstGeom>
-          <a:noFill/>
-          <a:ln/>
-        </p:spPr>
-        <p:txBody>
-          <a:bodyPr wrap="square" rtlCol="0" anchor="ctr"/>
-          <a:lstStyle/>
-          <a:p>
-            <a:pPr indent="0" marL="0">
-              <a:buNone/>
-            </a:pPr>
-            <a:r>
-              <a:rPr lang="en-US" sz="1100" dirty="0">
-                <a:solidFill>
-                  <a:srgbClr val="94A3B8"/>
-                </a:solidFill>
-                <a:latin typeface="Calibri" pitchFamily="34" charset="0"/>
-                <a:ea typeface="Calibri" pitchFamily="34" charset="-122"/>
-                <a:cs typeface="Calibri" pitchFamily="34" charset="-120"/>
-              </a:rPr>
-              <a:t>Prepared for the Board  |  FY = April 2026 to March 2027</a:t>
-            </a:r>
-            <a:endParaRPr lang="en-US" sz="1100" dirty="0"/>
-          </a:p>
-        </p:txBody>
-      </p:sp>
-      <p:sp>
-        <p:nvSpPr>
-          <p:cNvPr id="10" name="Shape 8"/>
+          <p:cNvPr id="8" name="Shape 6"/>
           <p:cNvSpPr/>
           <p:nvPr/>
         </p:nvSpPr>
@@ -1913,7 +5265,7 @@
       </p:sp>
       <p:sp>
         <p:nvSpPr>
-          <p:cNvPr id="11" name="Text 9"/>
+          <p:cNvPr id="9" name="Text 7"/>
           <p:cNvSpPr/>
           <p:nvPr/>
         </p:nvSpPr>
@@ -1952,7 +5304,7 @@
       </p:sp>
       <p:sp>
         <p:nvSpPr>
-          <p:cNvPr id="12" name="Text 10"/>
+          <p:cNvPr id="10" name="Text 8"/>
           <p:cNvSpPr/>
           <p:nvPr/>
         </p:nvSpPr>
@@ -1991,7 +5343,7 @@
       </p:sp>
       <p:sp>
         <p:nvSpPr>
-          <p:cNvPr id="13" name="Shape 11"/>
+          <p:cNvPr id="11" name="Shape 9"/>
           <p:cNvSpPr/>
           <p:nvPr/>
         </p:nvSpPr>
@@ -2013,7 +5365,7 @@
       </p:sp>
       <p:sp>
         <p:nvSpPr>
-          <p:cNvPr id="14" name="Text 12"/>
+          <p:cNvPr id="12" name="Text 10"/>
           <p:cNvSpPr/>
           <p:nvPr/>
         </p:nvSpPr>
@@ -2052,7 +5404,7 @@
       </p:sp>
       <p:sp>
         <p:nvSpPr>
-          <p:cNvPr id="15" name="Text 13"/>
+          <p:cNvPr id="13" name="Text 11"/>
           <p:cNvSpPr/>
           <p:nvPr/>
         </p:nvSpPr>
@@ -2091,7 +5443,7 @@
       </p:sp>
       <p:sp>
         <p:nvSpPr>
-          <p:cNvPr id="16" name="Shape 14"/>
+          <p:cNvPr id="14" name="Shape 12"/>
           <p:cNvSpPr/>
           <p:nvPr/>
         </p:nvSpPr>
@@ -2113,7 +5465,7 @@
       </p:sp>
       <p:sp>
         <p:nvSpPr>
-          <p:cNvPr id="17" name="Text 15"/>
+          <p:cNvPr id="15" name="Text 13"/>
           <p:cNvSpPr/>
           <p:nvPr/>
         </p:nvSpPr>
@@ -2152,7 +5504,7 @@
       </p:sp>
       <p:sp>
         <p:nvSpPr>
-          <p:cNvPr id="18" name="Text 16"/>
+          <p:cNvPr id="16" name="Text 14"/>
           <p:cNvSpPr/>
           <p:nvPr/>
         </p:nvSpPr>
@@ -2191,7 +5543,7 @@
       </p:sp>
       <p:sp>
         <p:nvSpPr>
-          <p:cNvPr id="19" name="Shape 17"/>
+          <p:cNvPr id="17" name="Shape 15"/>
           <p:cNvSpPr/>
           <p:nvPr/>
         </p:nvSpPr>
@@ -2213,7 +5565,7 @@
       </p:sp>
       <p:sp>
         <p:nvSpPr>
-          <p:cNvPr id="20" name="Text 18"/>
+          <p:cNvPr id="18" name="Text 16"/>
           <p:cNvSpPr/>
           <p:nvPr/>
         </p:nvSpPr>
@@ -2252,7 +5604,7 @@
       </p:sp>
       <p:sp>
         <p:nvSpPr>
-          <p:cNvPr id="21" name="Text 19"/>
+          <p:cNvPr id="19" name="Text 17"/>
           <p:cNvSpPr/>
           <p:nvPr/>
         </p:nvSpPr>
@@ -2286,6 +5638,45 @@
               <a:t>case capacity</a:t>
             </a:r>
             <a:endParaRPr lang="en-US" sz="950" dirty="0"/>
+          </a:p>
+        </p:txBody>
+      </p:sp>
+      <p:sp>
+        <p:nvSpPr>
+          <p:cNvPr id="20" name="Text 18"/>
+          <p:cNvSpPr/>
+          <p:nvPr/>
+        </p:nvSpPr>
+        <p:spPr>
+          <a:xfrm>
+            <a:off x="548640" y="6172200"/>
+            <a:ext cx="10058400" cy="274320"/>
+          </a:xfrm>
+          <a:prstGeom prst="rect">
+            <a:avLst/>
+          </a:prstGeom>
+          <a:noFill/>
+          <a:ln/>
+        </p:spPr>
+        <p:txBody>
+          <a:bodyPr wrap="square" rtlCol="0" anchor="ctr"/>
+          <a:lstStyle/>
+          <a:p>
+            <a:pPr indent="0" marL="0">
+              <a:buNone/>
+            </a:pPr>
+            <a:r>
+              <a:rPr lang="en-US" sz="1100" dirty="0">
+                <a:solidFill>
+                  <a:srgbClr val="94A3B8"/>
+                </a:solidFill>
+                <a:latin typeface="Calibri" pitchFamily="34" charset="0"/>
+                <a:ea typeface="Calibri" pitchFamily="34" charset="-122"/>
+                <a:cs typeface="Calibri" pitchFamily="34" charset="-120"/>
+              </a:rPr>
+              <a:t>Prepared for the Board  |  FY = April 2026 to March 2027</a:t>
+            </a:r>
+            <a:endParaRPr lang="en-US" sz="1100" dirty="0"/>
           </a:p>
         </p:txBody>
       </p:sp>
@@ -2385,7 +5776,7 @@
               <a:buNone/>
             </a:pPr>
             <a:r>
-              <a:rPr lang="en-US" sz="3200" b="1" dirty="0">
+              <a:rPr lang="en-US" sz="3100" b="1" dirty="0">
                 <a:solidFill>
                   <a:srgbClr val="0F172A"/>
                 </a:solidFill>
@@ -2395,7 +5786,7 @@
               </a:rPr>
               <a:t>A people led cost base, cushioned by FD interest</a:t>
             </a:r>
-            <a:endParaRPr lang="en-US" sz="3200" dirty="0"/>
+            <a:endParaRPr lang="en-US" sz="3100" dirty="0"/>
           </a:p>
         </p:txBody>
       </p:sp>
@@ -2446,7 +5837,7 @@
               <a:buNone/>
             </a:pPr>
             <a:r>
-              <a:rPr lang="en-US" sz="2200" b="1" dirty="0">
+              <a:rPr lang="en-US" sz="2100" b="1" dirty="0">
                 <a:solidFill>
                   <a:srgbClr val="0F172A"/>
                 </a:solidFill>
@@ -2456,7 +5847,7 @@
               </a:rPr>
               <a:t>₹26.1 Cr</a:t>
             </a:r>
-            <a:endParaRPr lang="en-US" sz="2200" dirty="0"/>
+            <a:endParaRPr lang="en-US" sz="2100" dirty="0"/>
           </a:p>
         </p:txBody>
       </p:sp>
@@ -2546,7 +5937,7 @@
               <a:buNone/>
             </a:pPr>
             <a:r>
-              <a:rPr lang="en-US" sz="2200" b="1" dirty="0">
+              <a:rPr lang="en-US" sz="2100" b="1" dirty="0">
                 <a:solidFill>
                   <a:srgbClr val="0D9488"/>
                 </a:solidFill>
@@ -2556,7 +5947,7 @@
               </a:rPr>
               <a:t>95%</a:t>
             </a:r>
-            <a:endParaRPr lang="en-US" sz="2200" dirty="0"/>
+            <a:endParaRPr lang="en-US" sz="2100" dirty="0"/>
           </a:p>
         </p:txBody>
       </p:sp>
@@ -2646,7 +6037,7 @@
               <a:buNone/>
             </a:pPr>
             <a:r>
-              <a:rPr lang="en-US" sz="2200" b="1" dirty="0">
+              <a:rPr lang="en-US" sz="2100" b="1" dirty="0">
                 <a:solidFill>
                   <a:srgbClr val="E11D48"/>
                 </a:solidFill>
@@ -2656,7 +6047,7 @@
               </a:rPr>
               <a:t>₹23.9 L</a:t>
             </a:r>
-            <a:endParaRPr lang="en-US" sz="2200" dirty="0"/>
+            <a:endParaRPr lang="en-US" sz="2100" dirty="0"/>
           </a:p>
         </p:txBody>
       </p:sp>
@@ -2746,7 +6137,7 @@
               <a:buNone/>
             </a:pPr>
             <a:r>
-              <a:rPr lang="en-US" sz="2200" b="1" dirty="0">
+              <a:rPr lang="en-US" sz="2100" b="1" dirty="0">
                 <a:solidFill>
                   <a:srgbClr val="16A34A"/>
                 </a:solidFill>
@@ -2756,7 +6147,7 @@
               </a:rPr>
               <a:t>₹28.5 L</a:t>
             </a:r>
-            <a:endParaRPr lang="en-US" sz="2200" dirty="0"/>
+            <a:endParaRPr lang="en-US" sz="2100" dirty="0"/>
           </a:p>
         </p:txBody>
       </p:sp>
@@ -2793,7 +6184,7 @@
                 <a:ea typeface="Calibri" pitchFamily="34" charset="-122"/>
                 <a:cs typeface="Calibri" pitchFamily="34" charset="-120"/>
               </a:rPr>
-              <a:t>Q1 FY27 sales, 3.5x all of FY26</a:t>
+              <a:t>Q1 FY27 sales, 3.5x FY26</a:t>
             </a:r>
             <a:endParaRPr lang="en-US" sz="1050" dirty="0"/>
           </a:p>
@@ -2807,8 +6198,8 @@
         </p:nvSpPr>
         <p:spPr>
           <a:xfrm>
-            <a:off x="457200" y="2926080"/>
-            <a:ext cx="5120640" cy="365760"/>
+            <a:off x="457200" y="2971800"/>
+            <a:ext cx="5486400" cy="365760"/>
           </a:xfrm>
           <a:prstGeom prst="rect">
             <a:avLst/>
@@ -2824,7 +6215,7 @@
               <a:buNone/>
             </a:pPr>
             <a:r>
-              <a:rPr lang="en-US" sz="1800" b="1" dirty="0">
+              <a:rPr lang="en-US" sz="1700" b="1" dirty="0">
                 <a:solidFill>
                   <a:srgbClr val="0F172A"/>
                 </a:solidFill>
@@ -2832,46 +6223,60 @@
                 <a:ea typeface="Calibri" pitchFamily="34" charset="-122"/>
                 <a:cs typeface="Calibri" pitchFamily="34" charset="-120"/>
               </a:rPr>
-              <a:t>Where every rupee is spent</a:t>
-            </a:r>
-            <a:endParaRPr lang="en-US" sz="1800" dirty="0"/>
-          </a:p>
-        </p:txBody>
-      </p:sp>
-      <p:pic>
-        <p:nvPicPr>
-          <p:cNvPr id="17" name="Image 0" descr="/tmp/claude-0/-home-user-AOP/882c7cd9-4c83-533a-b587-3f8bdf195bc7/scratchpad/charts/costDonut.png">    </p:cNvPr>
-          <p:cNvPicPr>
-            <a:picLocks noChangeAspect="1"/>
-          </p:cNvPicPr>
-          <p:nvPr/>
-        </p:nvPicPr>
-        <p:blipFill>
-          <a:blip r:embed="rId1"/>
-          <a:stretch>
-            <a:fillRect/>
-          </a:stretch>
-        </p:blipFill>
-        <p:spPr>
-          <a:xfrm>
-            <a:off x="640080" y="3246120"/>
-            <a:ext cx="3108960" cy="2587752"/>
-          </a:xfrm>
-          <a:prstGeom prst="rect">
-            <a:avLst/>
-          </a:prstGeom>
-        </p:spPr>
-      </p:pic>
-      <p:sp>
-        <p:nvSpPr>
-          <p:cNvPr id="18" name="Text 15"/>
-          <p:cNvSpPr/>
-          <p:nvPr/>
-        </p:nvSpPr>
-        <p:spPr>
-          <a:xfrm>
-            <a:off x="4023360" y="3383280"/>
-            <a:ext cx="4572000" cy="2468880"/>
+              <a:t>Where the ₹5.34 Cr cost base goes</a:t>
+            </a:r>
+            <a:endParaRPr lang="en-US" sz="1700" dirty="0"/>
+          </a:p>
+        </p:txBody>
+      </p:sp>
+      <p:graphicFrame>
+        <p:nvGraphicFramePr>
+          <p:cNvPr id="17" name="Chart 0" descr=""/>
+          <p:cNvGraphicFramePr/>
+          <p:nvPr/>
+        </p:nvGraphicFramePr>
+        <p:xfrm>
+          <a:off x="365760" y="3291840"/>
+          <a:ext cx="5120640" cy="2743200"/>
+        </p:xfrm>
+        <a:graphic xmlns:a="http://schemas.openxmlformats.org/drawingml/2006/main">
+          <a:graphicData uri="http://schemas.openxmlformats.org/drawingml/2006/chart">
+            <c:chart xmlns:c="http://schemas.openxmlformats.org/drawingml/2006/chart" r:id="rId1"/>
+          </a:graphicData>
+        </a:graphic>
+      </p:graphicFrame>
+      <p:sp>
+        <p:nvSpPr>
+          <p:cNvPr id="18" name="Shape 15"/>
+          <p:cNvSpPr/>
+          <p:nvPr/>
+        </p:nvSpPr>
+        <p:spPr>
+          <a:xfrm>
+            <a:off x="5852160" y="3291840"/>
+            <a:ext cx="5879592" cy="2743200"/>
+          </a:xfrm>
+          <a:prstGeom prst="roundRect">
+            <a:avLst>
+              <a:gd name="adj" fmla="val 3333"/>
+            </a:avLst>
+          </a:prstGeom>
+          <a:solidFill>
+            <a:srgbClr val="F1F5F9"/>
+          </a:solidFill>
+          <a:ln/>
+        </p:spPr>
+      </p:sp>
+      <p:sp>
+        <p:nvSpPr>
+          <p:cNvPr id="19" name="Text 16"/>
+          <p:cNvSpPr/>
+          <p:nvPr/>
+        </p:nvSpPr>
+        <p:spPr>
+          <a:xfrm>
+            <a:off x="6126480" y="3474720"/>
+            <a:ext cx="5394960" cy="320040"/>
           </a:xfrm>
           <a:prstGeom prst="rect">
             <a:avLst/>
@@ -2881,11 +6286,50 @@
         </p:spPr>
         <p:txBody>
           <a:bodyPr wrap="square" rtlCol="0" anchor="ctr"/>
+          <a:lstStyle/>
+          <a:p>
+            <a:pPr indent="0" marL="0">
+              <a:buNone/>
+            </a:pPr>
+            <a:r>
+              <a:rPr lang="en-US" sz="1500" b="1" dirty="0">
+                <a:solidFill>
+                  <a:srgbClr val="0D9488"/>
+                </a:solidFill>
+                <a:latin typeface="Calibri" pitchFamily="34" charset="0"/>
+                <a:ea typeface="Calibri" pitchFamily="34" charset="-122"/>
+                <a:cs typeface="Calibri" pitchFamily="34" charset="-120"/>
+              </a:rPr>
+              <a:t>The core message</a:t>
+            </a:r>
+            <a:endParaRPr lang="en-US" sz="1500" dirty="0"/>
+          </a:p>
+        </p:txBody>
+      </p:sp>
+      <p:sp>
+        <p:nvSpPr>
+          <p:cNvPr id="20" name="Text 17"/>
+          <p:cNvSpPr/>
+          <p:nvPr/>
+        </p:nvSpPr>
+        <p:spPr>
+          <a:xfrm>
+            <a:off x="6144768" y="3840480"/>
+            <a:ext cx="5349240" cy="2103120"/>
+          </a:xfrm>
+          <a:prstGeom prst="rect">
+            <a:avLst/>
+          </a:prstGeom>
+          <a:noFill/>
+          <a:ln/>
+        </p:spPr>
+        <p:txBody>
+          <a:bodyPr wrap="square" rtlCol="0" anchor="t"/>
           <a:lstStyle/>
           <a:p>
             <a:pPr marL="342900" indent="-342900">
               <a:lnSpc>
-                <a:spcPct val="102000"/>
+                <a:spcPct val="105000"/>
               </a:lnSpc>
               <a:spcAft>
                 <a:spcPts val="900"/>
@@ -2894,7 +6338,7 @@
               <a:buChar char="•"/>
             </a:pPr>
             <a:r>
-              <a:rPr lang="en-US" sz="1350" dirty="0">
+              <a:rPr lang="en-US" sz="1300" dirty="0">
                 <a:solidFill>
                   <a:srgbClr val="0F172A"/>
                 </a:solidFill>
@@ -2902,14 +6346,14 @@
                 <a:ea typeface="Calibri" pitchFamily="34" charset="-122"/>
                 <a:cs typeface="Calibri" pitchFamily="34" charset="-120"/>
               </a:rPr>
-              <a:t>Employee expense is about 61% of spend</a:t>
-            </a:r>
-            <a:endParaRPr lang="en-US" sz="1350" dirty="0"/>
+              <a:t>Employee expense is about 61% of spend.</a:t>
+            </a:r>
+            <a:endParaRPr lang="en-US" sz="1300" dirty="0"/>
           </a:p>
           <a:p>
             <a:pPr marL="342900" indent="-342900">
               <a:lnSpc>
-                <a:spcPct val="102000"/>
+                <a:spcPct val="105000"/>
               </a:lnSpc>
               <a:spcAft>
                 <a:spcPts val="900"/>
@@ -2918,7 +6362,7 @@
               <a:buChar char="•"/>
             </a:pPr>
             <a:r>
-              <a:rPr lang="en-US" sz="1350" dirty="0">
+              <a:rPr lang="en-US" sz="1300" dirty="0">
                 <a:solidFill>
                   <a:srgbClr val="0F172A"/>
                 </a:solidFill>
@@ -2926,14 +6370,14 @@
                 <a:ea typeface="Calibri" pitchFamily="34" charset="-122"/>
                 <a:cs typeface="Calibri" pitchFamily="34" charset="-120"/>
               </a:rPr>
-              <a:t>Cost base rebuilt bottom up to ₹5.34 Cr: adds RC meeting fees, three secretarial (board) meetings, and one time IT and branding</a:t>
-            </a:r>
-            <a:endParaRPr lang="en-US" sz="1350" dirty="0"/>
+              <a:t>Cost base rebuilt bottom up to ₹5.34 Cr, adding RC meeting fees, three secretarial (board) meetings and one time IT and branding.</a:t>
+            </a:r>
+            <a:endParaRPr lang="en-US" sz="1300" dirty="0"/>
           </a:p>
           <a:p>
             <a:pPr marL="342900" indent="-342900">
               <a:lnSpc>
-                <a:spcPct val="102000"/>
+                <a:spcPct val="105000"/>
               </a:lnSpc>
               <a:spcAft>
                 <a:spcPts val="900"/>
@@ -2942,7 +6386,7 @@
               <a:buChar char="•"/>
             </a:pPr>
             <a:r>
-              <a:rPr lang="en-US" sz="1350" dirty="0">
+              <a:rPr lang="en-US" sz="1300" dirty="0">
                 <a:solidFill>
                   <a:srgbClr val="0F172A"/>
                 </a:solidFill>
@@ -2950,68 +6394,22 @@
                 <a:ea typeface="Calibri" pitchFamily="34" charset="-122"/>
                 <a:cs typeface="Calibri" pitchFamily="34" charset="-120"/>
               </a:rPr>
-              <a:t>Insurance dropped from the base case, kept as good to have</a:t>
-            </a:r>
-            <a:endParaRPr lang="en-US" sz="1350" dirty="0"/>
-          </a:p>
-          <a:p>
-            <a:pPr marL="342900" indent="-342900">
-              <a:lnSpc>
-                <a:spcPct val="102000"/>
-              </a:lnSpc>
-              <a:spcAft>
-                <a:spcPts val="900"/>
-              </a:spcAft>
-              <a:buSzPct val="100000"/>
-              <a:buChar char="•"/>
-            </a:pPr>
-            <a:r>
-              <a:rPr lang="en-US" sz="1350" dirty="0">
-                <a:solidFill>
-                  <a:srgbClr val="0F172A"/>
-                </a:solidFill>
-                <a:latin typeface="Calibri" pitchFamily="34" charset="0"/>
-                <a:ea typeface="Calibri" pitchFamily="34" charset="-122"/>
-                <a:cs typeface="Calibri" pitchFamily="34" charset="-120"/>
-              </a:rPr>
-              <a:t>Solvent on the corpus, but not yet self sustaining on operations. That is the gap this plan closes</a:t>
-            </a:r>
-            <a:endParaRPr lang="en-US" sz="1350" dirty="0"/>
-          </a:p>
-        </p:txBody>
-      </p:sp>
-      <p:sp>
-        <p:nvSpPr>
-          <p:cNvPr id="19" name="Shape 16"/>
-          <p:cNvSpPr/>
-          <p:nvPr/>
-        </p:nvSpPr>
-        <p:spPr>
-          <a:xfrm>
-            <a:off x="8869680" y="3246120"/>
-            <a:ext cx="2834640" cy="2606040"/>
-          </a:xfrm>
-          <a:prstGeom prst="roundRect">
-            <a:avLst>
-              <a:gd name="adj" fmla="val 3509"/>
-            </a:avLst>
-          </a:prstGeom>
-          <a:solidFill>
-            <a:srgbClr val="F1F5F9"/>
-          </a:solidFill>
-          <a:ln/>
-        </p:spPr>
-      </p:sp>
-      <p:sp>
-        <p:nvSpPr>
-          <p:cNvPr id="20" name="Text 17"/>
-          <p:cNvSpPr/>
-          <p:nvPr/>
-        </p:nvSpPr>
-        <p:spPr>
-          <a:xfrm>
-            <a:off x="9052560" y="3401568"/>
-            <a:ext cx="2468880" cy="320040"/>
+              <a:t>FD interest pays the bills today. Rating revenue has to take over. The BLR licence is the switch, capacity is the constraint.</a:t>
+            </a:r>
+            <a:endParaRPr lang="en-US" sz="1300" dirty="0"/>
+          </a:p>
+        </p:txBody>
+      </p:sp>
+      <p:sp>
+        <p:nvSpPr>
+          <p:cNvPr id="21" name="Text 18"/>
+          <p:cNvSpPr/>
+          <p:nvPr/>
+        </p:nvSpPr>
+        <p:spPr>
+          <a:xfrm>
+            <a:off x="457200" y="6473952"/>
+            <a:ext cx="7315200" cy="274320"/>
           </a:xfrm>
           <a:prstGeom prst="rect">
             <a:avLst/>
@@ -3027,59 +6425,17 @@
               <a:buNone/>
             </a:pPr>
             <a:r>
-              <a:rPr lang="en-US" sz="1400" b="1" dirty="0">
-                <a:solidFill>
-                  <a:srgbClr val="0D9488"/>
-                </a:solidFill>
-                <a:latin typeface="Calibri" pitchFamily="34" charset="0"/>
-                <a:ea typeface="Calibri" pitchFamily="34" charset="-122"/>
-                <a:cs typeface="Calibri" pitchFamily="34" charset="-120"/>
-              </a:rPr>
-              <a:t>The core message</a:t>
-            </a:r>
-            <a:endParaRPr lang="en-US" sz="1400" dirty="0"/>
-          </a:p>
-        </p:txBody>
-      </p:sp>
-      <p:sp>
-        <p:nvSpPr>
-          <p:cNvPr id="21" name="Text 18"/>
-          <p:cNvSpPr/>
-          <p:nvPr/>
-        </p:nvSpPr>
-        <p:spPr>
-          <a:xfrm>
-            <a:off x="9052560" y="3794760"/>
-            <a:ext cx="2514600" cy="1920240"/>
-          </a:xfrm>
-          <a:prstGeom prst="rect">
-            <a:avLst/>
-          </a:prstGeom>
-          <a:noFill/>
-          <a:ln/>
-        </p:spPr>
-        <p:txBody>
-          <a:bodyPr wrap="square" rtlCol="0" anchor="t"/>
-          <a:lstStyle/>
-          <a:p>
-            <a:pPr indent="0" marL="0">
-              <a:lnSpc>
-                <a:spcPct val="112000"/>
-              </a:lnSpc>
-              <a:buNone/>
-            </a:pPr>
-            <a:r>
-              <a:rPr lang="en-US" sz="1300" dirty="0">
-                <a:solidFill>
-                  <a:srgbClr val="0F172A"/>
-                </a:solidFill>
-                <a:latin typeface="Calibri" pitchFamily="34" charset="0"/>
-                <a:ea typeface="Calibri" pitchFamily="34" charset="-122"/>
-                <a:cs typeface="Calibri" pitchFamily="34" charset="-120"/>
-              </a:rPr>
-              <a:t>FD interest pays the bills today. Rating revenue has to take over. The BLR licence is the switch, capacity is the constraint.</a:t>
-            </a:r>
-            <a:endParaRPr lang="en-US" sz="1300" dirty="0"/>
+              <a:rPr lang="en-US" sz="900" dirty="0">
+                <a:solidFill>
+                  <a:srgbClr val="94A3B8"/>
+                </a:solidFill>
+                <a:latin typeface="Calibri" pitchFamily="34" charset="0"/>
+                <a:ea typeface="Calibri" pitchFamily="34" charset="-122"/>
+                <a:cs typeface="Calibri" pitchFamily="34" charset="-120"/>
+              </a:rPr>
+              <a:t>ACER Credit Rating Pvt. Ltd.  |  FY27 Annual Operating Plan</a:t>
+            </a:r>
+            <a:endParaRPr lang="en-US" sz="900" dirty="0"/>
           </a:p>
         </p:txBody>
       </p:sp>
@@ -3091,46 +6447,7 @@
         </p:nvSpPr>
         <p:spPr>
           <a:xfrm>
-            <a:off x="457200" y="6455664"/>
-            <a:ext cx="11274552" cy="274320"/>
-          </a:xfrm>
-          <a:prstGeom prst="rect">
-            <a:avLst/>
-          </a:prstGeom>
-          <a:noFill/>
-          <a:ln/>
-        </p:spPr>
-        <p:txBody>
-          <a:bodyPr wrap="square" rtlCol="0" anchor="ctr"/>
-          <a:lstStyle/>
-          <a:p>
-            <a:pPr algn="l" indent="0" marL="0">
-              <a:buNone/>
-            </a:pPr>
-            <a:r>
-              <a:rPr lang="en-US" sz="900" dirty="0">
-                <a:solidFill>
-                  <a:srgbClr val="94A3B8"/>
-                </a:solidFill>
-                <a:latin typeface="Calibri" pitchFamily="34" charset="0"/>
-                <a:ea typeface="Calibri" pitchFamily="34" charset="-122"/>
-                <a:cs typeface="Calibri" pitchFamily="34" charset="-120"/>
-              </a:rPr>
-              <a:t>ACER Credit Rating Pvt. Ltd.  |  FY27 Annual Operating Plan</a:t>
-            </a:r>
-            <a:endParaRPr lang="en-US" sz="900" dirty="0"/>
-          </a:p>
-        </p:txBody>
-      </p:sp>
-      <p:sp>
-        <p:nvSpPr>
-          <p:cNvPr id="23" name="Text 20"/>
-          <p:cNvSpPr/>
-          <p:nvPr/>
-        </p:nvSpPr>
-        <p:spPr>
-          <a:xfrm>
-            <a:off x="5943600" y="6455664"/>
+            <a:off x="5943600" y="6473952"/>
             <a:ext cx="5788152" cy="274320"/>
           </a:xfrm>
           <a:prstGeom prst="rect">
@@ -3257,7 +6574,7 @@
               <a:buNone/>
             </a:pPr>
             <a:r>
-              <a:rPr lang="en-US" sz="3200" b="1" dirty="0">
+              <a:rPr lang="en-US" sz="3100" b="1" dirty="0">
                 <a:solidFill>
                   <a:srgbClr val="0F172A"/>
                 </a:solidFill>
@@ -3267,7 +6584,7 @@
               </a:rPr>
               <a:t>Two books, one team, real unit economics</a:t>
             </a:r>
-            <a:endParaRPr lang="en-US" sz="3200" dirty="0"/>
+            <a:endParaRPr lang="en-US" sz="3100" dirty="0"/>
           </a:p>
         </p:txBody>
       </p:sp>
@@ -3279,8 +6596,8 @@
         </p:nvSpPr>
         <p:spPr>
           <a:xfrm>
-            <a:off x="457200" y="1508760"/>
-            <a:ext cx="5303520" cy="292608"/>
+            <a:off x="457200" y="1463040"/>
+            <a:ext cx="5486400" cy="292608"/>
           </a:xfrm>
           <a:prstGeom prst="rect">
             <a:avLst/>
@@ -3304,36 +6621,28 @@
                 <a:ea typeface="Calibri" pitchFamily="34" charset="-122"/>
                 <a:cs typeface="Calibri" pitchFamily="34" charset="-120"/>
               </a:rPr>
-              <a:t>Salary steps up from September</a:t>
+              <a:t>Salary steps up from September (₹ L a month)</a:t>
             </a:r>
             <a:endParaRPr lang="en-US" sz="1400" dirty="0"/>
           </a:p>
         </p:txBody>
       </p:sp>
-      <p:pic>
-        <p:nvPicPr>
-          <p:cNvPr id="5" name="Image 0" descr="/tmp/claude-0/-home-user-AOP/882c7cd9-4c83-533a-b587-3f8bdf195bc7/scratchpad/charts/salBars.png">    </p:cNvPr>
-          <p:cNvPicPr>
-            <a:picLocks noChangeAspect="1"/>
-          </p:cNvPicPr>
-          <p:nvPr/>
-        </p:nvPicPr>
-        <p:blipFill>
-          <a:blip r:embed="rId1"/>
-          <a:stretch>
-            <a:fillRect/>
-          </a:stretch>
-        </p:blipFill>
-        <p:spPr>
-          <a:xfrm>
-            <a:off x="457200" y="1828800"/>
-            <a:ext cx="5212080" cy="2962656"/>
-          </a:xfrm>
-          <a:prstGeom prst="rect">
-            <a:avLst/>
-          </a:prstGeom>
-        </p:spPr>
-      </p:pic>
+      <p:graphicFrame>
+        <p:nvGraphicFramePr>
+          <p:cNvPr id="5" name="Chart 0" descr=""/>
+          <p:cNvGraphicFramePr/>
+          <p:nvPr/>
+        </p:nvGraphicFramePr>
+        <p:xfrm>
+          <a:off x="457200" y="1783080"/>
+          <a:ext cx="5212080" cy="2926080"/>
+        </p:xfrm>
+        <a:graphic xmlns:a="http://schemas.openxmlformats.org/drawingml/2006/main">
+          <a:graphicData uri="http://schemas.openxmlformats.org/drawingml/2006/chart">
+            <c:chart xmlns:c="http://schemas.openxmlformats.org/drawingml/2006/chart" r:id="rId1"/>
+          </a:graphicData>
+        </a:graphic>
+      </p:graphicFrame>
       <p:sp>
         <p:nvSpPr>
           <p:cNvPr id="6" name="Text 3"/>
@@ -3342,7 +6651,7 @@
         </p:nvSpPr>
         <p:spPr>
           <a:xfrm>
-            <a:off x="6126480" y="1508760"/>
+            <a:off x="6126480" y="1463040"/>
             <a:ext cx="5486400" cy="292608"/>
           </a:xfrm>
           <a:prstGeom prst="rect">
@@ -3367,50 +6676,81 @@
                 <a:ea typeface="Calibri" pitchFamily="34" charset="-122"/>
                 <a:cs typeface="Calibri" pitchFamily="34" charset="-120"/>
               </a:rPr>
-              <a:t>How 20 cases a month get split</a:t>
+              <a:t>How ~20 cases a month get split</a:t>
             </a:r>
             <a:endParaRPr lang="en-US" sz="1400" dirty="0"/>
           </a:p>
         </p:txBody>
       </p:sp>
-      <p:pic>
-        <p:nvPicPr>
-          <p:cNvPr id="7" name="Image 1" descr="/tmp/claude-0/-home-user-AOP/882c7cd9-4c83-533a-b587-3f8bdf195bc7/scratchpad/charts/capBars.png">    </p:cNvPr>
-          <p:cNvPicPr>
-            <a:picLocks noChangeAspect="1"/>
-          </p:cNvPicPr>
-          <p:nvPr/>
-        </p:nvPicPr>
-        <p:blipFill>
-          <a:blip r:embed="rId2"/>
-          <a:stretch>
-            <a:fillRect/>
-          </a:stretch>
-        </p:blipFill>
-        <p:spPr>
-          <a:xfrm>
-            <a:off x="6126480" y="1828800"/>
-            <a:ext cx="5212080" cy="2962656"/>
-          </a:xfrm>
-          <a:prstGeom prst="rect">
-            <a:avLst/>
-          </a:prstGeom>
-        </p:spPr>
-      </p:pic>
-      <p:sp>
-        <p:nvSpPr>
-          <p:cNvPr id="8" name="Shape 4"/>
-          <p:cNvSpPr/>
-          <p:nvPr/>
-        </p:nvSpPr>
-        <p:spPr>
-          <a:xfrm>
-            <a:off x="457200" y="5074920"/>
-            <a:ext cx="11274552" cy="1143000"/>
+      <p:graphicFrame>
+        <p:nvGraphicFramePr>
+          <p:cNvPr id="7" name="Chart 1" descr=""/>
+          <p:cNvGraphicFramePr/>
+          <p:nvPr/>
+        </p:nvGraphicFramePr>
+        <p:xfrm>
+          <a:off x="6126480" y="1783080"/>
+          <a:ext cx="5212080" cy="2926080"/>
+        </p:xfrm>
+        <a:graphic xmlns:a="http://schemas.openxmlformats.org/drawingml/2006/main">
+          <a:graphicData uri="http://schemas.openxmlformats.org/drawingml/2006/chart">
+            <c:chart xmlns:c="http://schemas.openxmlformats.org/drawingml/2006/chart" r:id="rId2"/>
+          </a:graphicData>
+        </a:graphic>
+      </p:graphicFrame>
+      <p:sp>
+        <p:nvSpPr>
+          <p:cNvPr id="8" name="Text 4"/>
+          <p:cNvSpPr/>
+          <p:nvPr/>
+        </p:nvSpPr>
+        <p:spPr>
+          <a:xfrm>
+            <a:off x="6126480" y="4709160"/>
+            <a:ext cx="5394960" cy="365760"/>
+          </a:xfrm>
+          <a:prstGeom prst="rect">
+            <a:avLst/>
+          </a:prstGeom>
+          <a:noFill/>
+          <a:ln/>
+        </p:spPr>
+        <p:txBody>
+          <a:bodyPr wrap="square" rtlCol="0" anchor="ctr"/>
+          <a:lstStyle/>
+          <a:p>
+            <a:pPr indent="0" marL="0">
+              <a:buNone/>
+            </a:pPr>
+            <a:r>
+              <a:rPr lang="en-US" sz="1000" i="1" dirty="0">
+                <a:solidFill>
+                  <a:srgbClr val="64748B"/>
+                </a:solidFill>
+                <a:latin typeface="Calibri" pitchFamily="34" charset="0"/>
+                <a:ea typeface="Calibri" pitchFamily="34" charset="-122"/>
+                <a:cs typeface="Calibri" pitchFamily="34" charset="-120"/>
+              </a:rPr>
+              <a:t>Capacity ceiling is about 20 cases a month. By November IPO plus BLR demand (36) is well over it, which is why the launch is paced.</a:t>
+            </a:r>
+            <a:endParaRPr lang="en-US" sz="1000" dirty="0"/>
+          </a:p>
+        </p:txBody>
+      </p:sp>
+      <p:sp>
+        <p:nvSpPr>
+          <p:cNvPr id="9" name="Shape 5"/>
+          <p:cNvSpPr/>
+          <p:nvPr/>
+        </p:nvSpPr>
+        <p:spPr>
+          <a:xfrm>
+            <a:off x="457200" y="5120640"/>
+            <a:ext cx="11274552" cy="1097280"/>
           </a:xfrm>
           <a:prstGeom prst="roundRect">
             <a:avLst>
-              <a:gd name="adj" fmla="val 8000"/>
+              <a:gd name="adj" fmla="val 8333"/>
             </a:avLst>
           </a:prstGeom>
           <a:solidFill>
@@ -3421,13 +6761,13 @@
       </p:sp>
       <p:sp>
         <p:nvSpPr>
-          <p:cNvPr id="9" name="Text 5"/>
-          <p:cNvSpPr/>
-          <p:nvPr/>
-        </p:nvSpPr>
-        <p:spPr>
-          <a:xfrm>
-            <a:off x="640080" y="5230368"/>
+          <p:cNvPr id="10" name="Text 6"/>
+          <p:cNvSpPr/>
+          <p:nvPr/>
+        </p:nvSpPr>
+        <p:spPr>
+          <a:xfrm>
+            <a:off x="658368" y="5266944"/>
             <a:ext cx="2651760" cy="411480"/>
           </a:xfrm>
           <a:prstGeom prst="rect">
@@ -3444,7 +6784,7 @@
               <a:buNone/>
             </a:pPr>
             <a:r>
-              <a:rPr lang="en-US" sz="2200" b="1" dirty="0">
+              <a:rPr lang="en-US" sz="2100" b="1" dirty="0">
                 <a:solidFill>
                   <a:srgbClr val="0D9488"/>
                 </a:solidFill>
@@ -3454,19 +6794,19 @@
               </a:rPr>
               <a:t>₹1.2 L</a:t>
             </a:r>
-            <a:endParaRPr lang="en-US" sz="2200" dirty="0"/>
-          </a:p>
-        </p:txBody>
-      </p:sp>
-      <p:sp>
-        <p:nvSpPr>
-          <p:cNvPr id="10" name="Text 6"/>
-          <p:cNvSpPr/>
-          <p:nvPr/>
-        </p:nvSpPr>
-        <p:spPr>
-          <a:xfrm>
-            <a:off x="640080" y="5669280"/>
+            <a:endParaRPr lang="en-US" sz="2100" dirty="0"/>
+          </a:p>
+        </p:txBody>
+      </p:sp>
+      <p:sp>
+        <p:nvSpPr>
+          <p:cNvPr id="11" name="Text 7"/>
+          <p:cNvSpPr/>
+          <p:nvPr/>
+        </p:nvSpPr>
+        <p:spPr>
+          <a:xfrm>
+            <a:off x="658368" y="5705856"/>
             <a:ext cx="2651760" cy="457200"/>
           </a:xfrm>
           <a:prstGeom prst="rect">
@@ -3483,7 +6823,7 @@
               <a:buNone/>
             </a:pPr>
             <a:r>
-              <a:rPr lang="en-US" sz="1150" dirty="0">
+              <a:rPr lang="en-US" sz="1100" dirty="0">
                 <a:solidFill>
                   <a:srgbClr val="CADCFC"/>
                 </a:solidFill>
@@ -3493,19 +6833,19 @@
               </a:rPr>
               <a:t>per IPO mandate, per quarter</a:t>
             </a:r>
-            <a:endParaRPr lang="en-US" sz="1150" dirty="0"/>
-          </a:p>
-        </p:txBody>
-      </p:sp>
-      <p:sp>
-        <p:nvSpPr>
-          <p:cNvPr id="11" name="Text 7"/>
-          <p:cNvSpPr/>
-          <p:nvPr/>
-        </p:nvSpPr>
-        <p:spPr>
-          <a:xfrm>
-            <a:off x="3447288" y="5230368"/>
+            <a:endParaRPr lang="en-US" sz="1100" dirty="0"/>
+          </a:p>
+        </p:txBody>
+      </p:sp>
+      <p:sp>
+        <p:nvSpPr>
+          <p:cNvPr id="12" name="Text 8"/>
+          <p:cNvSpPr/>
+          <p:nvPr/>
+        </p:nvSpPr>
+        <p:spPr>
+          <a:xfrm>
+            <a:off x="3447288" y="5266944"/>
             <a:ext cx="2651760" cy="411480"/>
           </a:xfrm>
           <a:prstGeom prst="rect">
@@ -3522,7 +6862,7 @@
               <a:buNone/>
             </a:pPr>
             <a:r>
-              <a:rPr lang="en-US" sz="2200" b="1" dirty="0">
+              <a:rPr lang="en-US" sz="2100" b="1" dirty="0">
                 <a:solidFill>
                   <a:srgbClr val="0D9488"/>
                 </a:solidFill>
@@ -3532,19 +6872,19 @@
               </a:rPr>
               <a:t>2.5 bps</a:t>
             </a:r>
-            <a:endParaRPr lang="en-US" sz="2200" dirty="0"/>
-          </a:p>
-        </p:txBody>
-      </p:sp>
-      <p:sp>
-        <p:nvSpPr>
-          <p:cNvPr id="12" name="Text 8"/>
-          <p:cNvSpPr/>
-          <p:nvPr/>
-        </p:nvSpPr>
-        <p:spPr>
-          <a:xfrm>
-            <a:off x="3447288" y="5669280"/>
+            <a:endParaRPr lang="en-US" sz="2100" dirty="0"/>
+          </a:p>
+        </p:txBody>
+      </p:sp>
+      <p:sp>
+        <p:nvSpPr>
+          <p:cNvPr id="13" name="Text 9"/>
+          <p:cNvSpPr/>
+          <p:nvPr/>
+        </p:nvSpPr>
+        <p:spPr>
+          <a:xfrm>
+            <a:off x="3447288" y="5705856"/>
             <a:ext cx="2651760" cy="457200"/>
           </a:xfrm>
           <a:prstGeom prst="rect">
@@ -3561,7 +6901,7 @@
               <a:buNone/>
             </a:pPr>
             <a:r>
-              <a:rPr lang="en-US" sz="1150" dirty="0">
+              <a:rPr lang="en-US" sz="1100" dirty="0">
                 <a:solidFill>
                   <a:srgbClr val="CADCFC"/>
                 </a:solidFill>
@@ -3571,19 +6911,19 @@
               </a:rPr>
               <a:t>BLR fee up front on rated debt</a:t>
             </a:r>
-            <a:endParaRPr lang="en-US" sz="1150" dirty="0"/>
-          </a:p>
-        </p:txBody>
-      </p:sp>
-      <p:sp>
-        <p:nvSpPr>
-          <p:cNvPr id="13" name="Text 9"/>
-          <p:cNvSpPr/>
-          <p:nvPr/>
-        </p:nvSpPr>
-        <p:spPr>
-          <a:xfrm>
-            <a:off x="6254496" y="5230368"/>
+            <a:endParaRPr lang="en-US" sz="1100" dirty="0"/>
+          </a:p>
+        </p:txBody>
+      </p:sp>
+      <p:sp>
+        <p:nvSpPr>
+          <p:cNvPr id="14" name="Text 10"/>
+          <p:cNvSpPr/>
+          <p:nvPr/>
+        </p:nvSpPr>
+        <p:spPr>
+          <a:xfrm>
+            <a:off x="6236208" y="5266944"/>
             <a:ext cx="2651760" cy="411480"/>
           </a:xfrm>
           <a:prstGeom prst="rect">
@@ -3600,7 +6940,7 @@
               <a:buNone/>
             </a:pPr>
             <a:r>
-              <a:rPr lang="en-US" sz="2200" b="1" dirty="0">
+              <a:rPr lang="en-US" sz="2100" b="1" dirty="0">
                 <a:solidFill>
                   <a:srgbClr val="0D9488"/>
                 </a:solidFill>
@@ -3610,19 +6950,19 @@
               </a:rPr>
               <a:t>1.5 bps</a:t>
             </a:r>
-            <a:endParaRPr lang="en-US" sz="2200" dirty="0"/>
-          </a:p>
-        </p:txBody>
-      </p:sp>
-      <p:sp>
-        <p:nvSpPr>
-          <p:cNvPr id="14" name="Text 10"/>
-          <p:cNvSpPr/>
-          <p:nvPr/>
-        </p:nvSpPr>
-        <p:spPr>
-          <a:xfrm>
-            <a:off x="6254496" y="5669280"/>
+            <a:endParaRPr lang="en-US" sz="2100" dirty="0"/>
+          </a:p>
+        </p:txBody>
+      </p:sp>
+      <p:sp>
+        <p:nvSpPr>
+          <p:cNvPr id="15" name="Text 11"/>
+          <p:cNvSpPr/>
+          <p:nvPr/>
+        </p:nvSpPr>
+        <p:spPr>
+          <a:xfrm>
+            <a:off x="6236208" y="5705856"/>
             <a:ext cx="2651760" cy="457200"/>
           </a:xfrm>
           <a:prstGeom prst="rect">
@@ -3639,7 +6979,7 @@
               <a:buNone/>
             </a:pPr>
             <a:r>
-              <a:rPr lang="en-US" sz="1150" dirty="0">
+              <a:rPr lang="en-US" sz="1100" dirty="0">
                 <a:solidFill>
                   <a:srgbClr val="CADCFC"/>
                 </a:solidFill>
@@ -3649,19 +6989,19 @@
               </a:rPr>
               <a:t>BLR surveillance a year, recurring</a:t>
             </a:r>
-            <a:endParaRPr lang="en-US" sz="1150" dirty="0"/>
-          </a:p>
-        </p:txBody>
-      </p:sp>
-      <p:sp>
-        <p:nvSpPr>
-          <p:cNvPr id="15" name="Text 11"/>
-          <p:cNvSpPr/>
-          <p:nvPr/>
-        </p:nvSpPr>
-        <p:spPr>
-          <a:xfrm>
-            <a:off x="9061704" y="5230368"/>
+            <a:endParaRPr lang="en-US" sz="1100" dirty="0"/>
+          </a:p>
+        </p:txBody>
+      </p:sp>
+      <p:sp>
+        <p:nvSpPr>
+          <p:cNvPr id="16" name="Text 12"/>
+          <p:cNvSpPr/>
+          <p:nvPr/>
+        </p:nvSpPr>
+        <p:spPr>
+          <a:xfrm>
+            <a:off x="9025128" y="5266944"/>
             <a:ext cx="2651760" cy="411480"/>
           </a:xfrm>
           <a:prstGeom prst="rect">
@@ -3678,7 +7018,7 @@
               <a:buNone/>
             </a:pPr>
             <a:r>
-              <a:rPr lang="en-US" sz="2200" b="1" dirty="0">
+              <a:rPr lang="en-US" sz="2100" b="1" dirty="0">
                 <a:solidFill>
                   <a:srgbClr val="0D9488"/>
                 </a:solidFill>
@@ -3688,19 +7028,19 @@
               </a:rPr>
               <a:t>5 executors</a:t>
             </a:r>
-            <a:endParaRPr lang="en-US" sz="2200" dirty="0"/>
-          </a:p>
-        </p:txBody>
-      </p:sp>
-      <p:sp>
-        <p:nvSpPr>
-          <p:cNvPr id="16" name="Text 12"/>
-          <p:cNvSpPr/>
-          <p:nvPr/>
-        </p:nvSpPr>
-        <p:spPr>
-          <a:xfrm>
-            <a:off x="9061704" y="5669280"/>
+            <a:endParaRPr lang="en-US" sz="2100" dirty="0"/>
+          </a:p>
+        </p:txBody>
+      </p:sp>
+      <p:sp>
+        <p:nvSpPr>
+          <p:cNvPr id="17" name="Text 13"/>
+          <p:cNvSpPr/>
+          <p:nvPr/>
+        </p:nvSpPr>
+        <p:spPr>
+          <a:xfrm>
+            <a:off x="9025128" y="5705856"/>
             <a:ext cx="2651760" cy="457200"/>
           </a:xfrm>
           <a:prstGeom prst="rect">
@@ -3717,7 +7057,7 @@
               <a:buNone/>
             </a:pPr>
             <a:r>
-              <a:rPr lang="en-US" sz="1150" dirty="0">
+              <a:rPr lang="en-US" sz="1100" dirty="0">
                 <a:solidFill>
                   <a:srgbClr val="CADCFC"/>
                 </a:solidFill>
@@ -3727,20 +7067,20 @@
               </a:rPr>
               <a:t>leaders now in review only</a:t>
             </a:r>
-            <a:endParaRPr lang="en-US" sz="1150" dirty="0"/>
-          </a:p>
-        </p:txBody>
-      </p:sp>
-      <p:sp>
-        <p:nvSpPr>
-          <p:cNvPr id="17" name="Text 13"/>
-          <p:cNvSpPr/>
-          <p:nvPr/>
-        </p:nvSpPr>
-        <p:spPr>
-          <a:xfrm>
-            <a:off x="457200" y="6455664"/>
-            <a:ext cx="11274552" cy="274320"/>
+            <a:endParaRPr lang="en-US" sz="1100" dirty="0"/>
+          </a:p>
+        </p:txBody>
+      </p:sp>
+      <p:sp>
+        <p:nvSpPr>
+          <p:cNvPr id="18" name="Text 14"/>
+          <p:cNvSpPr/>
+          <p:nvPr/>
+        </p:nvSpPr>
+        <p:spPr>
+          <a:xfrm>
+            <a:off x="457200" y="6473952"/>
+            <a:ext cx="7315200" cy="274320"/>
           </a:xfrm>
           <a:prstGeom prst="rect">
             <a:avLst/>
@@ -3752,7 +7092,7 @@
           <a:bodyPr wrap="square" rtlCol="0" anchor="ctr"/>
           <a:lstStyle/>
           <a:p>
-            <a:pPr algn="l" indent="0" marL="0">
+            <a:pPr indent="0" marL="0">
               <a:buNone/>
             </a:pPr>
             <a:r>
@@ -3772,13 +7112,13 @@
       </p:sp>
       <p:sp>
         <p:nvSpPr>
-          <p:cNvPr id="18" name="Text 14"/>
-          <p:cNvSpPr/>
-          <p:nvPr/>
-        </p:nvSpPr>
-        <p:spPr>
-          <a:xfrm>
-            <a:off x="5943600" y="6455664"/>
+          <p:cNvPr id="19" name="Text 15"/>
+          <p:cNvSpPr/>
+          <p:nvPr/>
+        </p:nvSpPr>
+        <p:spPr>
+          <a:xfrm>
+            <a:off x="5943600" y="6473952"/>
             <a:ext cx="5788152" cy="274320"/>
           </a:xfrm>
           <a:prstGeom prst="rect">
@@ -3866,7 +7206,7 @@
               <a:buNone/>
             </a:pPr>
             <a:r>
-              <a:rPr lang="en-US" sz="2600" b="1" dirty="0">
+              <a:rPr lang="en-US" sz="2500" b="1" dirty="0">
                 <a:solidFill>
                   <a:srgbClr val="0F172A"/>
                 </a:solidFill>
@@ -3876,7 +7216,7 @@
               </a:rPr>
               <a:t>Scenario 1  ·  BLR licence live by 1 Oct 2026</a:t>
             </a:r>
-            <a:endParaRPr lang="en-US" sz="2600" dirty="0"/>
+            <a:endParaRPr lang="en-US" sz="2500" dirty="0"/>
           </a:p>
         </p:txBody>
       </p:sp>
@@ -3949,8 +7289,8 @@
         </p:nvSpPr>
         <p:spPr>
           <a:xfrm>
-            <a:off x="457200" y="1143000"/>
-            <a:ext cx="6766560" cy="274320"/>
+            <a:off x="457200" y="1097280"/>
+            <a:ext cx="6858000" cy="274320"/>
           </a:xfrm>
           <a:prstGeom prst="rect">
             <a:avLst/>
@@ -3980,30 +7320,22 @@
           </a:p>
         </p:txBody>
       </p:sp>
-      <p:pic>
-        <p:nvPicPr>
-          <p:cNvPr id="6" name="Image 0" descr="/tmp/claude-0/-home-user-AOP/882c7cd9-4c83-533a-b587-3f8bdf195bc7/scratchpad/charts/s1_beChart.png">    </p:cNvPr>
-          <p:cNvPicPr>
-            <a:picLocks noChangeAspect="1"/>
-          </p:cNvPicPr>
-          <p:nvPr/>
-        </p:nvPicPr>
-        <p:blipFill>
-          <a:blip r:embed="rId1"/>
-          <a:stretch>
-            <a:fillRect/>
-          </a:stretch>
-        </p:blipFill>
-        <p:spPr>
-          <a:xfrm>
-            <a:off x="365760" y="1417320"/>
-            <a:ext cx="6903720" cy="3694176"/>
-          </a:xfrm>
-          <a:prstGeom prst="rect">
-            <a:avLst/>
-          </a:prstGeom>
-        </p:spPr>
-      </p:pic>
+      <p:graphicFrame>
+        <p:nvGraphicFramePr>
+          <p:cNvPr id="6" name="Chart 0" descr=""/>
+          <p:cNvGraphicFramePr/>
+          <p:nvPr/>
+        </p:nvGraphicFramePr>
+        <p:xfrm>
+          <a:off x="365760" y="1371600"/>
+          <a:ext cx="7040880" cy="4663440"/>
+        </p:xfrm>
+        <a:graphic xmlns:a="http://schemas.openxmlformats.org/drawingml/2006/main">
+          <a:graphicData uri="http://schemas.openxmlformats.org/drawingml/2006/chart">
+            <c:chart xmlns:c="http://schemas.openxmlformats.org/drawingml/2006/chart" r:id="rId1"/>
+          </a:graphicData>
+        </a:graphic>
+      </p:graphicFrame>
       <p:sp>
         <p:nvSpPr>
           <p:cNvPr id="7" name="Text 4"/>
@@ -4012,8 +7344,8 @@
         </p:nvSpPr>
         <p:spPr>
           <a:xfrm>
-            <a:off x="457200" y="5257800"/>
-            <a:ext cx="6766560" cy="457200"/>
+            <a:off x="457200" y="6053328"/>
+            <a:ext cx="6858000" cy="365760"/>
           </a:xfrm>
           <a:prstGeom prst="rect">
             <a:avLst/>
@@ -4029,7 +7361,7 @@
               <a:buNone/>
             </a:pPr>
             <a:r>
-              <a:rPr lang="en-US" sz="1200" i="1" dirty="0">
+              <a:rPr lang="en-US" sz="1100" i="1" dirty="0">
                 <a:solidFill>
                   <a:srgbClr val="0D9488"/>
                 </a:solidFill>
@@ -4039,7 +7371,7 @@
               </a:rPr>
               <a:t>Branding: ₹5 to 10 L buffer at launch, then ₹2 L a month while BLR runs.</a:t>
             </a:r>
-            <a:endParaRPr lang="en-US" sz="1200" dirty="0"/>
+            <a:endParaRPr lang="en-US" sz="1100" dirty="0"/>
           </a:p>
         </p:txBody>
       </p:sp>
@@ -4051,8 +7383,8 @@
         </p:nvSpPr>
         <p:spPr>
           <a:xfrm>
-            <a:off x="7452360" y="1371600"/>
-            <a:ext cx="2103120" cy="786384"/>
+            <a:off x="7498080" y="1371600"/>
+            <a:ext cx="2084832" cy="786384"/>
           </a:xfrm>
           <a:prstGeom prst="roundRect">
             <a:avLst>
@@ -4073,8 +7405,8 @@
         </p:nvSpPr>
         <p:spPr>
           <a:xfrm>
-            <a:off x="7470648" y="1481328"/>
-            <a:ext cx="2066544" cy="408920"/>
+            <a:off x="7516368" y="1481328"/>
+            <a:ext cx="2048256" cy="408920"/>
           </a:xfrm>
           <a:prstGeom prst="rect">
             <a:avLst/>
@@ -4090,7 +7422,7 @@
               <a:buNone/>
             </a:pPr>
             <a:r>
-              <a:rPr lang="en-US" sz="2200" b="1" dirty="0">
+              <a:rPr lang="en-US" sz="2100" b="1" dirty="0">
                 <a:solidFill>
                   <a:srgbClr val="16A34A"/>
                 </a:solidFill>
@@ -4100,7 +7432,7 @@
               </a:rPr>
               <a:t>Nov 2026</a:t>
             </a:r>
-            <a:endParaRPr lang="en-US" sz="2200" dirty="0"/>
+            <a:endParaRPr lang="en-US" sz="2100" dirty="0"/>
           </a:p>
         </p:txBody>
       </p:sp>
@@ -4112,8 +7444,8 @@
         </p:nvSpPr>
         <p:spPr>
           <a:xfrm>
-            <a:off x="7507224" y="1843430"/>
-            <a:ext cx="1993392" cy="267371"/>
+            <a:off x="7552944" y="1843430"/>
+            <a:ext cx="1975104" cy="267371"/>
           </a:xfrm>
           <a:prstGeom prst="rect">
             <a:avLst/>
@@ -4151,8 +7483,8 @@
         </p:nvSpPr>
         <p:spPr>
           <a:xfrm>
-            <a:off x="9720072" y="1371600"/>
-            <a:ext cx="2103120" cy="786384"/>
+            <a:off x="9747504" y="1371600"/>
+            <a:ext cx="2084832" cy="786384"/>
           </a:xfrm>
           <a:prstGeom prst="roundRect">
             <a:avLst>
@@ -4173,8 +7505,8 @@
         </p:nvSpPr>
         <p:spPr>
           <a:xfrm>
-            <a:off x="9738360" y="1481328"/>
-            <a:ext cx="2066544" cy="408920"/>
+            <a:off x="9765792" y="1481328"/>
+            <a:ext cx="2048256" cy="408920"/>
           </a:xfrm>
           <a:prstGeom prst="rect">
             <a:avLst/>
@@ -4190,7 +7522,7 @@
               <a:buNone/>
             </a:pPr>
             <a:r>
-              <a:rPr lang="en-US" sz="2200" b="1" dirty="0">
+              <a:rPr lang="en-US" sz="2100" b="1" dirty="0">
                 <a:solidFill>
                   <a:srgbClr val="16A34A"/>
                 </a:solidFill>
@@ -4200,7 +7532,7 @@
               </a:rPr>
               <a:t>+₹0.27 Cr</a:t>
             </a:r>
-            <a:endParaRPr lang="en-US" sz="2200" dirty="0"/>
+            <a:endParaRPr lang="en-US" sz="2100" dirty="0"/>
           </a:p>
         </p:txBody>
       </p:sp>
@@ -4212,8 +7544,8 @@
         </p:nvSpPr>
         <p:spPr>
           <a:xfrm>
-            <a:off x="9774936" y="1843430"/>
-            <a:ext cx="1993392" cy="267371"/>
+            <a:off x="9802368" y="1843430"/>
+            <a:ext cx="1975104" cy="267371"/>
           </a:xfrm>
           <a:prstGeom prst="rect">
             <a:avLst/>
@@ -4251,8 +7583,8 @@
         </p:nvSpPr>
         <p:spPr>
           <a:xfrm>
-            <a:off x="7452360" y="2304288"/>
-            <a:ext cx="2103120" cy="786384"/>
+            <a:off x="7498080" y="2304288"/>
+            <a:ext cx="2084832" cy="786384"/>
           </a:xfrm>
           <a:prstGeom prst="roundRect">
             <a:avLst>
@@ -4273,8 +7605,8 @@
         </p:nvSpPr>
         <p:spPr>
           <a:xfrm>
-            <a:off x="7470648" y="2414016"/>
-            <a:ext cx="2066544" cy="408920"/>
+            <a:off x="7516368" y="2414016"/>
+            <a:ext cx="2048256" cy="408920"/>
           </a:xfrm>
           <a:prstGeom prst="rect">
             <a:avLst/>
@@ -4290,7 +7622,7 @@
               <a:buNone/>
             </a:pPr>
             <a:r>
-              <a:rPr lang="en-US" sz="2200" b="1" dirty="0">
+              <a:rPr lang="en-US" sz="2100" b="1" dirty="0">
                 <a:solidFill>
                   <a:srgbClr val="16A34A"/>
                 </a:solidFill>
@@ -4300,7 +7632,7 @@
               </a:rPr>
               <a:t>+₹3.13 Cr</a:t>
             </a:r>
-            <a:endParaRPr lang="en-US" sz="2200" dirty="0"/>
+            <a:endParaRPr lang="en-US" sz="2100" dirty="0"/>
           </a:p>
         </p:txBody>
       </p:sp>
@@ -4312,8 +7644,8 @@
         </p:nvSpPr>
         <p:spPr>
           <a:xfrm>
-            <a:off x="7507224" y="2776118"/>
-            <a:ext cx="1993392" cy="267371"/>
+            <a:off x="7552944" y="2776118"/>
+            <a:ext cx="1975104" cy="267371"/>
           </a:xfrm>
           <a:prstGeom prst="rect">
             <a:avLst/>
@@ -4351,8 +7683,8 @@
         </p:nvSpPr>
         <p:spPr>
           <a:xfrm>
-            <a:off x="9720072" y="2304288"/>
-            <a:ext cx="2103120" cy="786384"/>
+            <a:off x="9747504" y="2304288"/>
+            <a:ext cx="2084832" cy="786384"/>
           </a:xfrm>
           <a:prstGeom prst="roundRect">
             <a:avLst>
@@ -4373,8 +7705,8 @@
         </p:nvSpPr>
         <p:spPr>
           <a:xfrm>
-            <a:off x="9738360" y="2414016"/>
-            <a:ext cx="2066544" cy="408920"/>
+            <a:off x="9765792" y="2414016"/>
+            <a:ext cx="2048256" cy="408920"/>
           </a:xfrm>
           <a:prstGeom prst="rect">
             <a:avLst/>
@@ -4390,7 +7722,7 @@
               <a:buNone/>
             </a:pPr>
             <a:r>
-              <a:rPr lang="en-US" sz="2200" b="1" dirty="0">
+              <a:rPr lang="en-US" sz="2100" b="1" dirty="0">
                 <a:solidFill>
                   <a:srgbClr val="E11D48"/>
                 </a:solidFill>
@@ -4400,7 +7732,7 @@
               </a:rPr>
               <a:t>−₹0.88 Cr</a:t>
             </a:r>
-            <a:endParaRPr lang="en-US" sz="2200" dirty="0"/>
+            <a:endParaRPr lang="en-US" sz="2100" dirty="0"/>
           </a:p>
         </p:txBody>
       </p:sp>
@@ -4412,8 +7744,8 @@
         </p:nvSpPr>
         <p:spPr>
           <a:xfrm>
-            <a:off x="9774936" y="2776118"/>
-            <a:ext cx="1993392" cy="267371"/>
+            <a:off x="9802368" y="2776118"/>
+            <a:ext cx="1975104" cy="267371"/>
           </a:xfrm>
           <a:prstGeom prst="rect">
             <a:avLst/>
@@ -4451,7 +7783,7 @@
         </p:nvSpPr>
         <p:spPr>
           <a:xfrm>
-            <a:off x="7452360" y="3200400"/>
+            <a:off x="7498080" y="3246120"/>
             <a:ext cx="4297680" cy="292608"/>
           </a:xfrm>
           <a:prstGeom prst="rect">
@@ -4490,8 +7822,8 @@
         </p:nvSpPr>
         <p:spPr>
           <a:xfrm>
-            <a:off x="7452360" y="3584448"/>
-            <a:ext cx="932688" cy="457200"/>
+            <a:off x="7498080" y="3630168"/>
+            <a:ext cx="960120" cy="457200"/>
           </a:xfrm>
           <a:prstGeom prst="roundRect">
             <a:avLst>
@@ -4512,8 +7844,8 @@
         </p:nvSpPr>
         <p:spPr>
           <a:xfrm>
-            <a:off x="7452360" y="3584448"/>
-            <a:ext cx="932688" cy="457200"/>
+            <a:off x="7498080" y="3630168"/>
+            <a:ext cx="960120" cy="457200"/>
           </a:xfrm>
           <a:prstGeom prst="rect">
             <a:avLst/>
@@ -4529,7 +7861,7 @@
               <a:buNone/>
             </a:pPr>
             <a:r>
-              <a:rPr lang="en-US" sz="850" b="1" dirty="0">
+              <a:rPr lang="en-US" sz="800" b="1" dirty="0">
                 <a:solidFill>
                   <a:srgbClr val="FFFFFF"/>
                 </a:solidFill>
@@ -4539,7 +7871,7 @@
               </a:rPr>
               <a:t>OCT</a:t>
             </a:r>
-            <a:endParaRPr lang="en-US" sz="850" dirty="0"/>
+            <a:endParaRPr lang="en-US" sz="800" dirty="0"/>
           </a:p>
         </p:txBody>
       </p:sp>
@@ -4551,8 +7883,8 @@
         </p:nvSpPr>
         <p:spPr>
           <a:xfrm>
-            <a:off x="8503920" y="3547872"/>
-            <a:ext cx="3246120" cy="713232"/>
+            <a:off x="8577072" y="3593592"/>
+            <a:ext cx="3200400" cy="713232"/>
           </a:xfrm>
           <a:prstGeom prst="rect">
             <a:avLst/>
@@ -4571,7 +7903,7 @@
               <a:buNone/>
             </a:pPr>
             <a:r>
-              <a:rPr lang="en-US" sz="1000" dirty="0">
+              <a:rPr lang="en-US" sz="950" dirty="0">
                 <a:solidFill>
                   <a:srgbClr val="0F172A"/>
                 </a:solidFill>
@@ -4581,7 +7913,7 @@
               </a:rPr>
               <a:t>Licence live, but IPO is at 20 and the team is full. Zero BLR this month by choice. Branding spends heavily, IT upgrade lands.</a:t>
             </a:r>
-            <a:endParaRPr lang="en-US" sz="1000" dirty="0"/>
+            <a:endParaRPr lang="en-US" sz="950" dirty="0"/>
           </a:p>
         </p:txBody>
       </p:sp>
@@ -4593,8 +7925,8 @@
         </p:nvSpPr>
         <p:spPr>
           <a:xfrm>
-            <a:off x="7452360" y="4306824"/>
-            <a:ext cx="932688" cy="457200"/>
+            <a:off x="7498080" y="4352544"/>
+            <a:ext cx="960120" cy="457200"/>
           </a:xfrm>
           <a:prstGeom prst="roundRect">
             <a:avLst>
@@ -4615,8 +7947,8 @@
         </p:nvSpPr>
         <p:spPr>
           <a:xfrm>
-            <a:off x="7452360" y="4306824"/>
-            <a:ext cx="932688" cy="457200"/>
+            <a:off x="7498080" y="4352544"/>
+            <a:ext cx="960120" cy="457200"/>
           </a:xfrm>
           <a:prstGeom prst="rect">
             <a:avLst/>
@@ -4632,7 +7964,7 @@
               <a:buNone/>
             </a:pPr>
             <a:r>
-              <a:rPr lang="en-US" sz="850" b="1" dirty="0">
+              <a:rPr lang="en-US" sz="800" b="1" dirty="0">
                 <a:solidFill>
                   <a:srgbClr val="FFFFFF"/>
                 </a:solidFill>
@@ -4642,7 +7974,7 @@
               </a:rPr>
               <a:t>NOV</a:t>
             </a:r>
-            <a:endParaRPr lang="en-US" sz="850" dirty="0"/>
+            <a:endParaRPr lang="en-US" sz="800" dirty="0"/>
           </a:p>
         </p:txBody>
       </p:sp>
@@ -4654,8 +7986,8 @@
         </p:nvSpPr>
         <p:spPr>
           <a:xfrm>
-            <a:off x="8503920" y="4270248"/>
-            <a:ext cx="3246120" cy="713232"/>
+            <a:off x="8577072" y="4315968"/>
+            <a:ext cx="3200400" cy="713232"/>
           </a:xfrm>
           <a:prstGeom prst="rect">
             <a:avLst/>
@@ -4674,7 +8006,7 @@
               <a:buNone/>
             </a:pPr>
             <a:r>
-              <a:rPr lang="en-US" sz="1000" dirty="0">
+              <a:rPr lang="en-US" sz="950" dirty="0">
                 <a:solidFill>
                   <a:srgbClr val="0F172A"/>
                 </a:solidFill>
@@ -4684,7 +8016,7 @@
               </a:rPr>
               <a:t>IPO delivery caught up. BLR steps up to 16 cases a month, full capacity.</a:t>
             </a:r>
-            <a:endParaRPr lang="en-US" sz="1000" dirty="0"/>
+            <a:endParaRPr lang="en-US" sz="950" dirty="0"/>
           </a:p>
         </p:txBody>
       </p:sp>
@@ -4696,8 +8028,8 @@
         </p:nvSpPr>
         <p:spPr>
           <a:xfrm>
-            <a:off x="7452360" y="5029200"/>
-            <a:ext cx="932688" cy="457200"/>
+            <a:off x="7498080" y="5074920"/>
+            <a:ext cx="960120" cy="457200"/>
           </a:xfrm>
           <a:prstGeom prst="roundRect">
             <a:avLst>
@@ -4718,8 +8050,8 @@
         </p:nvSpPr>
         <p:spPr>
           <a:xfrm>
-            <a:off x="7452360" y="5029200"/>
-            <a:ext cx="932688" cy="457200"/>
+            <a:off x="7498080" y="5074920"/>
+            <a:ext cx="960120" cy="457200"/>
           </a:xfrm>
           <a:prstGeom prst="rect">
             <a:avLst/>
@@ -4735,7 +8067,7 @@
               <a:buNone/>
             </a:pPr>
             <a:r>
-              <a:rPr lang="en-US" sz="850" b="1" dirty="0">
+              <a:rPr lang="en-US" sz="800" b="1" dirty="0">
                 <a:solidFill>
                   <a:srgbClr val="FFFFFF"/>
                 </a:solidFill>
@@ -4745,7 +8077,7 @@
               </a:rPr>
               <a:t>DEC+</a:t>
             </a:r>
-            <a:endParaRPr lang="en-US" sz="850" dirty="0"/>
+            <a:endParaRPr lang="en-US" sz="800" dirty="0"/>
           </a:p>
         </p:txBody>
       </p:sp>
@@ -4757,8 +8089,8 @@
         </p:nvSpPr>
         <p:spPr>
           <a:xfrm>
-            <a:off x="8503920" y="4992624"/>
-            <a:ext cx="3246120" cy="713232"/>
+            <a:off x="8577072" y="5038344"/>
+            <a:ext cx="3200400" cy="713232"/>
           </a:xfrm>
           <a:prstGeom prst="rect">
             <a:avLst/>
@@ -4777,7 +8109,7 @@
               <a:buNone/>
             </a:pPr>
             <a:r>
-              <a:rPr lang="en-US" sz="1000" dirty="0">
+              <a:rPr lang="en-US" sz="950" dirty="0">
                 <a:solidFill>
                   <a:srgbClr val="0F172A"/>
                 </a:solidFill>
@@ -4787,7 +8119,7 @@
               </a:rPr>
               <a:t>Both engines steady. IPO annuity plus BLR up front and surveillance compound.</a:t>
             </a:r>
-            <a:endParaRPr lang="en-US" sz="1000" dirty="0"/>
+            <a:endParaRPr lang="en-US" sz="950" dirty="0"/>
           </a:p>
         </p:txBody>
       </p:sp>
@@ -4799,8 +8131,8 @@
         </p:nvSpPr>
         <p:spPr>
           <a:xfrm>
-            <a:off x="7452360" y="5751576"/>
-            <a:ext cx="932688" cy="457200"/>
+            <a:off x="7498080" y="5797296"/>
+            <a:ext cx="960120" cy="457200"/>
           </a:xfrm>
           <a:prstGeom prst="roundRect">
             <a:avLst>
@@ -4821,8 +8153,8 @@
         </p:nvSpPr>
         <p:spPr>
           <a:xfrm>
-            <a:off x="7452360" y="5751576"/>
-            <a:ext cx="932688" cy="457200"/>
+            <a:off x="7498080" y="5797296"/>
+            <a:ext cx="960120" cy="457200"/>
           </a:xfrm>
           <a:prstGeom prst="rect">
             <a:avLst/>
@@ -4838,7 +8170,7 @@
               <a:buNone/>
             </a:pPr>
             <a:r>
-              <a:rPr lang="en-US" sz="850" b="1" dirty="0">
+              <a:rPr lang="en-US" sz="800" b="1" dirty="0">
                 <a:solidFill>
                   <a:srgbClr val="FFFFFF"/>
                 </a:solidFill>
@@ -4848,7 +8180,7 @@
               </a:rPr>
               <a:t>HIRE</a:t>
             </a:r>
-            <a:endParaRPr lang="en-US" sz="850" dirty="0"/>
+            <a:endParaRPr lang="en-US" sz="800" dirty="0"/>
           </a:p>
         </p:txBody>
       </p:sp>
@@ -4860,8 +8192,8 @@
         </p:nvSpPr>
         <p:spPr>
           <a:xfrm>
-            <a:off x="8503920" y="5715000"/>
-            <a:ext cx="3246120" cy="713232"/>
+            <a:off x="8577072" y="5760720"/>
+            <a:ext cx="3200400" cy="713232"/>
           </a:xfrm>
           <a:prstGeom prst="rect">
             <a:avLst/>
@@ -4880,7 +8212,7 @@
               <a:buNone/>
             </a:pPr>
             <a:r>
-              <a:rPr lang="en-US" sz="1000" dirty="0">
+              <a:rPr lang="en-US" sz="950" dirty="0">
                 <a:solidFill>
                   <a:srgbClr val="0F172A"/>
                 </a:solidFill>
@@ -4890,7 +8222,7 @@
               </a:rPr>
               <a:t>Add the sixth executor only if residual capacity is negative two months running.</a:t>
             </a:r>
-            <a:endParaRPr lang="en-US" sz="1000" dirty="0"/>
+            <a:endParaRPr lang="en-US" sz="950" dirty="0"/>
           </a:p>
         </p:txBody>
       </p:sp>
@@ -4902,8 +8234,8 @@
         </p:nvSpPr>
         <p:spPr>
           <a:xfrm>
-            <a:off x="457200" y="6455664"/>
-            <a:ext cx="11274552" cy="274320"/>
+            <a:off x="457200" y="6473952"/>
+            <a:ext cx="7315200" cy="274320"/>
           </a:xfrm>
           <a:prstGeom prst="rect">
             <a:avLst/>
@@ -4915,7 +8247,7 @@
           <a:bodyPr wrap="square" rtlCol="0" anchor="ctr"/>
           <a:lstStyle/>
           <a:p>
-            <a:pPr algn="l" indent="0" marL="0">
+            <a:pPr indent="0" marL="0">
               <a:buNone/>
             </a:pPr>
             <a:r>
@@ -4941,7 +8273,7 @@
         </p:nvSpPr>
         <p:spPr>
           <a:xfrm>
-            <a:off x="5943600" y="6455664"/>
+            <a:off x="5943600" y="6473952"/>
             <a:ext cx="5788152" cy="274320"/>
           </a:xfrm>
           <a:prstGeom prst="rect">
@@ -5029,7 +8361,7 @@
               <a:buNone/>
             </a:pPr>
             <a:r>
-              <a:rPr lang="en-US" sz="2600" b="1" dirty="0">
+              <a:rPr lang="en-US" sz="2500" b="1" dirty="0">
                 <a:solidFill>
                   <a:srgbClr val="0F172A"/>
                 </a:solidFill>
@@ -5039,7 +8371,7 @@
               </a:rPr>
               <a:t>Scenario 2  ·  BLR licence live by 1 Jan 2027</a:t>
             </a:r>
-            <a:endParaRPr lang="en-US" sz="2600" dirty="0"/>
+            <a:endParaRPr lang="en-US" sz="2500" dirty="0"/>
           </a:p>
         </p:txBody>
       </p:sp>
@@ -5112,8 +8444,8 @@
         </p:nvSpPr>
         <p:spPr>
           <a:xfrm>
-            <a:off x="457200" y="1143000"/>
-            <a:ext cx="6766560" cy="274320"/>
+            <a:off x="457200" y="1097280"/>
+            <a:ext cx="6858000" cy="274320"/>
           </a:xfrm>
           <a:prstGeom prst="rect">
             <a:avLst/>
@@ -5143,30 +8475,22 @@
           </a:p>
         </p:txBody>
       </p:sp>
-      <p:pic>
-        <p:nvPicPr>
-          <p:cNvPr id="6" name="Image 0" descr="/tmp/claude-0/-home-user-AOP/882c7cd9-4c83-533a-b587-3f8bdf195bc7/scratchpad/charts/s2_beChart.png">    </p:cNvPr>
-          <p:cNvPicPr>
-            <a:picLocks noChangeAspect="1"/>
-          </p:cNvPicPr>
-          <p:nvPr/>
-        </p:nvPicPr>
-        <p:blipFill>
-          <a:blip r:embed="rId1"/>
-          <a:stretch>
-            <a:fillRect/>
-          </a:stretch>
-        </p:blipFill>
-        <p:spPr>
-          <a:xfrm>
-            <a:off x="365760" y="1417320"/>
-            <a:ext cx="6903720" cy="3694176"/>
-          </a:xfrm>
-          <a:prstGeom prst="rect">
-            <a:avLst/>
-          </a:prstGeom>
-        </p:spPr>
-      </p:pic>
+      <p:graphicFrame>
+        <p:nvGraphicFramePr>
+          <p:cNvPr id="6" name="Chart 0" descr=""/>
+          <p:cNvGraphicFramePr/>
+          <p:nvPr/>
+        </p:nvGraphicFramePr>
+        <p:xfrm>
+          <a:off x="365760" y="1371600"/>
+          <a:ext cx="7040880" cy="4663440"/>
+        </p:xfrm>
+        <a:graphic xmlns:a="http://schemas.openxmlformats.org/drawingml/2006/main">
+          <a:graphicData uri="http://schemas.openxmlformats.org/drawingml/2006/chart">
+            <c:chart xmlns:c="http://schemas.openxmlformats.org/drawingml/2006/chart" r:id="rId1"/>
+          </a:graphicData>
+        </a:graphic>
+      </p:graphicFrame>
       <p:sp>
         <p:nvSpPr>
           <p:cNvPr id="7" name="Text 4"/>
@@ -5175,8 +8499,8 @@
         </p:nvSpPr>
         <p:spPr>
           <a:xfrm>
-            <a:off x="457200" y="5257800"/>
-            <a:ext cx="6766560" cy="457200"/>
+            <a:off x="457200" y="6053328"/>
+            <a:ext cx="6858000" cy="365760"/>
           </a:xfrm>
           <a:prstGeom prst="rect">
             <a:avLst/>
@@ -5192,7 +8516,7 @@
               <a:buNone/>
             </a:pPr>
             <a:r>
-              <a:rPr lang="en-US" sz="1200" i="1" dirty="0">
+              <a:rPr lang="en-US" sz="1100" i="1" dirty="0">
                 <a:solidFill>
                   <a:srgbClr val="0D9488"/>
                 </a:solidFill>
@@ -5202,7 +8526,7 @@
               </a:rPr>
               <a:t>Branding: ₹5 to 10 L buffer at the January launch, then ₹2 L a month with BLR.</a:t>
             </a:r>
-            <a:endParaRPr lang="en-US" sz="1200" dirty="0"/>
+            <a:endParaRPr lang="en-US" sz="1100" dirty="0"/>
           </a:p>
         </p:txBody>
       </p:sp>
@@ -5214,8 +8538,8 @@
         </p:nvSpPr>
         <p:spPr>
           <a:xfrm>
-            <a:off x="7452360" y="1371600"/>
-            <a:ext cx="2103120" cy="786384"/>
+            <a:off x="7498080" y="1371600"/>
+            <a:ext cx="2084832" cy="786384"/>
           </a:xfrm>
           <a:prstGeom prst="roundRect">
             <a:avLst>
@@ -5236,8 +8560,8 @@
         </p:nvSpPr>
         <p:spPr>
           <a:xfrm>
-            <a:off x="7470648" y="1481328"/>
-            <a:ext cx="2066544" cy="408920"/>
+            <a:off x="7516368" y="1481328"/>
+            <a:ext cx="2048256" cy="408920"/>
           </a:xfrm>
           <a:prstGeom prst="rect">
             <a:avLst/>
@@ -5253,7 +8577,7 @@
               <a:buNone/>
             </a:pPr>
             <a:r>
-              <a:rPr lang="en-US" sz="2200" b="1" dirty="0">
+              <a:rPr lang="en-US" sz="2100" b="1" dirty="0">
                 <a:solidFill>
                   <a:srgbClr val="16A34A"/>
                 </a:solidFill>
@@ -5263,7 +8587,7 @@
               </a:rPr>
               <a:t>Feb 2027</a:t>
             </a:r>
-            <a:endParaRPr lang="en-US" sz="2200" dirty="0"/>
+            <a:endParaRPr lang="en-US" sz="2100" dirty="0"/>
           </a:p>
         </p:txBody>
       </p:sp>
@@ -5275,8 +8599,8 @@
         </p:nvSpPr>
         <p:spPr>
           <a:xfrm>
-            <a:off x="7507224" y="1843430"/>
-            <a:ext cx="1993392" cy="267371"/>
+            <a:off x="7552944" y="1843430"/>
+            <a:ext cx="1975104" cy="267371"/>
           </a:xfrm>
           <a:prstGeom prst="rect">
             <a:avLst/>
@@ -5314,8 +8638,8 @@
         </p:nvSpPr>
         <p:spPr>
           <a:xfrm>
-            <a:off x="9720072" y="1371600"/>
-            <a:ext cx="2103120" cy="786384"/>
+            <a:off x="9747504" y="1371600"/>
+            <a:ext cx="2084832" cy="786384"/>
           </a:xfrm>
           <a:prstGeom prst="roundRect">
             <a:avLst>
@@ -5336,8 +8660,8 @@
         </p:nvSpPr>
         <p:spPr>
           <a:xfrm>
-            <a:off x="9738360" y="1481328"/>
-            <a:ext cx="2066544" cy="408920"/>
+            <a:off x="9765792" y="1481328"/>
+            <a:ext cx="2048256" cy="408920"/>
           </a:xfrm>
           <a:prstGeom prst="rect">
             <a:avLst/>
@@ -5353,7 +8677,7 @@
               <a:buNone/>
             </a:pPr>
             <a:r>
-              <a:rPr lang="en-US" sz="2200" b="1" dirty="0">
+              <a:rPr lang="en-US" sz="2100" b="1" dirty="0">
                 <a:solidFill>
                   <a:srgbClr val="E11D48"/>
                 </a:solidFill>
@@ -5363,7 +8687,7 @@
               </a:rPr>
               <a:t>−₹1.11 Cr</a:t>
             </a:r>
-            <a:endParaRPr lang="en-US" sz="2200" dirty="0"/>
+            <a:endParaRPr lang="en-US" sz="2100" dirty="0"/>
           </a:p>
         </p:txBody>
       </p:sp>
@@ -5375,8 +8699,8 @@
         </p:nvSpPr>
         <p:spPr>
           <a:xfrm>
-            <a:off x="9774936" y="1843430"/>
-            <a:ext cx="1993392" cy="267371"/>
+            <a:off x="9802368" y="1843430"/>
+            <a:ext cx="1975104" cy="267371"/>
           </a:xfrm>
           <a:prstGeom prst="rect">
             <a:avLst/>
@@ -5414,8 +8738,8 @@
         </p:nvSpPr>
         <p:spPr>
           <a:xfrm>
-            <a:off x="7452360" y="2304288"/>
-            <a:ext cx="2103120" cy="786384"/>
+            <a:off x="7498080" y="2304288"/>
+            <a:ext cx="2084832" cy="786384"/>
           </a:xfrm>
           <a:prstGeom prst="roundRect">
             <a:avLst>
@@ -5436,8 +8760,8 @@
         </p:nvSpPr>
         <p:spPr>
           <a:xfrm>
-            <a:off x="7470648" y="2414016"/>
-            <a:ext cx="2066544" cy="408920"/>
+            <a:off x="7516368" y="2414016"/>
+            <a:ext cx="2048256" cy="408920"/>
           </a:xfrm>
           <a:prstGeom prst="rect">
             <a:avLst/>
@@ -5453,7 +8777,7 @@
               <a:buNone/>
             </a:pPr>
             <a:r>
-              <a:rPr lang="en-US" sz="2200" b="1" dirty="0">
+              <a:rPr lang="en-US" sz="2100" b="1" dirty="0">
                 <a:solidFill>
                   <a:srgbClr val="16A34A"/>
                 </a:solidFill>
@@ -5463,7 +8787,7 @@
               </a:rPr>
               <a:t>+₹2.41 Cr</a:t>
             </a:r>
-            <a:endParaRPr lang="en-US" sz="2200" dirty="0"/>
+            <a:endParaRPr lang="en-US" sz="2100" dirty="0"/>
           </a:p>
         </p:txBody>
       </p:sp>
@@ -5475,8 +8799,8 @@
         </p:nvSpPr>
         <p:spPr>
           <a:xfrm>
-            <a:off x="7507224" y="2776118"/>
-            <a:ext cx="1993392" cy="267371"/>
+            <a:off x="7552944" y="2776118"/>
+            <a:ext cx="1975104" cy="267371"/>
           </a:xfrm>
           <a:prstGeom prst="rect">
             <a:avLst/>
@@ -5514,8 +8838,8 @@
         </p:nvSpPr>
         <p:spPr>
           <a:xfrm>
-            <a:off x="9720072" y="2304288"/>
-            <a:ext cx="2103120" cy="786384"/>
+            <a:off x="9747504" y="2304288"/>
+            <a:ext cx="2084832" cy="786384"/>
           </a:xfrm>
           <a:prstGeom prst="roundRect">
             <a:avLst>
@@ -5536,8 +8860,8 @@
         </p:nvSpPr>
         <p:spPr>
           <a:xfrm>
-            <a:off x="9738360" y="2414016"/>
-            <a:ext cx="2066544" cy="408920"/>
+            <a:off x="9765792" y="2414016"/>
+            <a:ext cx="2048256" cy="408920"/>
           </a:xfrm>
           <a:prstGeom prst="rect">
             <a:avLst/>
@@ -5553,7 +8877,7 @@
               <a:buNone/>
             </a:pPr>
             <a:r>
-              <a:rPr lang="en-US" sz="2200" b="1" dirty="0">
+              <a:rPr lang="en-US" sz="2100" b="1" dirty="0">
                 <a:solidFill>
                   <a:srgbClr val="E11D48"/>
                 </a:solidFill>
@@ -5563,7 +8887,7 @@
               </a:rPr>
               <a:t>−₹1.60 Cr</a:t>
             </a:r>
-            <a:endParaRPr lang="en-US" sz="2200" dirty="0"/>
+            <a:endParaRPr lang="en-US" sz="2100" dirty="0"/>
           </a:p>
         </p:txBody>
       </p:sp>
@@ -5575,8 +8899,8 @@
         </p:nvSpPr>
         <p:spPr>
           <a:xfrm>
-            <a:off x="9774936" y="2776118"/>
-            <a:ext cx="1993392" cy="267371"/>
+            <a:off x="9802368" y="2776118"/>
+            <a:ext cx="1975104" cy="267371"/>
           </a:xfrm>
           <a:prstGeom prst="rect">
             <a:avLst/>
@@ -5614,7 +8938,7 @@
         </p:nvSpPr>
         <p:spPr>
           <a:xfrm>
-            <a:off x="7452360" y="3200400"/>
+            <a:off x="7498080" y="3246120"/>
             <a:ext cx="4297680" cy="292608"/>
           </a:xfrm>
           <a:prstGeom prst="rect">
@@ -5653,8 +8977,8 @@
         </p:nvSpPr>
         <p:spPr>
           <a:xfrm>
-            <a:off x="7452360" y="3584448"/>
-            <a:ext cx="932688" cy="457200"/>
+            <a:off x="7498080" y="3630168"/>
+            <a:ext cx="960120" cy="457200"/>
           </a:xfrm>
           <a:prstGeom prst="roundRect">
             <a:avLst>
@@ -5675,8 +8999,8 @@
         </p:nvSpPr>
         <p:spPr>
           <a:xfrm>
-            <a:off x="7452360" y="3584448"/>
-            <a:ext cx="932688" cy="457200"/>
+            <a:off x="7498080" y="3630168"/>
+            <a:ext cx="960120" cy="457200"/>
           </a:xfrm>
           <a:prstGeom prst="rect">
             <a:avLst/>
@@ -5692,7 +9016,7 @@
               <a:buNone/>
             </a:pPr>
             <a:r>
-              <a:rPr lang="en-US" sz="850" b="1" dirty="0">
+              <a:rPr lang="en-US" sz="800" b="1" dirty="0">
                 <a:solidFill>
                   <a:srgbClr val="FFFFFF"/>
                 </a:solidFill>
@@ -5702,7 +9026,7 @@
               </a:rPr>
               <a:t>AUG-DEC</a:t>
             </a:r>
-            <a:endParaRPr lang="en-US" sz="850" dirty="0"/>
+            <a:endParaRPr lang="en-US" sz="800" dirty="0"/>
           </a:p>
         </p:txBody>
       </p:sp>
@@ -5714,8 +9038,8 @@
         </p:nvSpPr>
         <p:spPr>
           <a:xfrm>
-            <a:off x="8503920" y="3547872"/>
-            <a:ext cx="3246120" cy="713232"/>
+            <a:off x="8577072" y="3593592"/>
+            <a:ext cx="3200400" cy="713232"/>
           </a:xfrm>
           <a:prstGeom prst="rect">
             <a:avLst/>
@@ -5734,7 +9058,7 @@
               <a:buNone/>
             </a:pPr>
             <a:r>
-              <a:rPr lang="en-US" sz="1000" dirty="0">
+              <a:rPr lang="en-US" sz="950" dirty="0">
                 <a:solidFill>
                   <a:srgbClr val="0F172A"/>
                 </a:solidFill>
@@ -5744,7 +9068,7 @@
               </a:rPr>
               <a:t>No licence yet. Grow IPO to 20 and work that book, push rating sales, keep the burn tight.</a:t>
             </a:r>
-            <a:endParaRPr lang="en-US" sz="1000" dirty="0"/>
+            <a:endParaRPr lang="en-US" sz="950" dirty="0"/>
           </a:p>
         </p:txBody>
       </p:sp>
@@ -5756,8 +9080,8 @@
         </p:nvSpPr>
         <p:spPr>
           <a:xfrm>
-            <a:off x="7452360" y="4306824"/>
-            <a:ext cx="932688" cy="457200"/>
+            <a:off x="7498080" y="4352544"/>
+            <a:ext cx="960120" cy="457200"/>
           </a:xfrm>
           <a:prstGeom prst="roundRect">
             <a:avLst>
@@ -5778,8 +9102,8 @@
         </p:nvSpPr>
         <p:spPr>
           <a:xfrm>
-            <a:off x="7452360" y="4306824"/>
-            <a:ext cx="932688" cy="457200"/>
+            <a:off x="7498080" y="4352544"/>
+            <a:ext cx="960120" cy="457200"/>
           </a:xfrm>
           <a:prstGeom prst="rect">
             <a:avLst/>
@@ -5795,7 +9119,7 @@
               <a:buNone/>
             </a:pPr>
             <a:r>
-              <a:rPr lang="en-US" sz="850" b="1" dirty="0">
+              <a:rPr lang="en-US" sz="800" b="1" dirty="0">
                 <a:solidFill>
                   <a:srgbClr val="FFFFFF"/>
                 </a:solidFill>
@@ -5805,7 +9129,7 @@
               </a:rPr>
               <a:t>JAN</a:t>
             </a:r>
-            <a:endParaRPr lang="en-US" sz="850" dirty="0"/>
+            <a:endParaRPr lang="en-US" sz="800" dirty="0"/>
           </a:p>
         </p:txBody>
       </p:sp>
@@ -5817,8 +9141,8 @@
         </p:nvSpPr>
         <p:spPr>
           <a:xfrm>
-            <a:off x="8503920" y="4270248"/>
-            <a:ext cx="3246120" cy="713232"/>
+            <a:off x="8577072" y="4315968"/>
+            <a:ext cx="3200400" cy="713232"/>
           </a:xfrm>
           <a:prstGeom prst="rect">
             <a:avLst/>
@@ -5837,7 +9161,7 @@
               <a:buNone/>
             </a:pPr>
             <a:r>
-              <a:rPr lang="en-US" sz="1000" dirty="0">
+              <a:rPr lang="en-US" sz="950" dirty="0">
                 <a:solidFill>
                   <a:srgbClr val="0F172A"/>
                 </a:solidFill>
@@ -5847,7 +9171,7 @@
               </a:rPr>
               <a:t>Licence live, but the IPO book comes first. Zero BLR this month, branding push, delivery protected.</a:t>
             </a:r>
-            <a:endParaRPr lang="en-US" sz="1000" dirty="0"/>
+            <a:endParaRPr lang="en-US" sz="950" dirty="0"/>
           </a:p>
         </p:txBody>
       </p:sp>
@@ -5859,8 +9183,8 @@
         </p:nvSpPr>
         <p:spPr>
           <a:xfrm>
-            <a:off x="7452360" y="5029200"/>
-            <a:ext cx="932688" cy="457200"/>
+            <a:off x="7498080" y="5074920"/>
+            <a:ext cx="960120" cy="457200"/>
           </a:xfrm>
           <a:prstGeom prst="roundRect">
             <a:avLst>
@@ -5881,8 +9205,8 @@
         </p:nvSpPr>
         <p:spPr>
           <a:xfrm>
-            <a:off x="7452360" y="5029200"/>
-            <a:ext cx="932688" cy="457200"/>
+            <a:off x="7498080" y="5074920"/>
+            <a:ext cx="960120" cy="457200"/>
           </a:xfrm>
           <a:prstGeom prst="rect">
             <a:avLst/>
@@ -5898,7 +9222,7 @@
               <a:buNone/>
             </a:pPr>
             <a:r>
-              <a:rPr lang="en-US" sz="850" b="1" dirty="0">
+              <a:rPr lang="en-US" sz="800" b="1" dirty="0">
                 <a:solidFill>
                   <a:srgbClr val="FFFFFF"/>
                 </a:solidFill>
@@ -5908,7 +9232,7 @@
               </a:rPr>
               <a:t>FEB+</a:t>
             </a:r>
-            <a:endParaRPr lang="en-US" sz="850" dirty="0"/>
+            <a:endParaRPr lang="en-US" sz="800" dirty="0"/>
           </a:p>
         </p:txBody>
       </p:sp>
@@ -5920,8 +9244,8 @@
         </p:nvSpPr>
         <p:spPr>
           <a:xfrm>
-            <a:off x="8503920" y="4992624"/>
-            <a:ext cx="3246120" cy="713232"/>
+            <a:off x="8577072" y="5038344"/>
+            <a:ext cx="3200400" cy="713232"/>
           </a:xfrm>
           <a:prstGeom prst="rect">
             <a:avLst/>
@@ -5940,7 +9264,7 @@
               <a:buNone/>
             </a:pPr>
             <a:r>
-              <a:rPr lang="en-US" sz="1000" dirty="0">
+              <a:rPr lang="en-US" sz="950" dirty="0">
                 <a:solidFill>
                   <a:srgbClr val="0F172A"/>
                 </a:solidFill>
@@ -5950,7 +9274,7 @@
               </a:rPr>
               <a:t>IPO steady, capacity frees up, BLR ramps to 16 a month. Exit run-rate into next year is strong.</a:t>
             </a:r>
-            <a:endParaRPr lang="en-US" sz="1000" dirty="0"/>
+            <a:endParaRPr lang="en-US" sz="950" dirty="0"/>
           </a:p>
         </p:txBody>
       </p:sp>
@@ -5962,8 +9286,8 @@
         </p:nvSpPr>
         <p:spPr>
           <a:xfrm>
-            <a:off x="7452360" y="5751576"/>
-            <a:ext cx="932688" cy="457200"/>
+            <a:off x="7498080" y="5797296"/>
+            <a:ext cx="960120" cy="457200"/>
           </a:xfrm>
           <a:prstGeom prst="roundRect">
             <a:avLst>
@@ -5984,8 +9308,8 @@
         </p:nvSpPr>
         <p:spPr>
           <a:xfrm>
-            <a:off x="7452360" y="5751576"/>
-            <a:ext cx="932688" cy="457200"/>
+            <a:off x="7498080" y="5797296"/>
+            <a:ext cx="960120" cy="457200"/>
           </a:xfrm>
           <a:prstGeom prst="rect">
             <a:avLst/>
@@ -6001,7 +9325,7 @@
               <a:buNone/>
             </a:pPr>
             <a:r>
-              <a:rPr lang="en-US" sz="850" b="1" dirty="0">
+              <a:rPr lang="en-US" sz="800" b="1" dirty="0">
                 <a:solidFill>
                   <a:srgbClr val="FFFFFF"/>
                 </a:solidFill>
@@ -6011,7 +9335,7 @@
               </a:rPr>
               <a:t>HIRE</a:t>
             </a:r>
-            <a:endParaRPr lang="en-US" sz="850" dirty="0"/>
+            <a:endParaRPr lang="en-US" sz="800" dirty="0"/>
           </a:p>
         </p:txBody>
       </p:sp>
@@ -6023,8 +9347,8 @@
         </p:nvSpPr>
         <p:spPr>
           <a:xfrm>
-            <a:off x="8503920" y="5715000"/>
-            <a:ext cx="3246120" cy="713232"/>
+            <a:off x="8577072" y="5760720"/>
+            <a:ext cx="3200400" cy="713232"/>
           </a:xfrm>
           <a:prstGeom prst="rect">
             <a:avLst/>
@@ -6043,7 +9367,7 @@
               <a:buNone/>
             </a:pPr>
             <a:r>
-              <a:rPr lang="en-US" sz="1000" dirty="0">
+              <a:rPr lang="en-US" sz="950" dirty="0">
                 <a:solidFill>
                   <a:srgbClr val="0F172A"/>
                 </a:solidFill>
@@ -6053,7 +9377,7 @@
               </a:rPr>
               <a:t>Same rule, add the sixth executor only when capacity turns negative twice.</a:t>
             </a:r>
-            <a:endParaRPr lang="en-US" sz="1000" dirty="0"/>
+            <a:endParaRPr lang="en-US" sz="950" dirty="0"/>
           </a:p>
         </p:txBody>
       </p:sp>
@@ -6065,8 +9389,8 @@
         </p:nvSpPr>
         <p:spPr>
           <a:xfrm>
-            <a:off x="457200" y="6455664"/>
-            <a:ext cx="11274552" cy="274320"/>
+            <a:off x="457200" y="6473952"/>
+            <a:ext cx="7315200" cy="274320"/>
           </a:xfrm>
           <a:prstGeom prst="rect">
             <a:avLst/>
@@ -6078,7 +9402,7 @@
           <a:bodyPr wrap="square" rtlCol="0" anchor="ctr"/>
           <a:lstStyle/>
           <a:p>
-            <a:pPr algn="l" indent="0" marL="0">
+            <a:pPr indent="0" marL="0">
               <a:buNone/>
             </a:pPr>
             <a:r>
@@ -6104,7 +9428,7 @@
         </p:nvSpPr>
         <p:spPr>
           <a:xfrm>
-            <a:off x="5943600" y="6455664"/>
+            <a:off x="5943600" y="6473952"/>
             <a:ext cx="5788152" cy="274320"/>
           </a:xfrm>
           <a:prstGeom prst="rect">
@@ -6192,7 +9516,7 @@
               <a:buNone/>
             </a:pPr>
             <a:r>
-              <a:rPr lang="en-US" sz="2600" b="1" dirty="0">
+              <a:rPr lang="en-US" sz="2500" b="1" dirty="0">
                 <a:solidFill>
                   <a:srgbClr val="0F172A"/>
                 </a:solidFill>
@@ -6202,7 +9526,7 @@
               </a:rPr>
               <a:t>Scenario 3  ·  No BLR licence in FY27</a:t>
             </a:r>
-            <a:endParaRPr lang="en-US" sz="2600" dirty="0"/>
+            <a:endParaRPr lang="en-US" sz="2500" dirty="0"/>
           </a:p>
         </p:txBody>
       </p:sp>
@@ -6275,8 +9599,8 @@
         </p:nvSpPr>
         <p:spPr>
           <a:xfrm>
-            <a:off x="457200" y="1143000"/>
-            <a:ext cx="6766560" cy="274320"/>
+            <a:off x="457200" y="1097280"/>
+            <a:ext cx="6858000" cy="274320"/>
           </a:xfrm>
           <a:prstGeom prst="rect">
             <a:avLst/>
@@ -6306,30 +9630,22 @@
           </a:p>
         </p:txBody>
       </p:sp>
-      <p:pic>
-        <p:nvPicPr>
-          <p:cNvPr id="6" name="Image 0" descr="/tmp/claude-0/-home-user-AOP/882c7cd9-4c83-533a-b587-3f8bdf195bc7/scratchpad/charts/s3_beChart.png">    </p:cNvPr>
-          <p:cNvPicPr>
-            <a:picLocks noChangeAspect="1"/>
-          </p:cNvPicPr>
-          <p:nvPr/>
-        </p:nvPicPr>
-        <p:blipFill>
-          <a:blip r:embed="rId1"/>
-          <a:stretch>
-            <a:fillRect/>
-          </a:stretch>
-        </p:blipFill>
-        <p:spPr>
-          <a:xfrm>
-            <a:off x="365760" y="1417320"/>
-            <a:ext cx="6903720" cy="3694176"/>
-          </a:xfrm>
-          <a:prstGeom prst="rect">
-            <a:avLst/>
-          </a:prstGeom>
-        </p:spPr>
-      </p:pic>
+      <p:graphicFrame>
+        <p:nvGraphicFramePr>
+          <p:cNvPr id="6" name="Chart 0" descr=""/>
+          <p:cNvGraphicFramePr/>
+          <p:nvPr/>
+        </p:nvGraphicFramePr>
+        <p:xfrm>
+          <a:off x="365760" y="1371600"/>
+          <a:ext cx="7040880" cy="4663440"/>
+        </p:xfrm>
+        <a:graphic xmlns:a="http://schemas.openxmlformats.org/drawingml/2006/main">
+          <a:graphicData uri="http://schemas.openxmlformats.org/drawingml/2006/chart">
+            <c:chart xmlns:c="http://schemas.openxmlformats.org/drawingml/2006/chart" r:id="rId1"/>
+          </a:graphicData>
+        </a:graphic>
+      </p:graphicFrame>
       <p:sp>
         <p:nvSpPr>
           <p:cNvPr id="7" name="Text 4"/>
@@ -6338,8 +9654,8 @@
         </p:nvSpPr>
         <p:spPr>
           <a:xfrm>
-            <a:off x="457200" y="5257800"/>
-            <a:ext cx="6766560" cy="457200"/>
+            <a:off x="457200" y="6053328"/>
+            <a:ext cx="6858000" cy="365760"/>
           </a:xfrm>
           <a:prstGeom prst="rect">
             <a:avLst/>
@@ -6355,7 +9671,7 @@
               <a:buNone/>
             </a:pPr>
             <a:r>
-              <a:rPr lang="en-US" sz="1200" i="1" dirty="0">
+              <a:rPr lang="en-US" sz="1100" i="1" dirty="0">
                 <a:solidFill>
                   <a:srgbClr val="0D9488"/>
                 </a:solidFill>
@@ -6365,7 +9681,7 @@
               </a:rPr>
               <a:t>Branding: focus on IPO brand building, no BLR launch spend this year.</a:t>
             </a:r>
-            <a:endParaRPr lang="en-US" sz="1200" dirty="0"/>
+            <a:endParaRPr lang="en-US" sz="1100" dirty="0"/>
           </a:p>
         </p:txBody>
       </p:sp>
@@ -6377,8 +9693,8 @@
         </p:nvSpPr>
         <p:spPr>
           <a:xfrm>
-            <a:off x="7452360" y="1371600"/>
-            <a:ext cx="2103120" cy="786384"/>
+            <a:off x="7498080" y="1371600"/>
+            <a:ext cx="2084832" cy="786384"/>
           </a:xfrm>
           <a:prstGeom prst="roundRect">
             <a:avLst>
@@ -6399,8 +9715,8 @@
         </p:nvSpPr>
         <p:spPr>
           <a:xfrm>
-            <a:off x="7470648" y="1481328"/>
-            <a:ext cx="2066544" cy="408920"/>
+            <a:off x="7516368" y="1481328"/>
+            <a:ext cx="2048256" cy="408920"/>
           </a:xfrm>
           <a:prstGeom prst="rect">
             <a:avLst/>
@@ -6416,7 +9732,7 @@
               <a:buNone/>
             </a:pPr>
             <a:r>
-              <a:rPr lang="en-US" sz="2200" b="1" dirty="0">
+              <a:rPr lang="en-US" sz="2100" b="1" dirty="0">
                 <a:solidFill>
                   <a:srgbClr val="E11D48"/>
                 </a:solidFill>
@@ -6426,7 +9742,7 @@
               </a:rPr>
               <a:t>None</a:t>
             </a:r>
-            <a:endParaRPr lang="en-US" sz="2200" dirty="0"/>
+            <a:endParaRPr lang="en-US" sz="2100" dirty="0"/>
           </a:p>
         </p:txBody>
       </p:sp>
@@ -6438,8 +9754,8 @@
         </p:nvSpPr>
         <p:spPr>
           <a:xfrm>
-            <a:off x="7507224" y="1843430"/>
-            <a:ext cx="1993392" cy="267371"/>
+            <a:off x="7552944" y="1843430"/>
+            <a:ext cx="1975104" cy="267371"/>
           </a:xfrm>
           <a:prstGeom prst="rect">
             <a:avLst/>
@@ -6477,8 +9793,8 @@
         </p:nvSpPr>
         <p:spPr>
           <a:xfrm>
-            <a:off x="9720072" y="1371600"/>
-            <a:ext cx="2103120" cy="786384"/>
+            <a:off x="9747504" y="1371600"/>
+            <a:ext cx="2084832" cy="786384"/>
           </a:xfrm>
           <a:prstGeom prst="roundRect">
             <a:avLst>
@@ -6499,8 +9815,8 @@
         </p:nvSpPr>
         <p:spPr>
           <a:xfrm>
-            <a:off x="9738360" y="1481328"/>
-            <a:ext cx="2066544" cy="408920"/>
+            <a:off x="9765792" y="1481328"/>
+            <a:ext cx="2048256" cy="408920"/>
           </a:xfrm>
           <a:prstGeom prst="rect">
             <a:avLst/>
@@ -6516,7 +9832,7 @@
               <a:buNone/>
             </a:pPr>
             <a:r>
-              <a:rPr lang="en-US" sz="2200" b="1" dirty="0">
+              <a:rPr lang="en-US" sz="2100" b="1" dirty="0">
                 <a:solidFill>
                   <a:srgbClr val="E11D48"/>
                 </a:solidFill>
@@ -6526,7 +9842,7 @@
               </a:rPr>
               <a:t>−₹2.15 Cr</a:t>
             </a:r>
-            <a:endParaRPr lang="en-US" sz="2200" dirty="0"/>
+            <a:endParaRPr lang="en-US" sz="2100" dirty="0"/>
           </a:p>
         </p:txBody>
       </p:sp>
@@ -6538,8 +9854,8 @@
         </p:nvSpPr>
         <p:spPr>
           <a:xfrm>
-            <a:off x="9774936" y="1843430"/>
-            <a:ext cx="1993392" cy="267371"/>
+            <a:off x="9802368" y="1843430"/>
+            <a:ext cx="1975104" cy="267371"/>
           </a:xfrm>
           <a:prstGeom prst="rect">
             <a:avLst/>
@@ -6577,8 +9893,8 @@
         </p:nvSpPr>
         <p:spPr>
           <a:xfrm>
-            <a:off x="7452360" y="2304288"/>
-            <a:ext cx="2103120" cy="786384"/>
+            <a:off x="7498080" y="2304288"/>
+            <a:ext cx="2084832" cy="786384"/>
           </a:xfrm>
           <a:prstGeom prst="roundRect">
             <a:avLst>
@@ -6599,8 +9915,8 @@
         </p:nvSpPr>
         <p:spPr>
           <a:xfrm>
-            <a:off x="7470648" y="2414016"/>
-            <a:ext cx="2066544" cy="408920"/>
+            <a:off x="7516368" y="2414016"/>
+            <a:ext cx="2048256" cy="408920"/>
           </a:xfrm>
           <a:prstGeom prst="rect">
             <a:avLst/>
@@ -6616,7 +9932,7 @@
               <a:buNone/>
             </a:pPr>
             <a:r>
-              <a:rPr lang="en-US" sz="2200" b="1" dirty="0">
+              <a:rPr lang="en-US" sz="2100" b="1" dirty="0">
                 <a:solidFill>
                   <a:srgbClr val="E11D48"/>
                 </a:solidFill>
@@ -6626,7 +9942,7 @@
               </a:rPr>
               <a:t>−₹2.08 Cr</a:t>
             </a:r>
-            <a:endParaRPr lang="en-US" sz="2200" dirty="0"/>
+            <a:endParaRPr lang="en-US" sz="2100" dirty="0"/>
           </a:p>
         </p:txBody>
       </p:sp>
@@ -6638,8 +9954,8 @@
         </p:nvSpPr>
         <p:spPr>
           <a:xfrm>
-            <a:off x="7507224" y="2776118"/>
-            <a:ext cx="1993392" cy="267371"/>
+            <a:off x="7552944" y="2776118"/>
+            <a:ext cx="1975104" cy="267371"/>
           </a:xfrm>
           <a:prstGeom prst="rect">
             <a:avLst/>
@@ -6677,8 +9993,8 @@
         </p:nvSpPr>
         <p:spPr>
           <a:xfrm>
-            <a:off x="9720072" y="2304288"/>
-            <a:ext cx="2103120" cy="786384"/>
+            <a:off x="9747504" y="2304288"/>
+            <a:ext cx="2084832" cy="786384"/>
           </a:xfrm>
           <a:prstGeom prst="roundRect">
             <a:avLst>
@@ -6699,8 +10015,8 @@
         </p:nvSpPr>
         <p:spPr>
           <a:xfrm>
-            <a:off x="9738360" y="2414016"/>
-            <a:ext cx="2066544" cy="408920"/>
+            <a:off x="9765792" y="2414016"/>
+            <a:ext cx="2048256" cy="408920"/>
           </a:xfrm>
           <a:prstGeom prst="rect">
             <a:avLst/>
@@ -6716,7 +10032,7 @@
               <a:buNone/>
             </a:pPr>
             <a:r>
-              <a:rPr lang="en-US" sz="2200" b="1" dirty="0">
+              <a:rPr lang="en-US" sz="2100" b="1" dirty="0">
                 <a:solidFill>
                   <a:srgbClr val="E11D48"/>
                 </a:solidFill>
@@ -6726,7 +10042,7 @@
               </a:rPr>
               <a:t>−₹2.15 Cr</a:t>
             </a:r>
-            <a:endParaRPr lang="en-US" sz="2200" dirty="0"/>
+            <a:endParaRPr lang="en-US" sz="2100" dirty="0"/>
           </a:p>
         </p:txBody>
       </p:sp>
@@ -6738,8 +10054,8 @@
         </p:nvSpPr>
         <p:spPr>
           <a:xfrm>
-            <a:off x="9774936" y="2776118"/>
-            <a:ext cx="1993392" cy="267371"/>
+            <a:off x="9802368" y="2776118"/>
+            <a:ext cx="1975104" cy="267371"/>
           </a:xfrm>
           <a:prstGeom prst="rect">
             <a:avLst/>
@@ -6777,7 +10093,7 @@
         </p:nvSpPr>
         <p:spPr>
           <a:xfrm>
-            <a:off x="7452360" y="3200400"/>
+            <a:off x="7498080" y="3246120"/>
             <a:ext cx="4297680" cy="292608"/>
           </a:xfrm>
           <a:prstGeom prst="rect">
@@ -6816,8 +10132,8 @@
         </p:nvSpPr>
         <p:spPr>
           <a:xfrm>
-            <a:off x="7452360" y="3584448"/>
-            <a:ext cx="932688" cy="457200"/>
+            <a:off x="7498080" y="3630168"/>
+            <a:ext cx="960120" cy="457200"/>
           </a:xfrm>
           <a:prstGeom prst="roundRect">
             <a:avLst>
@@ -6838,8 +10154,8 @@
         </p:nvSpPr>
         <p:spPr>
           <a:xfrm>
-            <a:off x="7452360" y="3584448"/>
-            <a:ext cx="932688" cy="457200"/>
+            <a:off x="7498080" y="3630168"/>
+            <a:ext cx="960120" cy="457200"/>
           </a:xfrm>
           <a:prstGeom prst="rect">
             <a:avLst/>
@@ -6855,7 +10171,7 @@
               <a:buNone/>
             </a:pPr>
             <a:r>
-              <a:rPr lang="en-US" sz="850" b="1" dirty="0">
+              <a:rPr lang="en-US" sz="800" b="1" dirty="0">
                 <a:solidFill>
                   <a:srgbClr val="FFFFFF"/>
                 </a:solidFill>
@@ -6865,7 +10181,7 @@
               </a:rPr>
               <a:t>ALL YEAR</a:t>
             </a:r>
-            <a:endParaRPr lang="en-US" sz="850" dirty="0"/>
+            <a:endParaRPr lang="en-US" sz="800" dirty="0"/>
           </a:p>
         </p:txBody>
       </p:sp>
@@ -6877,8 +10193,8 @@
         </p:nvSpPr>
         <p:spPr>
           <a:xfrm>
-            <a:off x="8503920" y="3547872"/>
-            <a:ext cx="3246120" cy="713232"/>
+            <a:off x="8577072" y="3593592"/>
+            <a:ext cx="3200400" cy="713232"/>
           </a:xfrm>
           <a:prstGeom prst="rect">
             <a:avLst/>
@@ -6897,7 +10213,7 @@
               <a:buNone/>
             </a:pPr>
             <a:r>
-              <a:rPr lang="en-US" sz="1000" dirty="0">
+              <a:rPr lang="en-US" sz="950" dirty="0">
                 <a:solidFill>
                   <a:srgbClr val="0F172A"/>
                 </a:solidFill>
@@ -6907,7 +10223,7 @@
               </a:rPr>
               <a:t>No BLR. Pour the whole team into IPO and rating cases.</a:t>
             </a:r>
-            <a:endParaRPr lang="en-US" sz="1000" dirty="0"/>
+            <a:endParaRPr lang="en-US" sz="950" dirty="0"/>
           </a:p>
         </p:txBody>
       </p:sp>
@@ -6919,8 +10235,8 @@
         </p:nvSpPr>
         <p:spPr>
           <a:xfrm>
-            <a:off x="7452360" y="4306824"/>
-            <a:ext cx="932688" cy="457200"/>
+            <a:off x="7498080" y="4352544"/>
+            <a:ext cx="960120" cy="457200"/>
           </a:xfrm>
           <a:prstGeom prst="roundRect">
             <a:avLst>
@@ -6941,8 +10257,8 @@
         </p:nvSpPr>
         <p:spPr>
           <a:xfrm>
-            <a:off x="7452360" y="4306824"/>
-            <a:ext cx="932688" cy="457200"/>
+            <a:off x="7498080" y="4352544"/>
+            <a:ext cx="960120" cy="457200"/>
           </a:xfrm>
           <a:prstGeom prst="rect">
             <a:avLst/>
@@ -6958,7 +10274,7 @@
               <a:buNone/>
             </a:pPr>
             <a:r>
-              <a:rPr lang="en-US" sz="850" b="1" dirty="0">
+              <a:rPr lang="en-US" sz="800" b="1" dirty="0">
                 <a:solidFill>
                   <a:srgbClr val="FFFFFF"/>
                 </a:solidFill>
@@ -6968,7 +10284,7 @@
               </a:rPr>
               <a:t>GROW</a:t>
             </a:r>
-            <a:endParaRPr lang="en-US" sz="850" dirty="0"/>
+            <a:endParaRPr lang="en-US" sz="800" dirty="0"/>
           </a:p>
         </p:txBody>
       </p:sp>
@@ -6980,8 +10296,8 @@
         </p:nvSpPr>
         <p:spPr>
           <a:xfrm>
-            <a:off x="8503920" y="4270248"/>
-            <a:ext cx="3246120" cy="713232"/>
+            <a:off x="8577072" y="4315968"/>
+            <a:ext cx="3200400" cy="713232"/>
           </a:xfrm>
           <a:prstGeom prst="rect">
             <a:avLst/>
@@ -7000,7 +10316,7 @@
               <a:buNone/>
             </a:pPr>
             <a:r>
-              <a:rPr lang="en-US" sz="1000" dirty="0">
+              <a:rPr lang="en-US" sz="950" dirty="0">
                 <a:solidFill>
                   <a:srgbClr val="0F172A"/>
                 </a:solidFill>
@@ -7010,7 +10326,7 @@
               </a:rPr>
               <a:t>Keep winning 10 to 12 cases a month so the IPO and ratings book compounds and income keeps rising.</a:t>
             </a:r>
-            <a:endParaRPr lang="en-US" sz="1000" dirty="0"/>
+            <a:endParaRPr lang="en-US" sz="950" dirty="0"/>
           </a:p>
         </p:txBody>
       </p:sp>
@@ -7022,8 +10338,8 @@
         </p:nvSpPr>
         <p:spPr>
           <a:xfrm>
-            <a:off x="7452360" y="5029200"/>
-            <a:ext cx="932688" cy="457200"/>
+            <a:off x="7498080" y="5074920"/>
+            <a:ext cx="960120" cy="457200"/>
           </a:xfrm>
           <a:prstGeom prst="roundRect">
             <a:avLst>
@@ -7044,8 +10360,8 @@
         </p:nvSpPr>
         <p:spPr>
           <a:xfrm>
-            <a:off x="7452360" y="5029200"/>
-            <a:ext cx="932688" cy="457200"/>
+            <a:off x="7498080" y="5074920"/>
+            <a:ext cx="960120" cy="457200"/>
           </a:xfrm>
           <a:prstGeom prst="rect">
             <a:avLst/>
@@ -7061,7 +10377,7 @@
               <a:buNone/>
             </a:pPr>
             <a:r>
-              <a:rPr lang="en-US" sz="850" b="1" dirty="0">
+              <a:rPr lang="en-US" sz="800" b="1" dirty="0">
                 <a:solidFill>
                   <a:srgbClr val="FFFFFF"/>
                 </a:solidFill>
@@ -7071,7 +10387,7 @@
               </a:rPr>
               <a:t>COST</a:t>
             </a:r>
-            <a:endParaRPr lang="en-US" sz="850" dirty="0"/>
+            <a:endParaRPr lang="en-US" sz="800" dirty="0"/>
           </a:p>
         </p:txBody>
       </p:sp>
@@ -7083,8 +10399,8 @@
         </p:nvSpPr>
         <p:spPr>
           <a:xfrm>
-            <a:off x="8503920" y="4992624"/>
-            <a:ext cx="3246120" cy="713232"/>
+            <a:off x="8577072" y="5038344"/>
+            <a:ext cx="3200400" cy="713232"/>
           </a:xfrm>
           <a:prstGeom prst="rect">
             <a:avLst/>
@@ -7103,7 +10419,7 @@
               <a:buNone/>
             </a:pPr>
             <a:r>
-              <a:rPr lang="en-US" sz="1000" dirty="0">
+              <a:rPr lang="en-US" sz="950" dirty="0">
                 <a:solidFill>
                   <a:srgbClr val="0F172A"/>
                 </a:solidFill>
@@ -7113,7 +10429,7 @@
               </a:rPr>
               <a:t>Hold discretionary spend. Do not add the sixth executor this year.</a:t>
             </a:r>
-            <a:endParaRPr lang="en-US" sz="1000" dirty="0"/>
+            <a:endParaRPr lang="en-US" sz="950" dirty="0"/>
           </a:p>
         </p:txBody>
       </p:sp>
@@ -7125,8 +10441,8 @@
         </p:nvSpPr>
         <p:spPr>
           <a:xfrm>
-            <a:off x="7452360" y="5751576"/>
-            <a:ext cx="932688" cy="457200"/>
+            <a:off x="7498080" y="5797296"/>
+            <a:ext cx="960120" cy="457200"/>
           </a:xfrm>
           <a:prstGeom prst="roundRect">
             <a:avLst>
@@ -7147,8 +10463,8 @@
         </p:nvSpPr>
         <p:spPr>
           <a:xfrm>
-            <a:off x="7452360" y="5751576"/>
-            <a:ext cx="932688" cy="457200"/>
+            <a:off x="7498080" y="5797296"/>
+            <a:ext cx="960120" cy="457200"/>
           </a:xfrm>
           <a:prstGeom prst="rect">
             <a:avLst/>
@@ -7164,7 +10480,7 @@
               <a:buNone/>
             </a:pPr>
             <a:r>
-              <a:rPr lang="en-US" sz="850" b="1" dirty="0">
+              <a:rPr lang="en-US" sz="800" b="1" dirty="0">
                 <a:solidFill>
                   <a:srgbClr val="FFFFFF"/>
                 </a:solidFill>
@@ -7174,7 +10490,7 @@
               </a:rPr>
               <a:t>READY</a:t>
             </a:r>
-            <a:endParaRPr lang="en-US" sz="850" dirty="0"/>
+            <a:endParaRPr lang="en-US" sz="800" dirty="0"/>
           </a:p>
         </p:txBody>
       </p:sp>
@@ -7186,8 +10502,8 @@
         </p:nvSpPr>
         <p:spPr>
           <a:xfrm>
-            <a:off x="8503920" y="5715000"/>
-            <a:ext cx="3246120" cy="713232"/>
+            <a:off x="8577072" y="5760720"/>
+            <a:ext cx="3200400" cy="713232"/>
           </a:xfrm>
           <a:prstGeom prst="rect">
             <a:avLst/>
@@ -7206,7 +10522,7 @@
               <a:buNone/>
             </a:pPr>
             <a:r>
-              <a:rPr lang="en-US" sz="1000" dirty="0">
+              <a:rPr lang="en-US" sz="950" dirty="0">
                 <a:solidFill>
                   <a:srgbClr val="0F172A"/>
                 </a:solidFill>
@@ -7216,7 +10532,7 @@
               </a:rPr>
               <a:t>Keep the team primed so BLR can launch fast the moment it clears.</a:t>
             </a:r>
-            <a:endParaRPr lang="en-US" sz="1000" dirty="0"/>
+            <a:endParaRPr lang="en-US" sz="950" dirty="0"/>
           </a:p>
         </p:txBody>
       </p:sp>
@@ -7228,8 +10544,8 @@
         </p:nvSpPr>
         <p:spPr>
           <a:xfrm>
-            <a:off x="457200" y="6455664"/>
-            <a:ext cx="11274552" cy="274320"/>
+            <a:off x="457200" y="6473952"/>
+            <a:ext cx="7315200" cy="274320"/>
           </a:xfrm>
           <a:prstGeom prst="rect">
             <a:avLst/>
@@ -7241,7 +10557,7 @@
           <a:bodyPr wrap="square" rtlCol="0" anchor="ctr"/>
           <a:lstStyle/>
           <a:p>
-            <a:pPr algn="l" indent="0" marL="0">
+            <a:pPr indent="0" marL="0">
               <a:buNone/>
             </a:pPr>
             <a:r>
@@ -7267,7 +10583,7 @@
         </p:nvSpPr>
         <p:spPr>
           <a:xfrm>
-            <a:off x="5943600" y="6455664"/>
+            <a:off x="5943600" y="6473952"/>
             <a:ext cx="5788152" cy="274320"/>
           </a:xfrm>
           <a:prstGeom prst="rect">
@@ -7394,7 +10710,7 @@
               <a:buNone/>
             </a:pPr>
             <a:r>
-              <a:rPr lang="en-US" sz="3200" b="1" dirty="0">
+              <a:rPr lang="en-US" sz="3100" b="1" dirty="0">
                 <a:solidFill>
                   <a:srgbClr val="0F172A"/>
                 </a:solidFill>
@@ -7404,7 +10720,7 @@
               </a:rPr>
               <a:t>Same team and cost base, only the licence date moves</a:t>
             </a:r>
-            <a:endParaRPr lang="en-US" sz="3200" dirty="0"/>
+            <a:endParaRPr lang="en-US" sz="3100" dirty="0"/>
           </a:p>
         </p:txBody>
       </p:sp>
@@ -7416,12 +10732,12 @@
         </p:nvSpPr>
         <p:spPr>
           <a:xfrm>
-            <a:off x="4572000" y="1600200"/>
-            <a:ext cx="2377440" cy="548640"/>
+            <a:off x="3108960" y="1600200"/>
+            <a:ext cx="1389888" cy="493776"/>
           </a:xfrm>
           <a:prstGeom prst="roundRect">
             <a:avLst>
-              <a:gd name="adj" fmla="val 11667"/>
+              <a:gd name="adj" fmla="val 11111"/>
             </a:avLst>
           </a:prstGeom>
           <a:solidFill>
@@ -7438,51 +10754,51 @@
         </p:nvSpPr>
         <p:spPr>
           <a:xfrm>
+            <a:off x="3108960" y="1600200"/>
+            <a:ext cx="1389888" cy="493776"/>
+          </a:xfrm>
+          <a:prstGeom prst="rect">
+            <a:avLst/>
+          </a:prstGeom>
+          <a:noFill/>
+          <a:ln/>
+        </p:spPr>
+        <p:txBody>
+          <a:bodyPr wrap="square" lIns="0" tIns="0" rIns="0" bIns="0" rtlCol="0" anchor="ctr"/>
+          <a:lstStyle/>
+          <a:p>
+            <a:pPr algn="ctr" indent="0" marL="0">
+              <a:buNone/>
+            </a:pPr>
+            <a:r>
+              <a:rPr lang="en-US" sz="1150" b="1" dirty="0">
+                <a:solidFill>
+                  <a:srgbClr val="FFFFFF"/>
+                </a:solidFill>
+                <a:latin typeface="Calibri" pitchFamily="34" charset="0"/>
+                <a:ea typeface="Calibri" pitchFamily="34" charset="-122"/>
+                <a:cs typeface="Calibri" pitchFamily="34" charset="-120"/>
+              </a:rPr>
+              <a:t>S1: by Oct</a:t>
+            </a:r>
+            <a:endParaRPr lang="en-US" sz="1150" dirty="0"/>
+          </a:p>
+        </p:txBody>
+      </p:sp>
+      <p:sp>
+        <p:nvSpPr>
+          <p:cNvPr id="6" name="Shape 4"/>
+          <p:cNvSpPr/>
+          <p:nvPr/>
+        </p:nvSpPr>
+        <p:spPr>
+          <a:xfrm>
             <a:off x="4572000" y="1600200"/>
-            <a:ext cx="2377440" cy="548640"/>
-          </a:xfrm>
-          <a:prstGeom prst="rect">
-            <a:avLst/>
-          </a:prstGeom>
-          <a:noFill/>
-          <a:ln/>
-        </p:spPr>
-        <p:txBody>
-          <a:bodyPr wrap="square" lIns="0" tIns="0" rIns="0" bIns="0" rtlCol="0" anchor="ctr"/>
-          <a:lstStyle/>
-          <a:p>
-            <a:pPr algn="ctr" indent="0" marL="0">
-              <a:buNone/>
-            </a:pPr>
-            <a:r>
-              <a:rPr lang="en-US" sz="1300" b="1" dirty="0">
-                <a:solidFill>
-                  <a:srgbClr val="FFFFFF"/>
-                </a:solidFill>
-                <a:latin typeface="Calibri" pitchFamily="34" charset="0"/>
-                <a:ea typeface="Calibri" pitchFamily="34" charset="-122"/>
-                <a:cs typeface="Calibri" pitchFamily="34" charset="-120"/>
-              </a:rPr>
-              <a:t>S1: BLR by Oct</a:t>
-            </a:r>
-            <a:endParaRPr lang="en-US" sz="1300" dirty="0"/>
-          </a:p>
-        </p:txBody>
-      </p:sp>
-      <p:sp>
-        <p:nvSpPr>
-          <p:cNvPr id="6" name="Shape 4"/>
-          <p:cNvSpPr/>
-          <p:nvPr/>
-        </p:nvSpPr>
-        <p:spPr>
-          <a:xfrm>
-            <a:off x="7040880" y="1600200"/>
-            <a:ext cx="2377440" cy="548640"/>
+            <a:ext cx="1389888" cy="493776"/>
           </a:xfrm>
           <a:prstGeom prst="roundRect">
             <a:avLst>
-              <a:gd name="adj" fmla="val 11667"/>
+              <a:gd name="adj" fmla="val 11111"/>
             </a:avLst>
           </a:prstGeom>
           <a:solidFill>
@@ -7499,8 +10815,8 @@
         </p:nvSpPr>
         <p:spPr>
           <a:xfrm>
-            <a:off x="7040880" y="1600200"/>
-            <a:ext cx="2377440" cy="548640"/>
+            <a:off x="4572000" y="1600200"/>
+            <a:ext cx="1389888" cy="493776"/>
           </a:xfrm>
           <a:prstGeom prst="rect">
             <a:avLst/>
@@ -7516,7 +10832,7 @@
               <a:buNone/>
             </a:pPr>
             <a:r>
-              <a:rPr lang="en-US" sz="1300" b="1" dirty="0">
+              <a:rPr lang="en-US" sz="1150" b="1" dirty="0">
                 <a:solidFill>
                   <a:srgbClr val="FFFFFF"/>
                 </a:solidFill>
@@ -7524,9 +10840,9 @@
                 <a:ea typeface="Calibri" pitchFamily="34" charset="-122"/>
                 <a:cs typeface="Calibri" pitchFamily="34" charset="-120"/>
               </a:rPr>
-              <a:t>S2: BLR by Jan</a:t>
-            </a:r>
-            <a:endParaRPr lang="en-US" sz="1300" dirty="0"/>
+              <a:t>S2: by Jan</a:t>
+            </a:r>
+            <a:endParaRPr lang="en-US" sz="1150" dirty="0"/>
           </a:p>
         </p:txBody>
       </p:sp>
@@ -7538,12 +10854,12 @@
         </p:nvSpPr>
         <p:spPr>
           <a:xfrm>
-            <a:off x="9509760" y="1600200"/>
-            <a:ext cx="2194560" cy="548640"/>
+            <a:off x="6035040" y="1600200"/>
+            <a:ext cx="1389888" cy="493776"/>
           </a:xfrm>
           <a:prstGeom prst="roundRect">
             <a:avLst>
-              <a:gd name="adj" fmla="val 11667"/>
+              <a:gd name="adj" fmla="val 11111"/>
             </a:avLst>
           </a:prstGeom>
           <a:solidFill>
@@ -7560,8 +10876,8 @@
         </p:nvSpPr>
         <p:spPr>
           <a:xfrm>
-            <a:off x="9509760" y="1600200"/>
-            <a:ext cx="2194560" cy="548640"/>
+            <a:off x="6035040" y="1600200"/>
+            <a:ext cx="1389888" cy="493776"/>
           </a:xfrm>
           <a:prstGeom prst="rect">
             <a:avLst/>
@@ -7577,7 +10893,7 @@
               <a:buNone/>
             </a:pPr>
             <a:r>
-              <a:rPr lang="en-US" sz="1300" b="1" dirty="0">
+              <a:rPr lang="en-US" sz="1150" b="1" dirty="0">
                 <a:solidFill>
                   <a:srgbClr val="FFFFFF"/>
                 </a:solidFill>
@@ -7585,9 +10901,9 @@
                 <a:ea typeface="Calibri" pitchFamily="34" charset="-122"/>
                 <a:cs typeface="Calibri" pitchFamily="34" charset="-120"/>
               </a:rPr>
-              <a:t>S3: No BLR</a:t>
-            </a:r>
-            <a:endParaRPr lang="en-US" sz="1300" dirty="0"/>
+              <a:t>S3: no BLR</a:t>
+            </a:r>
+            <a:endParaRPr lang="en-US" sz="1150" dirty="0"/>
           </a:p>
         </p:txBody>
       </p:sp>
@@ -7599,8 +10915,8 @@
         </p:nvSpPr>
         <p:spPr>
           <a:xfrm>
-            <a:off x="502920" y="2258568"/>
-            <a:ext cx="3931920" cy="658368"/>
+            <a:off x="493776" y="2203704"/>
+            <a:ext cx="2578608" cy="603504"/>
           </a:xfrm>
           <a:prstGeom prst="rect">
             <a:avLst/>
@@ -7616,7 +10932,7 @@
               <a:buNone/>
             </a:pPr>
             <a:r>
-              <a:rPr lang="en-US" sz="1300" b="1" dirty="0">
+              <a:rPr lang="en-US" sz="1150" b="1" dirty="0">
                 <a:solidFill>
                   <a:srgbClr val="0F172A"/>
                 </a:solidFill>
@@ -7624,9 +10940,9 @@
                 <a:ea typeface="Calibri" pitchFamily="34" charset="-122"/>
                 <a:cs typeface="Calibri" pitchFamily="34" charset="-120"/>
               </a:rPr>
-              <a:t>Break even month</a:t>
-            </a:r>
-            <a:endParaRPr lang="en-US" sz="1300" dirty="0"/>
+              <a:t>Break even</a:t>
+            </a:r>
+            <a:endParaRPr lang="en-US" sz="1150" dirty="0"/>
           </a:p>
         </p:txBody>
       </p:sp>
@@ -7638,8 +10954,8 @@
         </p:nvSpPr>
         <p:spPr>
           <a:xfrm>
-            <a:off x="4617720" y="2258568"/>
-            <a:ext cx="2286000" cy="658368"/>
+            <a:off x="3145536" y="2203704"/>
+            <a:ext cx="1389888" cy="603504"/>
           </a:xfrm>
           <a:prstGeom prst="rect">
             <a:avLst/>
@@ -7655,7 +10971,7 @@
               <a:buNone/>
             </a:pPr>
             <a:r>
-              <a:rPr lang="en-US" sz="1300" dirty="0">
+              <a:rPr lang="en-US" sz="1150" dirty="0">
                 <a:solidFill>
                   <a:srgbClr val="0F172A"/>
                 </a:solidFill>
@@ -7665,7 +10981,7 @@
               </a:rPr>
               <a:t>Nov 2026</a:t>
             </a:r>
-            <a:endParaRPr lang="en-US" sz="1300" dirty="0"/>
+            <a:endParaRPr lang="en-US" sz="1150" dirty="0"/>
           </a:p>
         </p:txBody>
       </p:sp>
@@ -7677,8 +10993,8 @@
         </p:nvSpPr>
         <p:spPr>
           <a:xfrm>
-            <a:off x="7086600" y="2258568"/>
-            <a:ext cx="2286000" cy="658368"/>
+            <a:off x="4608576" y="2203704"/>
+            <a:ext cx="1389888" cy="603504"/>
           </a:xfrm>
           <a:prstGeom prst="rect">
             <a:avLst/>
@@ -7694,7 +11010,7 @@
               <a:buNone/>
             </a:pPr>
             <a:r>
-              <a:rPr lang="en-US" sz="1300" dirty="0">
+              <a:rPr lang="en-US" sz="1150" dirty="0">
                 <a:solidFill>
                   <a:srgbClr val="0F172A"/>
                 </a:solidFill>
@@ -7704,7 +11020,7 @@
               </a:rPr>
               <a:t>Feb 2027</a:t>
             </a:r>
-            <a:endParaRPr lang="en-US" sz="1300" dirty="0"/>
+            <a:endParaRPr lang="en-US" sz="1150" dirty="0"/>
           </a:p>
         </p:txBody>
       </p:sp>
@@ -7716,8 +11032,8 @@
         </p:nvSpPr>
         <p:spPr>
           <a:xfrm>
-            <a:off x="9555480" y="2258568"/>
-            <a:ext cx="2103120" cy="658368"/>
+            <a:off x="6071616" y="2203704"/>
+            <a:ext cx="1389888" cy="603504"/>
           </a:xfrm>
           <a:prstGeom prst="rect">
             <a:avLst/>
@@ -7733,7 +11049,7 @@
               <a:buNone/>
             </a:pPr>
             <a:r>
-              <a:rPr lang="en-US" sz="1300" dirty="0">
+              <a:rPr lang="en-US" sz="1150" dirty="0">
                 <a:solidFill>
                   <a:srgbClr val="0F172A"/>
                 </a:solidFill>
@@ -7741,9 +11057,9 @@
                 <a:ea typeface="Calibri" pitchFamily="34" charset="-122"/>
                 <a:cs typeface="Calibri" pitchFamily="34" charset="-120"/>
               </a:rPr>
-              <a:t>Not this year</a:t>
-            </a:r>
-            <a:endParaRPr lang="en-US" sz="1300" dirty="0"/>
+              <a:t>None</a:t>
+            </a:r>
+            <a:endParaRPr lang="en-US" sz="1150" dirty="0"/>
           </a:p>
         </p:txBody>
       </p:sp>
@@ -7755,8 +11071,8 @@
         </p:nvSpPr>
         <p:spPr>
           <a:xfrm>
-            <a:off x="457200" y="2916936"/>
-            <a:ext cx="11274552" cy="658368"/>
+            <a:off x="457200" y="2807208"/>
+            <a:ext cx="7040880" cy="603504"/>
           </a:xfrm>
           <a:prstGeom prst="rect">
             <a:avLst/>
@@ -7775,8 +11091,8 @@
         </p:nvSpPr>
         <p:spPr>
           <a:xfrm>
-            <a:off x="502920" y="2916936"/>
-            <a:ext cx="3931920" cy="658368"/>
+            <a:off x="493776" y="2807208"/>
+            <a:ext cx="2578608" cy="603504"/>
           </a:xfrm>
           <a:prstGeom prst="rect">
             <a:avLst/>
@@ -7792,7 +11108,7 @@
               <a:buNone/>
             </a:pPr>
             <a:r>
-              <a:rPr lang="en-US" sz="1300" b="1" dirty="0">
+              <a:rPr lang="en-US" sz="1150" b="1" dirty="0">
                 <a:solidFill>
                   <a:srgbClr val="0F172A"/>
                 </a:solidFill>
@@ -7802,7 +11118,7 @@
               </a:rPr>
               <a:t>Aug26 to Apr27 net</a:t>
             </a:r>
-            <a:endParaRPr lang="en-US" sz="1300" dirty="0"/>
+            <a:endParaRPr lang="en-US" sz="1150" dirty="0"/>
           </a:p>
         </p:txBody>
       </p:sp>
@@ -7814,8 +11130,8 @@
         </p:nvSpPr>
         <p:spPr>
           <a:xfrm>
-            <a:off x="4617720" y="2916936"/>
-            <a:ext cx="2286000" cy="658368"/>
+            <a:off x="3145536" y="2807208"/>
+            <a:ext cx="1389888" cy="603504"/>
           </a:xfrm>
           <a:prstGeom prst="rect">
             <a:avLst/>
@@ -7831,7 +11147,7 @@
               <a:buNone/>
             </a:pPr>
             <a:r>
-              <a:rPr lang="en-US" sz="1300" dirty="0">
+              <a:rPr lang="en-US" sz="1150" dirty="0">
                 <a:solidFill>
                   <a:srgbClr val="16A34A"/>
                 </a:solidFill>
@@ -7841,7 +11157,7 @@
               </a:rPr>
               <a:t>+₹0.27 Cr</a:t>
             </a:r>
-            <a:endParaRPr lang="en-US" sz="1300" dirty="0"/>
+            <a:endParaRPr lang="en-US" sz="1150" dirty="0"/>
           </a:p>
         </p:txBody>
       </p:sp>
@@ -7853,8 +11169,8 @@
         </p:nvSpPr>
         <p:spPr>
           <a:xfrm>
-            <a:off x="7086600" y="2916936"/>
-            <a:ext cx="2286000" cy="658368"/>
+            <a:off x="4608576" y="2807208"/>
+            <a:ext cx="1389888" cy="603504"/>
           </a:xfrm>
           <a:prstGeom prst="rect">
             <a:avLst/>
@@ -7870,7 +11186,7 @@
               <a:buNone/>
             </a:pPr>
             <a:r>
-              <a:rPr lang="en-US" sz="1300" dirty="0">
+              <a:rPr lang="en-US" sz="1150" dirty="0">
                 <a:solidFill>
                   <a:srgbClr val="E11D48"/>
                 </a:solidFill>
@@ -7880,7 +11196,7 @@
               </a:rPr>
               <a:t>−₹1.11 Cr</a:t>
             </a:r>
-            <a:endParaRPr lang="en-US" sz="1300" dirty="0"/>
+            <a:endParaRPr lang="en-US" sz="1150" dirty="0"/>
           </a:p>
         </p:txBody>
       </p:sp>
@@ -7892,8 +11208,8 @@
         </p:nvSpPr>
         <p:spPr>
           <a:xfrm>
-            <a:off x="9555480" y="2916936"/>
-            <a:ext cx="2103120" cy="658368"/>
+            <a:off x="6071616" y="2807208"/>
+            <a:ext cx="1389888" cy="603504"/>
           </a:xfrm>
           <a:prstGeom prst="rect">
             <a:avLst/>
@@ -7909,7 +11225,7 @@
               <a:buNone/>
             </a:pPr>
             <a:r>
-              <a:rPr lang="en-US" sz="1300" dirty="0">
+              <a:rPr lang="en-US" sz="1150" dirty="0">
                 <a:solidFill>
                   <a:srgbClr val="E11D48"/>
                 </a:solidFill>
@@ -7919,7 +11235,7 @@
               </a:rPr>
               <a:t>−₹2.15 Cr</a:t>
             </a:r>
-            <a:endParaRPr lang="en-US" sz="1300" dirty="0"/>
+            <a:endParaRPr lang="en-US" sz="1150" dirty="0"/>
           </a:p>
         </p:txBody>
       </p:sp>
@@ -7931,8 +11247,8 @@
         </p:nvSpPr>
         <p:spPr>
           <a:xfrm>
-            <a:off x="502920" y="3575304"/>
-            <a:ext cx="3931920" cy="658368"/>
+            <a:off x="493776" y="3410712"/>
+            <a:ext cx="2578608" cy="603504"/>
           </a:xfrm>
           <a:prstGeom prst="rect">
             <a:avLst/>
@@ -7948,7 +11264,7 @@
               <a:buNone/>
             </a:pPr>
             <a:r>
-              <a:rPr lang="en-US" sz="1300" b="1" dirty="0">
+              <a:rPr lang="en-US" sz="1150" b="1" dirty="0">
                 <a:solidFill>
                   <a:srgbClr val="0F172A"/>
                 </a:solidFill>
@@ -7956,9 +11272,9 @@
                 <a:ea typeface="Calibri" pitchFamily="34" charset="-122"/>
                 <a:cs typeface="Calibri" pitchFamily="34" charset="-120"/>
               </a:rPr>
-              <a:t>Apr27 run-rate, annualised</a:t>
-            </a:r>
-            <a:endParaRPr lang="en-US" sz="1300" dirty="0"/>
+              <a:t>Apr27 run-rate, ann.</a:t>
+            </a:r>
+            <a:endParaRPr lang="en-US" sz="1150" dirty="0"/>
           </a:p>
         </p:txBody>
       </p:sp>
@@ -7970,8 +11286,8 @@
         </p:nvSpPr>
         <p:spPr>
           <a:xfrm>
-            <a:off x="4617720" y="3575304"/>
-            <a:ext cx="2286000" cy="658368"/>
+            <a:off x="3145536" y="3410712"/>
+            <a:ext cx="1389888" cy="603504"/>
           </a:xfrm>
           <a:prstGeom prst="rect">
             <a:avLst/>
@@ -7987,7 +11303,7 @@
               <a:buNone/>
             </a:pPr>
             <a:r>
-              <a:rPr lang="en-US" sz="1300" dirty="0">
+              <a:rPr lang="en-US" sz="1150" dirty="0">
                 <a:solidFill>
                   <a:srgbClr val="16A34A"/>
                 </a:solidFill>
@@ -7997,7 +11313,7 @@
               </a:rPr>
               <a:t>+₹3.13 Cr</a:t>
             </a:r>
-            <a:endParaRPr lang="en-US" sz="1300" dirty="0"/>
+            <a:endParaRPr lang="en-US" sz="1150" dirty="0"/>
           </a:p>
         </p:txBody>
       </p:sp>
@@ -8009,8 +11325,8 @@
         </p:nvSpPr>
         <p:spPr>
           <a:xfrm>
-            <a:off x="7086600" y="3575304"/>
-            <a:ext cx="2286000" cy="658368"/>
+            <a:off x="4608576" y="3410712"/>
+            <a:ext cx="1389888" cy="603504"/>
           </a:xfrm>
           <a:prstGeom prst="rect">
             <a:avLst/>
@@ -8026,7 +11342,7 @@
               <a:buNone/>
             </a:pPr>
             <a:r>
-              <a:rPr lang="en-US" sz="1300" dirty="0">
+              <a:rPr lang="en-US" sz="1150" dirty="0">
                 <a:solidFill>
                   <a:srgbClr val="16A34A"/>
                 </a:solidFill>
@@ -8036,7 +11352,7 @@
               </a:rPr>
               <a:t>+₹2.41 Cr</a:t>
             </a:r>
-            <a:endParaRPr lang="en-US" sz="1300" dirty="0"/>
+            <a:endParaRPr lang="en-US" sz="1150" dirty="0"/>
           </a:p>
         </p:txBody>
       </p:sp>
@@ -8048,8 +11364,8 @@
         </p:nvSpPr>
         <p:spPr>
           <a:xfrm>
-            <a:off x="9555480" y="3575304"/>
-            <a:ext cx="2103120" cy="658368"/>
+            <a:off x="6071616" y="3410712"/>
+            <a:ext cx="1389888" cy="603504"/>
           </a:xfrm>
           <a:prstGeom prst="rect">
             <a:avLst/>
@@ -8065,7 +11381,7 @@
               <a:buNone/>
             </a:pPr>
             <a:r>
-              <a:rPr lang="en-US" sz="1300" dirty="0">
+              <a:rPr lang="en-US" sz="1150" dirty="0">
                 <a:solidFill>
                   <a:srgbClr val="E11D48"/>
                 </a:solidFill>
@@ -8075,7 +11391,7 @@
               </a:rPr>
               <a:t>−₹2.08 Cr</a:t>
             </a:r>
-            <a:endParaRPr lang="en-US" sz="1300" dirty="0"/>
+            <a:endParaRPr lang="en-US" sz="1150" dirty="0"/>
           </a:p>
         </p:txBody>
       </p:sp>
@@ -8087,8 +11403,8 @@
         </p:nvSpPr>
         <p:spPr>
           <a:xfrm>
-            <a:off x="457200" y="4233672"/>
-            <a:ext cx="11274552" cy="658368"/>
+            <a:off x="457200" y="4014216"/>
+            <a:ext cx="7040880" cy="603504"/>
           </a:xfrm>
           <a:prstGeom prst="rect">
             <a:avLst/>
@@ -8107,8 +11423,8 @@
         </p:nvSpPr>
         <p:spPr>
           <a:xfrm>
-            <a:off x="502920" y="4233672"/>
-            <a:ext cx="3931920" cy="658368"/>
+            <a:off x="493776" y="4014216"/>
+            <a:ext cx="2578608" cy="603504"/>
           </a:xfrm>
           <a:prstGeom prst="rect">
             <a:avLst/>
@@ -8124,7 +11440,7 @@
               <a:buNone/>
             </a:pPr>
             <a:r>
-              <a:rPr lang="en-US" sz="1300" b="1" dirty="0">
+              <a:rPr lang="en-US" sz="1150" b="1" dirty="0">
                 <a:solidFill>
                   <a:srgbClr val="0F172A"/>
                 </a:solidFill>
@@ -8134,7 +11450,7 @@
               </a:rPr>
               <a:t>Peak cash dip</a:t>
             </a:r>
-            <a:endParaRPr lang="en-US" sz="1300" dirty="0"/>
+            <a:endParaRPr lang="en-US" sz="1150" dirty="0"/>
           </a:p>
         </p:txBody>
       </p:sp>
@@ -8146,8 +11462,8 @@
         </p:nvSpPr>
         <p:spPr>
           <a:xfrm>
-            <a:off x="4617720" y="4233672"/>
-            <a:ext cx="2286000" cy="658368"/>
+            <a:off x="3145536" y="4014216"/>
+            <a:ext cx="1389888" cy="603504"/>
           </a:xfrm>
           <a:prstGeom prst="rect">
             <a:avLst/>
@@ -8163,7 +11479,7 @@
               <a:buNone/>
             </a:pPr>
             <a:r>
-              <a:rPr lang="en-US" sz="1300" dirty="0">
+              <a:rPr lang="en-US" sz="1150" dirty="0">
                 <a:solidFill>
                   <a:srgbClr val="E11D48"/>
                 </a:solidFill>
@@ -8173,7 +11489,7 @@
               </a:rPr>
               <a:t>−₹0.88 Cr</a:t>
             </a:r>
-            <a:endParaRPr lang="en-US" sz="1300" dirty="0"/>
+            <a:endParaRPr lang="en-US" sz="1150" dirty="0"/>
           </a:p>
         </p:txBody>
       </p:sp>
@@ -8185,8 +11501,8 @@
         </p:nvSpPr>
         <p:spPr>
           <a:xfrm>
-            <a:off x="7086600" y="4233672"/>
-            <a:ext cx="2286000" cy="658368"/>
+            <a:off x="4608576" y="4014216"/>
+            <a:ext cx="1389888" cy="603504"/>
           </a:xfrm>
           <a:prstGeom prst="rect">
             <a:avLst/>
@@ -8202,7 +11518,7 @@
               <a:buNone/>
             </a:pPr>
             <a:r>
-              <a:rPr lang="en-US" sz="1300" dirty="0">
+              <a:rPr lang="en-US" sz="1150" dirty="0">
                 <a:solidFill>
                   <a:srgbClr val="E11D48"/>
                 </a:solidFill>
@@ -8212,7 +11528,7 @@
               </a:rPr>
               <a:t>−₹1.60 Cr</a:t>
             </a:r>
-            <a:endParaRPr lang="en-US" sz="1300" dirty="0"/>
+            <a:endParaRPr lang="en-US" sz="1150" dirty="0"/>
           </a:p>
         </p:txBody>
       </p:sp>
@@ -8224,8 +11540,8 @@
         </p:nvSpPr>
         <p:spPr>
           <a:xfrm>
-            <a:off x="9555480" y="4233672"/>
-            <a:ext cx="2103120" cy="658368"/>
+            <a:off x="6071616" y="4014216"/>
+            <a:ext cx="1389888" cy="603504"/>
           </a:xfrm>
           <a:prstGeom prst="rect">
             <a:avLst/>
@@ -8241,7 +11557,7 @@
               <a:buNone/>
             </a:pPr>
             <a:r>
-              <a:rPr lang="en-US" sz="1300" dirty="0">
+              <a:rPr lang="en-US" sz="1150" dirty="0">
                 <a:solidFill>
                   <a:srgbClr val="E11D48"/>
                 </a:solidFill>
@@ -8251,7 +11567,7 @@
               </a:rPr>
               <a:t>−₹2.15 Cr</a:t>
             </a:r>
-            <a:endParaRPr lang="en-US" sz="1300" dirty="0"/>
+            <a:endParaRPr lang="en-US" sz="1150" dirty="0"/>
           </a:p>
         </p:txBody>
       </p:sp>
@@ -8263,8 +11579,8 @@
         </p:nvSpPr>
         <p:spPr>
           <a:xfrm>
-            <a:off x="502920" y="4892040"/>
-            <a:ext cx="3931920" cy="658368"/>
+            <a:off x="493776" y="4617720"/>
+            <a:ext cx="2578608" cy="603504"/>
           </a:xfrm>
           <a:prstGeom prst="rect">
             <a:avLst/>
@@ -8280,7 +11596,7 @@
               <a:buNone/>
             </a:pPr>
             <a:r>
-              <a:rPr lang="en-US" sz="1300" b="1" dirty="0">
+              <a:rPr lang="en-US" sz="1150" b="1" dirty="0">
                 <a:solidFill>
                   <a:srgbClr val="0F172A"/>
                 </a:solidFill>
@@ -8290,7 +11606,7 @@
               </a:rPr>
               <a:t>Posture</a:t>
             </a:r>
-            <a:endParaRPr lang="en-US" sz="1300" dirty="0"/>
+            <a:endParaRPr lang="en-US" sz="1150" dirty="0"/>
           </a:p>
         </p:txBody>
       </p:sp>
@@ -8302,8 +11618,8 @@
         </p:nvSpPr>
         <p:spPr>
           <a:xfrm>
-            <a:off x="4617720" y="4892040"/>
-            <a:ext cx="2286000" cy="658368"/>
+            <a:off x="3145536" y="4617720"/>
+            <a:ext cx="1389888" cy="603504"/>
           </a:xfrm>
           <a:prstGeom prst="rect">
             <a:avLst/>
@@ -8319,7 +11635,7 @@
               <a:buNone/>
             </a:pPr>
             <a:r>
-              <a:rPr lang="en-US" sz="1300" dirty="0">
+              <a:rPr lang="en-US" sz="1150" dirty="0">
                 <a:solidFill>
                   <a:srgbClr val="0F172A"/>
                 </a:solidFill>
@@ -8327,9 +11643,9 @@
                 <a:ea typeface="Calibri" pitchFamily="34" charset="-122"/>
                 <a:cs typeface="Calibri" pitchFamily="34" charset="-120"/>
               </a:rPr>
-              <a:t>Launch and blitz</a:t>
-            </a:r>
-            <a:endParaRPr lang="en-US" sz="1300" dirty="0"/>
+              <a:t>Launch + blitz</a:t>
+            </a:r>
+            <a:endParaRPr lang="en-US" sz="1150" dirty="0"/>
           </a:p>
         </p:txBody>
       </p:sp>
@@ -8341,8 +11657,8 @@
         </p:nvSpPr>
         <p:spPr>
           <a:xfrm>
-            <a:off x="7086600" y="4892040"/>
-            <a:ext cx="2286000" cy="658368"/>
+            <a:off x="4608576" y="4617720"/>
+            <a:ext cx="1389888" cy="603504"/>
           </a:xfrm>
           <a:prstGeom prst="rect">
             <a:avLst/>
@@ -8358,7 +11674,7 @@
               <a:buNone/>
             </a:pPr>
             <a:r>
-              <a:rPr lang="en-US" sz="1300" dirty="0">
+              <a:rPr lang="en-US" sz="1150" dirty="0">
                 <a:solidFill>
                   <a:srgbClr val="0F172A"/>
                 </a:solidFill>
@@ -8366,9 +11682,9 @@
                 <a:ea typeface="Calibri" pitchFamily="34" charset="-122"/>
                 <a:cs typeface="Calibri" pitchFamily="34" charset="-120"/>
               </a:rPr>
-              <a:t>Same play, later</a:t>
-            </a:r>
-            <a:endParaRPr lang="en-US" sz="1300" dirty="0"/>
+              <a:t>Same, later</a:t>
+            </a:r>
+            <a:endParaRPr lang="en-US" sz="1150" dirty="0"/>
           </a:p>
         </p:txBody>
       </p:sp>
@@ -8380,8 +11696,8 @@
         </p:nvSpPr>
         <p:spPr>
           <a:xfrm>
-            <a:off x="9555480" y="4892040"/>
-            <a:ext cx="2103120" cy="658368"/>
+            <a:off x="6071616" y="4617720"/>
+            <a:ext cx="1389888" cy="603504"/>
           </a:xfrm>
           <a:prstGeom prst="rect">
             <a:avLst/>
@@ -8397,7 +11713,7 @@
               <a:buNone/>
             </a:pPr>
             <a:r>
-              <a:rPr lang="en-US" sz="1300" dirty="0">
+              <a:rPr lang="en-US" sz="1150" dirty="0">
                 <a:solidFill>
                   <a:srgbClr val="0F172A"/>
                 </a:solidFill>
@@ -8405,9 +11721,9 @@
                 <a:ea typeface="Calibri" pitchFamily="34" charset="-122"/>
                 <a:cs typeface="Calibri" pitchFamily="34" charset="-120"/>
               </a:rPr>
-              <a:t>IPO and operations</a:t>
-            </a:r>
-            <a:endParaRPr lang="en-US" sz="1300" dirty="0"/>
+              <a:t>IPO + ops</a:t>
+            </a:r>
+            <a:endParaRPr lang="en-US" sz="1150" dirty="0"/>
           </a:p>
         </p:txBody>
       </p:sp>
@@ -8419,8 +11735,8 @@
         </p:nvSpPr>
         <p:spPr>
           <a:xfrm>
-            <a:off x="457200" y="5806440"/>
-            <a:ext cx="11274552" cy="548640"/>
+            <a:off x="457200" y="5349240"/>
+            <a:ext cx="7040880" cy="822960"/>
           </a:xfrm>
           <a:prstGeom prst="rect">
             <a:avLst/>
@@ -8436,7 +11752,7 @@
               <a:buNone/>
             </a:pPr>
             <a:r>
-              <a:rPr lang="en-US" sz="1200" i="1" dirty="0">
+              <a:rPr lang="en-US" sz="1100" i="1" dirty="0">
                 <a:solidFill>
                   <a:srgbClr val="64748B"/>
                 </a:solidFill>
@@ -8444,9 +11760,9 @@
                 <a:ea typeface="Calibri" pitchFamily="34" charset="-122"/>
                 <a:cs typeface="Calibri" pitchFamily="34" charset="-120"/>
               </a:rPr>
-              <a:t>Break even is the first month income covers the full expense line. The launch month runs zero BLR on purpose, so the team clears its existing IPO book first, then BLR ramps to 16 cases the very next month.</a:t>
-            </a:r>
-            <a:endParaRPr lang="en-US" sz="1200" dirty="0"/>
+              <a:t>Break even is the first month income covers the full expense line. The launch month runs zero BLR on purpose, so the team clears its existing IPO book first, then BLR ramps to 16 cases the next month.</a:t>
+            </a:r>
+            <a:endParaRPr lang="en-US" sz="1100" dirty="0"/>
           </a:p>
         </p:txBody>
       </p:sp>
@@ -8458,8 +11774,8 @@
         </p:nvSpPr>
         <p:spPr>
           <a:xfrm>
-            <a:off x="457200" y="6455664"/>
-            <a:ext cx="11274552" cy="274320"/>
+            <a:off x="7772400" y="1463040"/>
+            <a:ext cx="4023360" cy="320040"/>
           </a:xfrm>
           <a:prstGeom prst="rect">
             <a:avLst/>
@@ -8471,7 +11787,101 @@
           <a:bodyPr wrap="square" rtlCol="0" anchor="ctr"/>
           <a:lstStyle/>
           <a:p>
-            <a:pPr algn="l" indent="0" marL="0">
+            <a:pPr indent="0" marL="0">
+              <a:buNone/>
+            </a:pPr>
+            <a:r>
+              <a:rPr lang="en-US" sz="1400" b="1" dirty="0">
+                <a:solidFill>
+                  <a:srgbClr val="0F172A"/>
+                </a:solidFill>
+                <a:latin typeface="Calibri" pitchFamily="34" charset="0"/>
+                <a:ea typeface="Calibri" pitchFamily="34" charset="-122"/>
+                <a:cs typeface="Calibri" pitchFamily="34" charset="-120"/>
+              </a:rPr>
+              <a:t>Revenue mix at the Apr 2027 run-rate</a:t>
+            </a:r>
+            <a:endParaRPr lang="en-US" sz="1400" dirty="0"/>
+          </a:p>
+        </p:txBody>
+      </p:sp>
+      <p:graphicFrame>
+        <p:nvGraphicFramePr>
+          <p:cNvPr id="34" name="Chart 0" descr=""/>
+          <p:cNvGraphicFramePr/>
+          <p:nvPr/>
+        </p:nvGraphicFramePr>
+        <p:xfrm>
+          <a:off x="7635240" y="1828800"/>
+          <a:ext cx="4114800" cy="3291840"/>
+        </p:xfrm>
+        <a:graphic xmlns:a="http://schemas.openxmlformats.org/drawingml/2006/main">
+          <a:graphicData uri="http://schemas.openxmlformats.org/drawingml/2006/chart">
+            <c:chart xmlns:c="http://schemas.openxmlformats.org/drawingml/2006/chart" r:id="rId1"/>
+          </a:graphicData>
+        </a:graphic>
+      </p:graphicFrame>
+      <p:sp>
+        <p:nvSpPr>
+          <p:cNvPr id="35" name="Text 32"/>
+          <p:cNvSpPr/>
+          <p:nvPr/>
+        </p:nvSpPr>
+        <p:spPr>
+          <a:xfrm>
+            <a:off x="7772400" y="5120640"/>
+            <a:ext cx="4023360" cy="457200"/>
+          </a:xfrm>
+          <a:prstGeom prst="rect">
+            <a:avLst/>
+          </a:prstGeom>
+          <a:noFill/>
+          <a:ln/>
+        </p:spPr>
+        <p:txBody>
+          <a:bodyPr wrap="square" rtlCol="0" anchor="ctr"/>
+          <a:lstStyle/>
+          <a:p>
+            <a:pPr indent="0" marL="0">
+              <a:buNone/>
+            </a:pPr>
+            <a:r>
+              <a:rPr lang="en-US" sz="1050" i="1" dirty="0">
+                <a:solidFill>
+                  <a:srgbClr val="64748B"/>
+                </a:solidFill>
+                <a:latin typeface="Calibri" pitchFamily="34" charset="0"/>
+                <a:ea typeface="Calibri" pitchFamily="34" charset="-122"/>
+                <a:cs typeface="Calibri" pitchFamily="34" charset="-120"/>
+              </a:rPr>
+              <a:t>Scenario 1, annualising the April exit month. About ₹9.2 Cr a year, BLR led.</a:t>
+            </a:r>
+            <a:endParaRPr lang="en-US" sz="1050" dirty="0"/>
+          </a:p>
+        </p:txBody>
+      </p:sp>
+      <p:sp>
+        <p:nvSpPr>
+          <p:cNvPr id="36" name="Text 33"/>
+          <p:cNvSpPr/>
+          <p:nvPr/>
+        </p:nvSpPr>
+        <p:spPr>
+          <a:xfrm>
+            <a:off x="457200" y="6473952"/>
+            <a:ext cx="7315200" cy="274320"/>
+          </a:xfrm>
+          <a:prstGeom prst="rect">
+            <a:avLst/>
+          </a:prstGeom>
+          <a:noFill/>
+          <a:ln/>
+        </p:spPr>
+        <p:txBody>
+          <a:bodyPr wrap="square" rtlCol="0" anchor="ctr"/>
+          <a:lstStyle/>
+          <a:p>
+            <a:pPr indent="0" marL="0">
               <a:buNone/>
             </a:pPr>
             <a:r>
@@ -8491,13 +11901,13 @@
       </p:sp>
       <p:sp>
         <p:nvSpPr>
-          <p:cNvPr id="34" name="Text 32"/>
-          <p:cNvSpPr/>
-          <p:nvPr/>
-        </p:nvSpPr>
-        <p:spPr>
-          <a:xfrm>
-            <a:off x="5943600" y="6455664"/>
+          <p:cNvPr id="37" name="Text 34"/>
+          <p:cNvSpPr/>
+          <p:nvPr/>
+        </p:nvSpPr>
+        <p:spPr>
+          <a:xfrm>
+            <a:off x="5943600" y="6473952"/>
             <a:ext cx="5788152" cy="274320"/>
           </a:xfrm>
           <a:prstGeom prst="rect">
@@ -8624,7 +12034,7 @@
               <a:buNone/>
             </a:pPr>
             <a:r>
-              <a:rPr lang="en-US" sz="3200" b="1" dirty="0">
+              <a:rPr lang="en-US" sz="3100" b="1" dirty="0">
                 <a:solidFill>
                   <a:srgbClr val="0F172A"/>
                 </a:solidFill>
@@ -8634,7 +12044,7 @@
               </a:rPr>
               <a:t>Good to have, kept out of the base plan</a:t>
             </a:r>
-            <a:endParaRPr lang="en-US" sz="3200" dirty="0"/>
+            <a:endParaRPr lang="en-US" sz="3100" dirty="0"/>
           </a:p>
         </p:txBody>
       </p:sp>
@@ -8686,11 +12096,11 @@
         <p:spPr>
           <a:xfrm>
             <a:off x="457200" y="2286000"/>
-            <a:ext cx="3566160" cy="3017520"/>
+            <a:ext cx="3566160" cy="3063240"/>
           </a:xfrm>
           <a:prstGeom prst="roundRect">
             <a:avLst>
-              <a:gd name="adj" fmla="val 3636"/>
+              <a:gd name="adj" fmla="val 3582"/>
             </a:avLst>
           </a:prstGeom>
           <a:solidFill>
@@ -8808,7 +12218,7 @@
         <p:spPr>
           <a:xfrm>
             <a:off x="777240" y="4114800"/>
-            <a:ext cx="2971800" cy="1097280"/>
+            <a:ext cx="2971800" cy="1143000"/>
           </a:xfrm>
           <a:prstGeom prst="rect">
             <a:avLst/>
@@ -8850,11 +12260,11 @@
         <p:spPr>
           <a:xfrm>
             <a:off x="4261104" y="2286000"/>
-            <a:ext cx="3566160" cy="3017520"/>
+            <a:ext cx="3566160" cy="3063240"/>
           </a:xfrm>
           <a:prstGeom prst="roundRect">
             <a:avLst>
-              <a:gd name="adj" fmla="val 3636"/>
+              <a:gd name="adj" fmla="val 3582"/>
             </a:avLst>
           </a:prstGeom>
           <a:solidFill>
@@ -8972,7 +12382,7 @@
         <p:spPr>
           <a:xfrm>
             <a:off x="4581144" y="4114800"/>
-            <a:ext cx="2971800" cy="1097280"/>
+            <a:ext cx="2971800" cy="1143000"/>
           </a:xfrm>
           <a:prstGeom prst="rect">
             <a:avLst/>
@@ -9014,11 +12424,11 @@
         <p:spPr>
           <a:xfrm>
             <a:off x="8065008" y="2286000"/>
-            <a:ext cx="3566160" cy="3017520"/>
+            <a:ext cx="3566160" cy="3063240"/>
           </a:xfrm>
           <a:prstGeom prst="roundRect">
             <a:avLst>
-              <a:gd name="adj" fmla="val 3636"/>
+              <a:gd name="adj" fmla="val 3582"/>
             </a:avLst>
           </a:prstGeom>
           <a:solidFill>
@@ -9136,7 +12546,7 @@
         <p:spPr>
           <a:xfrm>
             <a:off x="8385048" y="4114800"/>
-            <a:ext cx="2971800" cy="1097280"/>
+            <a:ext cx="2971800" cy="1143000"/>
           </a:xfrm>
           <a:prstGeom prst="rect">
             <a:avLst/>
@@ -9177,8 +12587,8 @@
         </p:nvSpPr>
         <p:spPr>
           <a:xfrm>
-            <a:off x="457200" y="6455664"/>
-            <a:ext cx="11274552" cy="274320"/>
+            <a:off x="457200" y="6473952"/>
+            <a:ext cx="7315200" cy="274320"/>
           </a:xfrm>
           <a:prstGeom prst="rect">
             <a:avLst/>
@@ -9190,7 +12600,7 @@
           <a:bodyPr wrap="square" rtlCol="0" anchor="ctr"/>
           <a:lstStyle/>
           <a:p>
-            <a:pPr algn="l" indent="0" marL="0">
+            <a:pPr indent="0" marL="0">
               <a:buNone/>
             </a:pPr>
             <a:r>
@@ -9216,7 +12626,7 @@
         </p:nvSpPr>
         <p:spPr>
           <a:xfrm>
-            <a:off x="5943600" y="6455664"/>
+            <a:off x="5943600" y="6473952"/>
             <a:ext cx="5788152" cy="274320"/>
           </a:xfrm>
           <a:prstGeom prst="rect">
@@ -9281,27 +12691,7 @@
       </p:grpSpPr>
       <p:sp>
         <p:nvSpPr>
-          <p:cNvPr id="2" name="Shape 0"/>
-          <p:cNvSpPr/>
-          <p:nvPr/>
-        </p:nvSpPr>
-        <p:spPr>
-          <a:xfrm>
-            <a:off x="0" y="0"/>
-            <a:ext cx="12188952" cy="6858000"/>
-          </a:xfrm>
-          <a:prstGeom prst="rect">
-            <a:avLst/>
-          </a:prstGeom>
-          <a:solidFill>
-            <a:srgbClr val="0F172A"/>
-          </a:solidFill>
-          <a:ln/>
-        </p:spPr>
-      </p:sp>
-      <p:sp>
-        <p:nvSpPr>
-          <p:cNvPr id="3" name="Text 1"/>
+          <p:cNvPr id="2" name="Text 0"/>
           <p:cNvSpPr/>
           <p:nvPr/>
         </p:nvSpPr>
@@ -9340,7 +12730,7 @@
       </p:sp>
       <p:sp>
         <p:nvSpPr>
-          <p:cNvPr id="4" name="Text 2"/>
+          <p:cNvPr id="3" name="Text 1"/>
           <p:cNvSpPr/>
           <p:nvPr/>
         </p:nvSpPr>
@@ -9379,7 +12769,7 @@
       </p:sp>
       <p:sp>
         <p:nvSpPr>
-          <p:cNvPr id="5" name="Shape 3"/>
+          <p:cNvPr id="4" name="Shape 2"/>
           <p:cNvSpPr/>
           <p:nvPr/>
         </p:nvSpPr>
@@ -9401,7 +12791,7 @@
       </p:sp>
       <p:sp>
         <p:nvSpPr>
-          <p:cNvPr id="6" name="Text 4"/>
+          <p:cNvPr id="5" name="Text 3"/>
           <p:cNvSpPr/>
           <p:nvPr/>
         </p:nvSpPr>
@@ -9440,7 +12830,7 @@
       </p:sp>
       <p:sp>
         <p:nvSpPr>
-          <p:cNvPr id="7" name="Text 5"/>
+          <p:cNvPr id="6" name="Text 4"/>
           <p:cNvSpPr/>
           <p:nvPr/>
         </p:nvSpPr>
@@ -9479,7 +12869,7 @@
       </p:sp>
       <p:sp>
         <p:nvSpPr>
-          <p:cNvPr id="8" name="Text 6"/>
+          <p:cNvPr id="7" name="Text 5"/>
           <p:cNvSpPr/>
           <p:nvPr/>
         </p:nvSpPr>
@@ -9521,7 +12911,7 @@
       </p:sp>
       <p:sp>
         <p:nvSpPr>
-          <p:cNvPr id="9" name="Shape 7"/>
+          <p:cNvPr id="8" name="Shape 6"/>
           <p:cNvSpPr/>
           <p:nvPr/>
         </p:nvSpPr>
@@ -9543,7 +12933,7 @@
       </p:sp>
       <p:sp>
         <p:nvSpPr>
-          <p:cNvPr id="10" name="Text 8"/>
+          <p:cNvPr id="9" name="Text 7"/>
           <p:cNvSpPr/>
           <p:nvPr/>
         </p:nvSpPr>
@@ -9582,7 +12972,7 @@
       </p:sp>
       <p:sp>
         <p:nvSpPr>
-          <p:cNvPr id="11" name="Text 9"/>
+          <p:cNvPr id="10" name="Text 8"/>
           <p:cNvSpPr/>
           <p:nvPr/>
         </p:nvSpPr>
@@ -9621,7 +13011,7 @@
       </p:sp>
       <p:sp>
         <p:nvSpPr>
-          <p:cNvPr id="12" name="Text 10"/>
+          <p:cNvPr id="11" name="Text 9"/>
           <p:cNvSpPr/>
           <p:nvPr/>
         </p:nvSpPr>
@@ -9663,7 +13053,7 @@
       </p:sp>
       <p:sp>
         <p:nvSpPr>
-          <p:cNvPr id="13" name="Shape 11"/>
+          <p:cNvPr id="12" name="Shape 10"/>
           <p:cNvSpPr/>
           <p:nvPr/>
         </p:nvSpPr>
@@ -9685,7 +13075,7 @@
       </p:sp>
       <p:sp>
         <p:nvSpPr>
-          <p:cNvPr id="14" name="Text 12"/>
+          <p:cNvPr id="13" name="Text 11"/>
           <p:cNvSpPr/>
           <p:nvPr/>
         </p:nvSpPr>
@@ -9724,7 +13114,7 @@
       </p:sp>
       <p:sp>
         <p:nvSpPr>
-          <p:cNvPr id="15" name="Text 13"/>
+          <p:cNvPr id="14" name="Text 12"/>
           <p:cNvSpPr/>
           <p:nvPr/>
         </p:nvSpPr>
@@ -9763,7 +13153,7 @@
       </p:sp>
       <p:sp>
         <p:nvSpPr>
-          <p:cNvPr id="16" name="Text 14"/>
+          <p:cNvPr id="15" name="Text 13"/>
           <p:cNvSpPr/>
           <p:nvPr/>
         </p:nvSpPr>
@@ -9805,7 +13195,7 @@
       </p:sp>
       <p:sp>
         <p:nvSpPr>
-          <p:cNvPr id="17" name="Text 15"/>
+          <p:cNvPr id="16" name="Text 14"/>
           <p:cNvSpPr/>
           <p:nvPr/>
         </p:nvSpPr>

--- a/ACER_FY27_AOP.pptx
+++ b/ACER_FY27_AOP.pptx
@@ -1292,22 +1292,22 @@
                   <c:v>12.1</c:v>
                 </c:pt>
                 <c:pt idx="3">
-                  <c:v>12.1</c:v>
+                  <c:v>4.1</c:v>
                 </c:pt>
                 <c:pt idx="4">
-                  <c:v>12.1</c:v>
+                  <c:v>4.1</c:v>
                 </c:pt>
                 <c:pt idx="5">
-                  <c:v>12.1</c:v>
+                  <c:v>4.1</c:v>
                 </c:pt>
                 <c:pt idx="6">
-                  <c:v>12.1</c:v>
+                  <c:v>4.1</c:v>
                 </c:pt>
                 <c:pt idx="7">
-                  <c:v>12.1</c:v>
+                  <c:v>4.1</c:v>
                 </c:pt>
                 <c:pt idx="8">
-                  <c:v>12.1</c:v>
+                  <c:v>4.1</c:v>
                 </c:pt>
               </c:numCache>
             </c:numRef>
@@ -1411,22 +1411,22 @@
                   <c:v>0</c:v>
                 </c:pt>
                 <c:pt idx="3">
-                  <c:v>42</c:v>
+                  <c:v>40</c:v>
                 </c:pt>
                 <c:pt idx="4">
-                  <c:v>44</c:v>
+                  <c:v>40</c:v>
                 </c:pt>
                 <c:pt idx="5">
-                  <c:v>46</c:v>
+                  <c:v>40</c:v>
                 </c:pt>
                 <c:pt idx="6">
-                  <c:v>48</c:v>
+                  <c:v>40</c:v>
                 </c:pt>
                 <c:pt idx="7">
-                  <c:v>50</c:v>
+                  <c:v>40</c:v>
                 </c:pt>
                 <c:pt idx="8">
-                  <c:v>52</c:v>
+                  <c:v>40</c:v>
                 </c:pt>
               </c:numCache>
             </c:numRef>
@@ -1682,7 +1682,7 @@
         <c:axId val="2094734552"/>
         <c:scaling>
           <c:orientation val="minMax"/>
-          <c:max val="90"/>
+          <c:max val="70"/>
           <c:min val="0"/>
         </c:scaling>
         <c:delete val="0"/>
@@ -1758,7 +1758,7 @@
         <c:crossAx val="2094734554"/>
         <c:crosses val="autoZero"/>
         <c:crossBetween val="between"/>
-        <c:majorUnit val="20"/>
+        <c:majorUnit val="10"/>
       </c:valAx>
       <c:spPr>
         <a:noFill/>
@@ -2040,13 +2040,13 @@
                   <c:v>12.1</c:v>
                 </c:pt>
                 <c:pt idx="6">
-                  <c:v>12.1</c:v>
+                  <c:v>4.1</c:v>
                 </c:pt>
                 <c:pt idx="7">
-                  <c:v>12.1</c:v>
+                  <c:v>4.1</c:v>
                 </c:pt>
                 <c:pt idx="8">
-                  <c:v>12.1</c:v>
+                  <c:v>4.1</c:v>
                 </c:pt>
               </c:numCache>
             </c:numRef>
@@ -2159,13 +2159,13 @@
                   <c:v>0</c:v>
                 </c:pt>
                 <c:pt idx="6">
-                  <c:v>42</c:v>
+                  <c:v>40</c:v>
                 </c:pt>
                 <c:pt idx="7">
-                  <c:v>44</c:v>
+                  <c:v>40</c:v>
                 </c:pt>
                 <c:pt idx="8">
-                  <c:v>46</c:v>
+                  <c:v>40</c:v>
                 </c:pt>
               </c:numCache>
             </c:numRef>
@@ -2421,7 +2421,7 @@
         <c:axId val="2094734552"/>
         <c:scaling>
           <c:orientation val="minMax"/>
-          <c:max val="90"/>
+          <c:max val="70"/>
           <c:min val="0"/>
         </c:scaling>
         <c:delete val="0"/>
@@ -2497,7 +2497,7 @@
         <c:crossAx val="2094734554"/>
         <c:crosses val="autoZero"/>
         <c:crossBetween val="between"/>
-        <c:majorUnit val="20"/>
+        <c:majorUnit val="10"/>
       </c:valAx>
       <c:spPr>
         <a:noFill/>
@@ -3055,10 +3055,10 @@
                 <c:formatCode>General</c:formatCode>
                 <c:ptCount val="9"/>
                 <c:pt idx="0">
-                  <c:v>52.2</c:v>
+                  <c:v>55.2</c:v>
                 </c:pt>
                 <c:pt idx="1">
-                  <c:v>57.2</c:v>
+                  <c:v>46.7</c:v>
                 </c:pt>
                 <c:pt idx="2">
                   <c:v>46.7</c:v>
@@ -3160,7 +3160,7 @@
         <c:axId val="2094734552"/>
         <c:scaling>
           <c:orientation val="minMax"/>
-          <c:max val="90"/>
+          <c:max val="70"/>
           <c:min val="0"/>
         </c:scaling>
         <c:delete val="0"/>
@@ -3236,7 +3236,7 @@
         <c:crossAx val="2094734554"/>
         <c:crosses val="autoZero"/>
         <c:crossBetween val="between"/>
-        <c:majorUnit val="20"/>
+        <c:majorUnit val="10"/>
       </c:valAx>
       <c:spPr>
         <a:noFill/>
@@ -3452,10 +3452,10 @@
               <c:strCache>
                 <c:ptCount val="3"/>
                 <c:pt idx="0">
-                  <c:v>BLR</c:v>
+                  <c:v>BLR up-front</c:v>
                 </c:pt>
                 <c:pt idx="1">
-                  <c:v>IPO &amp; ratings</c:v>
+                  <c:v>Other rating</c:v>
                 </c:pt>
                 <c:pt idx="2">
                   <c:v>FD interest</c:v>
@@ -3469,10 +3469,10 @@
               <c:numCache>
                 <c:ptCount val="3"/>
                 <c:pt idx="0">
-                  <c:v>624</c:v>
+                  <c:v>480</c:v>
                 </c:pt>
                 <c:pt idx="1">
-                  <c:v>145</c:v>
+                  <c:v>49</c:v>
                 </c:pt>
                 <c:pt idx="2">
                   <c:v>150</c:v>
@@ -6909,7 +6909,7 @@
                 <a:ea typeface="Calibri" pitchFamily="34" charset="-122"/>
                 <a:cs typeface="Calibri" pitchFamily="34" charset="-120"/>
               </a:rPr>
-              <a:t>BLR fee up front on rated debt</a:t>
+              <a:t>BLR up-front fee, booked in year</a:t>
             </a:r>
             <a:endParaRPr lang="en-US" sz="1100" dirty="0"/>
           </a:p>
@@ -6987,7 +6987,7 @@
                 <a:ea typeface="Calibri" pitchFamily="34" charset="-122"/>
                 <a:cs typeface="Calibri" pitchFamily="34" charset="-120"/>
               </a:rPr>
-              <a:t>BLR surveillance a year, recurring</a:t>
+              <a:t>BLR surveillance, bills from FY28</a:t>
             </a:r>
             <a:endParaRPr lang="en-US" sz="1100" dirty="0"/>
           </a:p>
@@ -7328,7 +7328,7 @@
         </p:nvGraphicFramePr>
         <p:xfrm>
           <a:off x="365760" y="1371600"/>
-          <a:ext cx="7040880" cy="4663440"/>
+          <a:ext cx="7040880" cy="4114800"/>
         </p:xfrm>
         <a:graphic xmlns:a="http://schemas.openxmlformats.org/drawingml/2006/main">
           <a:graphicData uri="http://schemas.openxmlformats.org/drawingml/2006/chart">
@@ -7344,8 +7344,8 @@
         </p:nvSpPr>
         <p:spPr>
           <a:xfrm>
-            <a:off x="457200" y="6053328"/>
-            <a:ext cx="6858000" cy="365760"/>
+            <a:off x="457200" y="5577840"/>
+            <a:ext cx="6858000" cy="822960"/>
           </a:xfrm>
           <a:prstGeom prst="rect">
             <a:avLst/>
@@ -7369,7 +7369,7 @@
                 <a:ea typeface="Calibri" pitchFamily="34" charset="-122"/>
                 <a:cs typeface="Calibri" pitchFamily="34" charset="-120"/>
               </a:rPr>
-              <a:t>Branding: ₹5 to 10 L buffer at launch, then ₹2 L a month while BLR runs.</a:t>
+              <a:t>Branding: ₹5 to 10 L buffer at launch, then ₹2 L a month while BLR runs. FY27 is up-front BLR fees only; surveillance is next year.</a:t>
             </a:r>
             <a:endParaRPr lang="en-US" sz="1100" dirty="0"/>
           </a:p>
@@ -7524,13 +7524,13 @@
             <a:r>
               <a:rPr lang="en-US" sz="2100" b="1" dirty="0">
                 <a:solidFill>
-                  <a:srgbClr val="16A34A"/>
-                </a:solidFill>
-                <a:latin typeface="Calibri" pitchFamily="34" charset="0"/>
-                <a:ea typeface="Calibri" pitchFamily="34" charset="-122"/>
-                <a:cs typeface="Calibri" pitchFamily="34" charset="-120"/>
-              </a:rPr>
-              <a:t>+₹0.27 Cr</a:t>
+                  <a:srgbClr val="E11D48"/>
+                </a:solidFill>
+                <a:latin typeface="Calibri" pitchFamily="34" charset="0"/>
+                <a:ea typeface="Calibri" pitchFamily="34" charset="-122"/>
+                <a:cs typeface="Calibri" pitchFamily="34" charset="-120"/>
+              </a:rPr>
+              <a:t>−₹0.63 Cr</a:t>
             </a:r>
             <a:endParaRPr lang="en-US" sz="2100" dirty="0"/>
           </a:p>
@@ -7630,7 +7630,7 @@
                 <a:ea typeface="Calibri" pitchFamily="34" charset="-122"/>
                 <a:cs typeface="Calibri" pitchFamily="34" charset="-120"/>
               </a:rPr>
-              <a:t>+₹3.13 Cr</a:t>
+              <a:t>+₹0.73 Cr</a:t>
             </a:r>
             <a:endParaRPr lang="en-US" sz="2100" dirty="0"/>
           </a:p>
@@ -7669,7 +7669,7 @@
                 <a:ea typeface="Calibri" pitchFamily="34" charset="-122"/>
                 <a:cs typeface="Calibri" pitchFamily="34" charset="-120"/>
               </a:rPr>
-              <a:t>Apr27 run-rate</a:t>
+              <a:t>Mar27 run-rate</a:t>
             </a:r>
             <a:endParaRPr lang="en-US" sz="1050" dirty="0"/>
           </a:p>
@@ -8014,7 +8014,7 @@
                 <a:ea typeface="Calibri" pitchFamily="34" charset="-122"/>
                 <a:cs typeface="Calibri" pitchFamily="34" charset="-120"/>
               </a:rPr>
-              <a:t>IPO delivery caught up. BLR steps up to 16 cases a month, full capacity.</a:t>
+              <a:t>IPO delivery caught up. IPO income pauses, BLR steps up to 16 cases a month.</a:t>
             </a:r>
             <a:endParaRPr lang="en-US" sz="950" dirty="0"/>
           </a:p>
@@ -8117,7 +8117,7 @@
                 <a:ea typeface="Calibri" pitchFamily="34" charset="-122"/>
                 <a:cs typeface="Calibri" pitchFamily="34" charset="-120"/>
               </a:rPr>
-              <a:t>Both engines steady. IPO annuity plus BLR up front and surveillance compound.</a:t>
+              <a:t>BLR up-front fees keep coming. The 1.5 bps surveillance annuity starts next year and compounds from FY28.</a:t>
             </a:r>
             <a:endParaRPr lang="en-US" sz="950" dirty="0"/>
           </a:p>
@@ -8483,7 +8483,7 @@
         </p:nvGraphicFramePr>
         <p:xfrm>
           <a:off x="365760" y="1371600"/>
-          <a:ext cx="7040880" cy="4663440"/>
+          <a:ext cx="7040880" cy="4114800"/>
         </p:xfrm>
         <a:graphic xmlns:a="http://schemas.openxmlformats.org/drawingml/2006/main">
           <a:graphicData uri="http://schemas.openxmlformats.org/drawingml/2006/chart">
@@ -8499,8 +8499,8 @@
         </p:nvSpPr>
         <p:spPr>
           <a:xfrm>
-            <a:off x="457200" y="6053328"/>
-            <a:ext cx="6858000" cy="365760"/>
+            <a:off x="457200" y="5577840"/>
+            <a:ext cx="6858000" cy="822960"/>
           </a:xfrm>
           <a:prstGeom prst="rect">
             <a:avLst/>
@@ -8524,7 +8524,7 @@
                 <a:ea typeface="Calibri" pitchFamily="34" charset="-122"/>
                 <a:cs typeface="Calibri" pitchFamily="34" charset="-120"/>
               </a:rPr>
-              <a:t>Branding: ₹5 to 10 L buffer at the January launch, then ₹2 L a month with BLR.</a:t>
+              <a:t>Branding: ₹5 to 10 L buffer at the January launch, then ₹2 L a month with BLR. FY27 is up-front BLR fees only.</a:t>
             </a:r>
             <a:endParaRPr lang="en-US" sz="1100" dirty="0"/>
           </a:p>
@@ -8685,7 +8685,7 @@
                 <a:ea typeface="Calibri" pitchFamily="34" charset="-122"/>
                 <a:cs typeface="Calibri" pitchFamily="34" charset="-120"/>
               </a:rPr>
-              <a:t>−₹1.11 Cr</a:t>
+              <a:t>−₹1.47 Cr</a:t>
             </a:r>
             <a:endParaRPr lang="en-US" sz="2100" dirty="0"/>
           </a:p>
@@ -8785,7 +8785,7 @@
                 <a:ea typeface="Calibri" pitchFamily="34" charset="-122"/>
                 <a:cs typeface="Calibri" pitchFamily="34" charset="-120"/>
               </a:rPr>
-              <a:t>+₹2.41 Cr</a:t>
+              <a:t>+₹0.73 Cr</a:t>
             </a:r>
             <a:endParaRPr lang="en-US" sz="2100" dirty="0"/>
           </a:p>
@@ -8824,7 +8824,7 @@
                 <a:ea typeface="Calibri" pitchFamily="34" charset="-122"/>
                 <a:cs typeface="Calibri" pitchFamily="34" charset="-120"/>
               </a:rPr>
-              <a:t>Apr27 run-rate</a:t>
+              <a:t>Mar27 run-rate</a:t>
             </a:r>
             <a:endParaRPr lang="en-US" sz="1050" dirty="0"/>
           </a:p>
@@ -9272,7 +9272,7 @@
                 <a:ea typeface="Calibri" pitchFamily="34" charset="-122"/>
                 <a:cs typeface="Calibri" pitchFamily="34" charset="-120"/>
               </a:rPr>
-              <a:t>IPO steady, capacity frees up, BLR ramps to 16 a month. Exit run-rate into next year is strong.</a:t>
+              <a:t>IPO income pauses for BLR. BLR ramps to 16 a month. FY27 up-front fees only, surveillance from FY28.</a:t>
             </a:r>
             <a:endParaRPr lang="en-US" sz="950" dirty="0"/>
           </a:p>
@@ -9638,7 +9638,7 @@
         </p:nvGraphicFramePr>
         <p:xfrm>
           <a:off x="365760" y="1371600"/>
-          <a:ext cx="7040880" cy="4663440"/>
+          <a:ext cx="7040880" cy="4114800"/>
         </p:xfrm>
         <a:graphic xmlns:a="http://schemas.openxmlformats.org/drawingml/2006/main">
           <a:graphicData uri="http://schemas.openxmlformats.org/drawingml/2006/chart">
@@ -9654,8 +9654,8 @@
         </p:nvSpPr>
         <p:spPr>
           <a:xfrm>
-            <a:off x="457200" y="6053328"/>
-            <a:ext cx="6858000" cy="365760"/>
+            <a:off x="457200" y="5577840"/>
+            <a:ext cx="6858000" cy="822960"/>
           </a:xfrm>
           <a:prstGeom prst="rect">
             <a:avLst/>
@@ -9840,7 +9840,7 @@
                 <a:ea typeface="Calibri" pitchFamily="34" charset="-122"/>
                 <a:cs typeface="Calibri" pitchFamily="34" charset="-120"/>
               </a:rPr>
-              <a:t>−₹2.15 Cr</a:t>
+              <a:t>−₹2.08 Cr</a:t>
             </a:r>
             <a:endParaRPr lang="en-US" sz="2100" dirty="0"/>
           </a:p>
@@ -9979,7 +9979,7 @@
                 <a:ea typeface="Calibri" pitchFamily="34" charset="-122"/>
                 <a:cs typeface="Calibri" pitchFamily="34" charset="-120"/>
               </a:rPr>
-              <a:t>Apr27 run-rate</a:t>
+              <a:t>Mar27 run-rate</a:t>
             </a:r>
             <a:endParaRPr lang="en-US" sz="1050" dirty="0"/>
           </a:p>
@@ -10040,7 +10040,7 @@
                 <a:ea typeface="Calibri" pitchFamily="34" charset="-122"/>
                 <a:cs typeface="Calibri" pitchFamily="34" charset="-120"/>
               </a:rPr>
-              <a:t>−₹2.15 Cr</a:t>
+              <a:t>−₹2.08 Cr</a:t>
             </a:r>
             <a:endParaRPr lang="en-US" sz="2100" dirty="0"/>
           </a:p>
@@ -11149,13 +11149,13 @@
             <a:r>
               <a:rPr lang="en-US" sz="1150" dirty="0">
                 <a:solidFill>
-                  <a:srgbClr val="16A34A"/>
-                </a:solidFill>
-                <a:latin typeface="Calibri" pitchFamily="34" charset="0"/>
-                <a:ea typeface="Calibri" pitchFamily="34" charset="-122"/>
-                <a:cs typeface="Calibri" pitchFamily="34" charset="-120"/>
-              </a:rPr>
-              <a:t>+₹0.27 Cr</a:t>
+                  <a:srgbClr val="E11D48"/>
+                </a:solidFill>
+                <a:latin typeface="Calibri" pitchFamily="34" charset="0"/>
+                <a:ea typeface="Calibri" pitchFamily="34" charset="-122"/>
+                <a:cs typeface="Calibri" pitchFamily="34" charset="-120"/>
+              </a:rPr>
+              <a:t>−₹0.63 Cr</a:t>
             </a:r>
             <a:endParaRPr lang="en-US" sz="1150" dirty="0"/>
           </a:p>
@@ -11194,7 +11194,7 @@
                 <a:ea typeface="Calibri" pitchFamily="34" charset="-122"/>
                 <a:cs typeface="Calibri" pitchFamily="34" charset="-120"/>
               </a:rPr>
-              <a:t>−₹1.11 Cr</a:t>
+              <a:t>−₹1.47 Cr</a:t>
             </a:r>
             <a:endParaRPr lang="en-US" sz="1150" dirty="0"/>
           </a:p>
@@ -11233,7 +11233,7 @@
                 <a:ea typeface="Calibri" pitchFamily="34" charset="-122"/>
                 <a:cs typeface="Calibri" pitchFamily="34" charset="-120"/>
               </a:rPr>
-              <a:t>−₹2.15 Cr</a:t>
+              <a:t>−₹2.08 Cr</a:t>
             </a:r>
             <a:endParaRPr lang="en-US" sz="1150" dirty="0"/>
           </a:p>
@@ -11272,7 +11272,7 @@
                 <a:ea typeface="Calibri" pitchFamily="34" charset="-122"/>
                 <a:cs typeface="Calibri" pitchFamily="34" charset="-120"/>
               </a:rPr>
-              <a:t>Apr27 run-rate, ann.</a:t>
+              <a:t>Mar27 run-rate, ann.</a:t>
             </a:r>
             <a:endParaRPr lang="en-US" sz="1150" dirty="0"/>
           </a:p>
@@ -11311,7 +11311,7 @@
                 <a:ea typeface="Calibri" pitchFamily="34" charset="-122"/>
                 <a:cs typeface="Calibri" pitchFamily="34" charset="-120"/>
               </a:rPr>
-              <a:t>+₹3.13 Cr</a:t>
+              <a:t>+₹0.73 Cr</a:t>
             </a:r>
             <a:endParaRPr lang="en-US" sz="1150" dirty="0"/>
           </a:p>
@@ -11350,7 +11350,7 @@
                 <a:ea typeface="Calibri" pitchFamily="34" charset="-122"/>
                 <a:cs typeface="Calibri" pitchFamily="34" charset="-120"/>
               </a:rPr>
-              <a:t>+₹2.41 Cr</a:t>
+              <a:t>+₹0.73 Cr</a:t>
             </a:r>
             <a:endParaRPr lang="en-US" sz="1150" dirty="0"/>
           </a:p>
@@ -11565,7 +11565,7 @@
                 <a:ea typeface="Calibri" pitchFamily="34" charset="-122"/>
                 <a:cs typeface="Calibri" pitchFamily="34" charset="-120"/>
               </a:rPr>
-              <a:t>−₹2.15 Cr</a:t>
+              <a:t>−₹2.08 Cr</a:t>
             </a:r>
             <a:endParaRPr lang="en-US" sz="1150" dirty="0"/>
           </a:p>
@@ -11830,7 +11830,7 @@
         <p:spPr>
           <a:xfrm>
             <a:off x="7772400" y="5120640"/>
-            <a:ext cx="4023360" cy="457200"/>
+            <a:ext cx="4023360" cy="822960"/>
           </a:xfrm>
           <a:prstGeom prst="rect">
             <a:avLst/>
@@ -11854,7 +11854,7 @@
                 <a:ea typeface="Calibri" pitchFamily="34" charset="-122"/>
                 <a:cs typeface="Calibri" pitchFamily="34" charset="-120"/>
               </a:rPr>
-              <a:t>Scenario 1, annualising the April exit month. About ₹9.2 Cr a year, BLR led.</a:t>
+              <a:t>Scenario 1, annualising the March exit month, about ₹6.8 Cr a year. FY27 is BLR up-front only. The surveillance annuity adds a large recurring layer from FY28.</a:t>
             </a:r>
             <a:endParaRPr lang="en-US" sz="1050" dirty="0"/>
           </a:p>
